--- a/professor/DIW-Presentació.pptx
+++ b/professor/DIW-Presentació.pptx
@@ -5,13 +5,13 @@
     <p:sldMasterId id="2147483648" r:id="rId1"/>
   </p:sldMasterIdLst>
   <p:notesMasterIdLst>
-    <p:notesMasterId r:id="rId30"/>
+    <p:notesMasterId r:id="rId32"/>
   </p:notesMasterIdLst>
   <p:sldIdLst>
     <p:sldId id="256" r:id="rId2"/>
-    <p:sldId id="257" r:id="rId3"/>
-    <p:sldId id="258" r:id="rId4"/>
-    <p:sldId id="259" r:id="rId5"/>
+    <p:sldId id="259" r:id="rId3"/>
+    <p:sldId id="257" r:id="rId4"/>
+    <p:sldId id="258" r:id="rId5"/>
     <p:sldId id="260" r:id="rId6"/>
     <p:sldId id="261" r:id="rId7"/>
     <p:sldId id="262" r:id="rId8"/>
@@ -36,14 +36,16 @@
     <p:sldId id="279" r:id="rId27"/>
     <p:sldId id="280" r:id="rId28"/>
     <p:sldId id="281" r:id="rId29"/>
+    <p:sldId id="286" r:id="rId30"/>
+    <p:sldId id="287" r:id="rId31"/>
   </p:sldIdLst>
   <p:sldSz cx="14630400" cy="8229600"/>
   <p:notesSz cx="8229600" cy="14630400"/>
   <p:embeddedFontLst>
     <p:embeddedFont>
       <p:font typeface="Raleway Medium" pitchFamily="2" charset="0"/>
-      <p:regular r:id="rId31"/>
-      <p:italic r:id="rId32"/>
+      <p:regular r:id="rId33"/>
+      <p:italic r:id="rId34"/>
     </p:embeddedFont>
   </p:embeddedFontLst>
   <p:defaultTextStyle>
@@ -152,7 +154,7 @@
 <file path=ppt/revisionInfo.xml><?xml version="1.0" encoding="utf-8"?>
 <p1510:revInfo xmlns:a="http://schemas.openxmlformats.org/drawingml/2006/main" xmlns:r="http://schemas.openxmlformats.org/officeDocument/2006/relationships" xmlns:p1510="http://schemas.microsoft.com/office/powerpoint/2015/10/main">
   <p1510:revLst>
-    <p1510:client id="{24B76B96-06CE-0B2F-092D-57CD717CA4AF}" v="2" dt="2025-06-11T09:41:01.668"/>
+    <p1510:client id="{BD58D555-D586-B93C-C830-8E45CAFDEF8F}" v="100" dt="2025-06-12T07:21:16.644"/>
   </p1510:revLst>
 </p1510:revInfo>
 </file>
@@ -160,24 +162,24 @@
 <file path=ppt/changesInfos/changesInfo1.xml><?xml version="1.0" encoding="utf-8"?>
 <pc:chgInfo xmlns:a="http://schemas.openxmlformats.org/drawingml/2006/main" xmlns:r="http://schemas.openxmlformats.org/officeDocument/2006/relationships" xmlns:ac="http://schemas.microsoft.com/office/drawing/2013/main/command" xmlns:pc="http://schemas.microsoft.com/office/powerpoint/2013/main/command">
   <pc:docChgLst>
-    <pc:chgData name="Joan Sanchis Monzo" userId="S::joasanm6@upv.edu.es::99876fd9-023e-4589-b908-870bb2ae31d9" providerId="AD" clId="Web-{24B76B96-06CE-0B2F-092D-57CD717CA4AF}"/>
-    <pc:docChg chg="modSld">
-      <pc:chgData name="Joan Sanchis Monzo" userId="S::joasanm6@upv.edu.es::99876fd9-023e-4589-b908-870bb2ae31d9" providerId="AD" clId="Web-{24B76B96-06CE-0B2F-092D-57CD717CA4AF}" dt="2025-06-11T09:41:01.668" v="1" actId="20577"/>
+    <pc:chgData name="Joan Sanchis Monzo" userId="S::joasanm6@upv.edu.es::99876fd9-023e-4589-b908-870bb2ae31d9" providerId="AD" clId="Web-{BD58D555-D586-B93C-C830-8E45CAFDEF8F}"/>
+    <pc:docChg chg="addSld modSld">
+      <pc:chgData name="Joan Sanchis Monzo" userId="S::joasanm6@upv.edu.es::99876fd9-023e-4589-b908-870bb2ae31d9" providerId="AD" clId="Web-{BD58D555-D586-B93C-C830-8E45CAFDEF8F}" dt="2025-06-12T07:21:16.644" v="66" actId="20577"/>
       <pc:docMkLst>
         <pc:docMk/>
       </pc:docMkLst>
-      <pc:sldChg chg="modSp">
-        <pc:chgData name="Joan Sanchis Monzo" userId="S::joasanm6@upv.edu.es::99876fd9-023e-4589-b908-870bb2ae31d9" providerId="AD" clId="Web-{24B76B96-06CE-0B2F-092D-57CD717CA4AF}" dt="2025-06-11T09:41:01.668" v="1" actId="20577"/>
+      <pc:sldChg chg="addSp modSp new">
+        <pc:chgData name="Joan Sanchis Monzo" userId="S::joasanm6@upv.edu.es::99876fd9-023e-4589-b908-870bb2ae31d9" providerId="AD" clId="Web-{BD58D555-D586-B93C-C830-8E45CAFDEF8F}" dt="2025-06-12T07:21:16.644" v="66" actId="20577"/>
         <pc:sldMkLst>
           <pc:docMk/>
-          <pc:sldMk cId="0" sldId="261"/>
+          <pc:sldMk cId="1580748575" sldId="287"/>
         </pc:sldMkLst>
-        <pc:spChg chg="mod">
-          <ac:chgData name="Joan Sanchis Monzo" userId="S::joasanm6@upv.edu.es::99876fd9-023e-4589-b908-870bb2ae31d9" providerId="AD" clId="Web-{24B76B96-06CE-0B2F-092D-57CD717CA4AF}" dt="2025-06-11T09:41:01.668" v="1" actId="20577"/>
+        <pc:spChg chg="add mod">
+          <ac:chgData name="Joan Sanchis Monzo" userId="S::joasanm6@upv.edu.es::99876fd9-023e-4589-b908-870bb2ae31d9" providerId="AD" clId="Web-{BD58D555-D586-B93C-C830-8E45CAFDEF8F}" dt="2025-06-12T07:21:16.644" v="66" actId="20577"/>
           <ac:spMkLst>
             <pc:docMk/>
-            <pc:sldMk cId="0" sldId="261"/>
-            <ac:spMk id="9" creationId="{00000000-0000-0000-0000-000000000000}"/>
+            <pc:sldMk cId="1580748575" sldId="287"/>
+            <ac:spMk id="2" creationId="{B75A22D7-2221-F6D2-CA54-DF4307E542BE}"/>
           </ac:spMkLst>
         </pc:spChg>
       </pc:sldChg>
@@ -439,7 +441,262 @@
           <a:bodyPr/>
           <a:lstStyle/>
           <a:p>
-            <a:endParaRPr lang="en-US" dirty="0"/>
+            <a:r>
+              <a:rPr lang="en-US" dirty="0"/>
+              <a:t>Primer </a:t>
+            </a:r>
+            <a:r>
+              <a:rPr lang="en-US" dirty="0" err="1"/>
+              <a:t>Facilitar</a:t>
+            </a:r>
+            <a:r>
+              <a:rPr lang="en-US" dirty="0"/>
+              <a:t> les reserves de les </a:t>
+            </a:r>
+            <a:r>
+              <a:rPr lang="en-US" dirty="0" err="1"/>
+              <a:t>instalacions</a:t>
+            </a:r>
+            <a:r>
+              <a:rPr lang="en-US" dirty="0"/>
+              <a:t>, </a:t>
+            </a:r>
+            <a:r>
+              <a:rPr lang="en-US" dirty="0" err="1"/>
+              <a:t>permetent</a:t>
+            </a:r>
+            <a:r>
+              <a:rPr lang="en-US" dirty="0"/>
+              <a:t> </a:t>
+            </a:r>
+            <a:r>
+              <a:rPr lang="en-US" dirty="0" err="1"/>
+              <a:t>als</a:t>
+            </a:r>
+            <a:r>
+              <a:rPr lang="en-US" dirty="0"/>
+              <a:t> </a:t>
+            </a:r>
+            <a:r>
+              <a:rPr lang="en-US" dirty="0" err="1"/>
+              <a:t>usuaris</a:t>
+            </a:r>
+            <a:r>
+              <a:rPr lang="en-US" dirty="0"/>
+              <a:t> completer </a:t>
+            </a:r>
+            <a:r>
+              <a:rPr lang="en-US" dirty="0" err="1"/>
+              <a:t>el</a:t>
+            </a:r>
+            <a:r>
+              <a:rPr lang="en-US" dirty="0"/>
+              <a:t> process de </a:t>
+            </a:r>
+            <a:r>
+              <a:rPr lang="en-US" dirty="0" err="1"/>
+              <a:t>reserva</a:t>
+            </a:r>
+            <a:r>
+              <a:rPr lang="en-US" dirty="0"/>
+              <a:t> de </a:t>
+            </a:r>
+            <a:r>
+              <a:rPr lang="en-US" dirty="0" err="1"/>
+              <a:t>manera</a:t>
+            </a:r>
+            <a:r>
+              <a:rPr lang="en-US" dirty="0"/>
+              <a:t> </a:t>
+            </a:r>
+            <a:r>
+              <a:rPr lang="en-US" dirty="0" err="1"/>
+              <a:t>agil</a:t>
+            </a:r>
+            <a:r>
+              <a:rPr lang="en-US" dirty="0"/>
+              <a:t> I </a:t>
+            </a:r>
+            <a:r>
+              <a:rPr lang="en-US" dirty="0" err="1"/>
+              <a:t>intuituva</a:t>
+            </a:r>
+            <a:r>
+              <a:rPr lang="en-US" dirty="0"/>
+              <a:t>.</a:t>
+            </a:r>
+            <a:br>
+              <a:rPr lang="en-US" dirty="0"/>
+            </a:br>
+            <a:r>
+              <a:rPr lang="en-US" dirty="0" err="1"/>
+              <a:t>Segon</a:t>
+            </a:r>
+            <a:r>
+              <a:rPr lang="en-US" dirty="0"/>
+              <a:t> Crear </a:t>
+            </a:r>
+            <a:r>
+              <a:rPr lang="en-US" dirty="0" err="1"/>
+              <a:t>una</a:t>
+            </a:r>
+            <a:r>
+              <a:rPr lang="en-US" dirty="0"/>
+              <a:t> </a:t>
+            </a:r>
+            <a:r>
+              <a:rPr lang="en-US" dirty="0" err="1"/>
+              <a:t>interficie</a:t>
+            </a:r>
+            <a:r>
+              <a:rPr lang="en-US" dirty="0"/>
+              <a:t> adaptable, </a:t>
+            </a:r>
+            <a:r>
+              <a:rPr lang="en-US" dirty="0" err="1"/>
+              <a:t>Desenvolupar</a:t>
+            </a:r>
+            <a:r>
+              <a:rPr lang="en-US" dirty="0"/>
+              <a:t> un </a:t>
+            </a:r>
+            <a:r>
+              <a:rPr lang="en-US" dirty="0" err="1"/>
+              <a:t>diseny</a:t>
+            </a:r>
+            <a:r>
+              <a:rPr lang="en-US" dirty="0"/>
+              <a:t> </a:t>
+            </a:r>
+            <a:r>
+              <a:rPr lang="en-US" dirty="0" err="1"/>
+              <a:t>responsiu</a:t>
+            </a:r>
+            <a:r>
+              <a:rPr lang="en-US" dirty="0"/>
+              <a:t> que </a:t>
+            </a:r>
+            <a:r>
+              <a:rPr lang="en-US" dirty="0" err="1"/>
+              <a:t>s’adapte</a:t>
+            </a:r>
+            <a:r>
+              <a:rPr lang="en-US" dirty="0"/>
+              <a:t> a </a:t>
+            </a:r>
+            <a:r>
+              <a:rPr lang="en-US" dirty="0" err="1"/>
+              <a:t>qualsevol</a:t>
+            </a:r>
+            <a:r>
+              <a:rPr lang="en-US" dirty="0"/>
+              <a:t> </a:t>
+            </a:r>
+            <a:r>
+              <a:rPr lang="en-US" dirty="0" err="1"/>
+              <a:t>dispositiu</a:t>
+            </a:r>
+            <a:br>
+              <a:rPr lang="en-US" dirty="0"/>
+            </a:br>
+            <a:r>
+              <a:rPr lang="en-US" dirty="0" err="1"/>
+              <a:t>Tercer</a:t>
+            </a:r>
+            <a:r>
+              <a:rPr lang="en-US" dirty="0"/>
+              <a:t>, </a:t>
+            </a:r>
+            <a:r>
+              <a:rPr lang="en-US" dirty="0" err="1"/>
+              <a:t>avaluar</a:t>
+            </a:r>
+            <a:r>
+              <a:rPr lang="en-US" dirty="0"/>
+              <a:t> competencies integrals, </a:t>
+            </a:r>
+            <a:r>
+              <a:rPr lang="en-US" dirty="0" err="1"/>
+              <a:t>utilitzant</a:t>
+            </a:r>
+            <a:r>
+              <a:rPr lang="en-US" dirty="0"/>
+              <a:t> com a instrument </a:t>
+            </a:r>
+            <a:r>
+              <a:rPr lang="en-US" dirty="0" err="1"/>
+              <a:t>d’avaluacio</a:t>
+            </a:r>
+            <a:r>
+              <a:rPr lang="en-US" dirty="0"/>
+              <a:t> les competencies del </a:t>
+            </a:r>
+            <a:r>
+              <a:rPr lang="en-US" dirty="0" err="1"/>
+              <a:t>modul</a:t>
+            </a:r>
+            <a:br>
+              <a:rPr lang="en-US" dirty="0"/>
+            </a:br>
+            <a:r>
+              <a:rPr lang="en-US" dirty="0"/>
+              <a:t>Quart </a:t>
+            </a:r>
+            <a:r>
+              <a:rPr lang="en-US" dirty="0" err="1"/>
+              <a:t>simular</a:t>
+            </a:r>
+            <a:r>
+              <a:rPr lang="en-US" dirty="0"/>
+              <a:t> un </a:t>
+            </a:r>
+            <a:r>
+              <a:rPr lang="en-US" dirty="0" err="1"/>
+              <a:t>entorn</a:t>
+            </a:r>
+            <a:r>
+              <a:rPr lang="en-US" dirty="0"/>
+              <a:t> </a:t>
+            </a:r>
+            <a:r>
+              <a:rPr lang="en-US" dirty="0" err="1"/>
+              <a:t>profecional</a:t>
+            </a:r>
+            <a:r>
+              <a:rPr lang="en-US" dirty="0"/>
+              <a:t>, integrant </a:t>
+            </a:r>
+            <a:r>
+              <a:rPr lang="en-US" dirty="0" err="1"/>
+              <a:t>coneixements</a:t>
+            </a:r>
+            <a:r>
+              <a:rPr lang="en-US" dirty="0"/>
+              <a:t> </a:t>
+            </a:r>
+            <a:r>
+              <a:rPr lang="en-US" dirty="0" err="1"/>
+              <a:t>en</a:t>
+            </a:r>
+            <a:r>
+              <a:rPr lang="en-US" dirty="0"/>
+              <a:t> un context similar a la </a:t>
+            </a:r>
+            <a:r>
+              <a:rPr lang="en-US" dirty="0" err="1"/>
+              <a:t>vida</a:t>
+            </a:r>
+            <a:r>
+              <a:rPr lang="en-US" dirty="0"/>
+              <a:t> real.</a:t>
+            </a:r>
+            <a:br>
+              <a:rPr lang="en-US" dirty="0"/>
+            </a:br>
+            <a:r>
+              <a:rPr lang="en-US" dirty="0"/>
+              <a:t>	</a:t>
+            </a:r>
           </a:p>
         </p:txBody>
       </p:sp>
@@ -523,7 +780,383 @@
           <a:bodyPr/>
           <a:lstStyle/>
           <a:p>
-            <a:endParaRPr lang="en-US" dirty="0"/>
+            <a:r>
+              <a:rPr lang="en-US" dirty="0"/>
+              <a:t>La </a:t>
+            </a:r>
+            <a:r>
+              <a:rPr lang="en-US" dirty="0" err="1"/>
+              <a:t>metodologia</a:t>
+            </a:r>
+            <a:r>
+              <a:rPr lang="en-US" dirty="0"/>
+              <a:t> principal que hem </a:t>
+            </a:r>
+            <a:r>
+              <a:rPr lang="en-US" dirty="0" err="1"/>
+              <a:t>adoptat</a:t>
+            </a:r>
+            <a:r>
+              <a:rPr lang="en-US" dirty="0"/>
+              <a:t> </a:t>
+            </a:r>
+            <a:r>
+              <a:rPr lang="en-US" dirty="0" err="1"/>
+              <a:t>en</a:t>
+            </a:r>
+            <a:r>
+              <a:rPr lang="en-US" dirty="0"/>
+              <a:t> </a:t>
+            </a:r>
+            <a:r>
+              <a:rPr lang="en-US" dirty="0" err="1"/>
+              <a:t>aquest</a:t>
+            </a:r>
+            <a:r>
+              <a:rPr lang="en-US" dirty="0"/>
+              <a:t> </a:t>
+            </a:r>
+            <a:r>
+              <a:rPr lang="en-US" dirty="0" err="1"/>
+              <a:t>progecte</a:t>
+            </a:r>
+            <a:r>
+              <a:rPr lang="en-US" dirty="0"/>
+              <a:t> es </a:t>
+            </a:r>
+            <a:r>
+              <a:rPr lang="en-US" dirty="0" err="1"/>
+              <a:t>l’aprenentatge</a:t>
+            </a:r>
+            <a:r>
+              <a:rPr lang="en-US" dirty="0"/>
+              <a:t> </a:t>
+            </a:r>
+            <a:r>
+              <a:rPr lang="en-US" dirty="0" err="1"/>
+              <a:t>basat</a:t>
+            </a:r>
+            <a:r>
+              <a:rPr lang="en-US" dirty="0"/>
+              <a:t> </a:t>
+            </a:r>
+            <a:r>
+              <a:rPr lang="en-US" dirty="0" err="1"/>
+              <a:t>en</a:t>
+            </a:r>
+            <a:r>
+              <a:rPr lang="en-US" dirty="0"/>
+              <a:t> </a:t>
+            </a:r>
+            <a:r>
+              <a:rPr lang="en-US" dirty="0" err="1"/>
+              <a:t>projectes</a:t>
+            </a:r>
+            <a:r>
+              <a:rPr lang="en-US" dirty="0"/>
+              <a:t>. On </a:t>
+            </a:r>
+            <a:r>
+              <a:rPr lang="en-US" dirty="0" err="1"/>
+              <a:t>els</a:t>
+            </a:r>
+            <a:r>
+              <a:rPr lang="en-US" dirty="0"/>
+              <a:t> </a:t>
+            </a:r>
+            <a:r>
+              <a:rPr lang="en-US" dirty="0" err="1"/>
+              <a:t>alumnes</a:t>
+            </a:r>
+            <a:r>
+              <a:rPr lang="en-US" dirty="0"/>
+              <a:t> </a:t>
+            </a:r>
+            <a:r>
+              <a:rPr lang="en-US" dirty="0" err="1"/>
+              <a:t>desenvoluparan</a:t>
+            </a:r>
+            <a:r>
+              <a:rPr lang="en-US" dirty="0"/>
+              <a:t> </a:t>
+            </a:r>
+            <a:r>
+              <a:rPr lang="en-US" dirty="0" err="1"/>
+              <a:t>el</a:t>
+            </a:r>
+            <a:r>
+              <a:rPr lang="en-US" dirty="0"/>
+              <a:t> front-end de </a:t>
+            </a:r>
+            <a:r>
+              <a:rPr lang="en-US" dirty="0" err="1"/>
+              <a:t>l’aplicacio</a:t>
+            </a:r>
+            <a:r>
+              <a:rPr lang="en-US" dirty="0"/>
+              <a:t> </a:t>
+            </a:r>
+            <a:r>
+              <a:rPr lang="en-US" dirty="0" err="1"/>
+              <a:t>amb</a:t>
+            </a:r>
+            <a:r>
+              <a:rPr lang="en-US" dirty="0"/>
+              <a:t> </a:t>
+            </a:r>
+            <a:r>
+              <a:rPr lang="en-US" dirty="0" err="1"/>
+              <a:t>grups</a:t>
+            </a:r>
+            <a:r>
+              <a:rPr lang="en-US" dirty="0"/>
+              <a:t> de 3 o 4 </a:t>
+            </a:r>
+            <a:r>
+              <a:rPr lang="en-US" dirty="0" err="1"/>
+              <a:t>persones</a:t>
+            </a:r>
+            <a:r>
+              <a:rPr lang="en-US" dirty="0"/>
+              <a:t> </a:t>
+            </a:r>
+            <a:r>
+              <a:rPr lang="en-US" dirty="0" err="1"/>
+              <a:t>combinant</a:t>
+            </a:r>
+            <a:r>
+              <a:rPr lang="en-US" dirty="0"/>
+              <a:t> Teoria I practica.</a:t>
+            </a:r>
+            <a:br>
+              <a:rPr lang="en-US" dirty="0"/>
+            </a:br>
+            <a:r>
+              <a:rPr lang="en-US" dirty="0"/>
+              <a:t>La </a:t>
+            </a:r>
+            <a:r>
+              <a:rPr lang="en-US" dirty="0" err="1"/>
+              <a:t>investigacio</a:t>
+            </a:r>
+            <a:r>
+              <a:rPr lang="en-US" dirty="0"/>
+              <a:t> </a:t>
+            </a:r>
+            <a:r>
+              <a:rPr lang="en-US" dirty="0" err="1"/>
+              <a:t>autonoma</a:t>
+            </a:r>
+            <a:r>
+              <a:rPr lang="en-US" dirty="0"/>
+              <a:t>, </a:t>
+            </a:r>
+            <a:r>
+              <a:rPr lang="en-US" dirty="0" err="1"/>
+              <a:t>fomentat</a:t>
+            </a:r>
+            <a:r>
+              <a:rPr lang="en-US" dirty="0"/>
+              <a:t> </a:t>
+            </a:r>
+            <a:r>
+              <a:rPr lang="en-US" dirty="0" err="1"/>
+              <a:t>l’aprenentage</a:t>
+            </a:r>
+            <a:r>
+              <a:rPr lang="en-US" dirty="0"/>
+              <a:t> </a:t>
+            </a:r>
+            <a:r>
+              <a:rPr lang="en-US" dirty="0" err="1"/>
+              <a:t>basat</a:t>
+            </a:r>
+            <a:r>
+              <a:rPr lang="en-US" dirty="0"/>
+              <a:t> </a:t>
+            </a:r>
+            <a:r>
+              <a:rPr lang="en-US" dirty="0" err="1"/>
+              <a:t>en</a:t>
+            </a:r>
+            <a:r>
+              <a:rPr lang="en-US" dirty="0"/>
+              <a:t> </a:t>
+            </a:r>
+            <a:r>
+              <a:rPr lang="en-US" dirty="0" err="1"/>
+              <a:t>problemes</a:t>
+            </a:r>
+            <a:r>
+              <a:rPr lang="en-US" dirty="0"/>
+              <a:t> I la </a:t>
+            </a:r>
+            <a:r>
+              <a:rPr lang="en-US" dirty="0" err="1"/>
+              <a:t>recerca</a:t>
+            </a:r>
+            <a:r>
+              <a:rPr lang="en-US" dirty="0"/>
+              <a:t> de </a:t>
+            </a:r>
+            <a:r>
+              <a:rPr lang="en-US" dirty="0" err="1"/>
+              <a:t>solucions</a:t>
+            </a:r>
+            <a:r>
+              <a:rPr lang="en-US" dirty="0"/>
+              <a:t> per part de </a:t>
+            </a:r>
+            <a:r>
+              <a:rPr lang="en-US" dirty="0" err="1"/>
+              <a:t>l’alumnat</a:t>
+            </a:r>
+            <a:r>
+              <a:rPr lang="en-US" dirty="0"/>
+              <a:t>.</a:t>
+            </a:r>
+            <a:br>
+              <a:rPr lang="en-US" dirty="0"/>
+            </a:br>
+            <a:r>
+              <a:rPr lang="en-US" dirty="0"/>
+              <a:t>En </a:t>
+            </a:r>
+            <a:r>
+              <a:rPr lang="en-US" dirty="0" err="1"/>
+              <a:t>tercer</a:t>
+            </a:r>
+            <a:r>
+              <a:rPr lang="en-US" dirty="0"/>
+              <a:t> </a:t>
+            </a:r>
+            <a:r>
+              <a:rPr lang="en-US" dirty="0" err="1"/>
+              <a:t>lloc</a:t>
+            </a:r>
+            <a:r>
+              <a:rPr lang="en-US" dirty="0"/>
+              <a:t> </a:t>
+            </a:r>
+            <a:r>
+              <a:rPr lang="en-US" dirty="0" err="1"/>
+              <a:t>l’us</a:t>
+            </a:r>
+            <a:r>
+              <a:rPr lang="en-US" dirty="0"/>
+              <a:t> de methodologies </a:t>
+            </a:r>
+            <a:r>
+              <a:rPr lang="en-US" dirty="0" err="1"/>
+              <a:t>agils</a:t>
+            </a:r>
+            <a:r>
+              <a:rPr lang="en-US" dirty="0"/>
+              <a:t> per a la gestio efficient del </a:t>
+            </a:r>
+            <a:r>
+              <a:rPr lang="en-US" dirty="0" err="1"/>
+              <a:t>projecte</a:t>
+            </a:r>
+            <a:r>
+              <a:rPr lang="en-US" dirty="0"/>
+              <a:t> com </a:t>
+            </a:r>
+            <a:r>
+              <a:rPr lang="en-US" dirty="0" err="1"/>
+              <a:t>Metodologia</a:t>
+            </a:r>
+            <a:r>
+              <a:rPr lang="en-US" dirty="0"/>
+              <a:t> Scrum</a:t>
+            </a:r>
+            <a:br>
+              <a:rPr lang="en-US" dirty="0"/>
+            </a:br>
+            <a:r>
+              <a:rPr lang="en-US" dirty="0"/>
+              <a:t>En quart </a:t>
+            </a:r>
+            <a:r>
+              <a:rPr lang="en-US" dirty="0" err="1"/>
+              <a:t>lloc</a:t>
+            </a:r>
+            <a:r>
+              <a:rPr lang="en-US" dirty="0"/>
+              <a:t> </a:t>
+            </a:r>
+            <a:r>
+              <a:rPr lang="en-US" dirty="0" err="1"/>
+              <a:t>utilitzarem</a:t>
+            </a:r>
+            <a:r>
+              <a:rPr lang="en-US" dirty="0"/>
+              <a:t> un </a:t>
+            </a:r>
+            <a:r>
+              <a:rPr lang="en-US" dirty="0" err="1"/>
+              <a:t>firback</a:t>
+            </a:r>
+            <a:r>
+              <a:rPr lang="en-US" dirty="0"/>
+              <a:t> </a:t>
+            </a:r>
+            <a:r>
+              <a:rPr lang="en-US" dirty="0" err="1"/>
+              <a:t>constructiu</a:t>
+            </a:r>
+            <a:r>
+              <a:rPr lang="en-US" dirty="0"/>
+              <a:t> per </a:t>
+            </a:r>
+            <a:r>
+              <a:rPr lang="en-US" dirty="0" err="1"/>
+              <a:t>oferir</a:t>
+            </a:r>
+            <a:r>
+              <a:rPr lang="en-US" dirty="0"/>
+              <a:t> </a:t>
+            </a:r>
+            <a:r>
+              <a:rPr lang="en-US" dirty="0" err="1"/>
+              <a:t>retroalimentacio</a:t>
+            </a:r>
+            <a:r>
+              <a:rPr lang="en-US" dirty="0"/>
+              <a:t> al </a:t>
+            </a:r>
+            <a:r>
+              <a:rPr lang="en-US" dirty="0" err="1"/>
+              <a:t>treball</a:t>
+            </a:r>
+            <a:r>
+              <a:rPr lang="en-US" dirty="0"/>
+              <a:t> dels </a:t>
+            </a:r>
+            <a:r>
+              <a:rPr lang="en-US" dirty="0" err="1"/>
+              <a:t>alumnes</a:t>
+            </a:r>
+            <a:r>
+              <a:rPr lang="en-US" dirty="0"/>
+              <a:t> </a:t>
+            </a:r>
+            <a:r>
+              <a:rPr lang="en-US" dirty="0" err="1"/>
+              <a:t>amb</a:t>
+            </a:r>
+            <a:r>
+              <a:rPr lang="en-US" dirty="0"/>
+              <a:t> revisions </a:t>
+            </a:r>
+            <a:r>
+              <a:rPr lang="en-US" dirty="0" err="1"/>
+              <a:t>periodiques</a:t>
+            </a:r>
+            <a:r>
+              <a:rPr lang="en-US" dirty="0"/>
+              <a:t>.</a:t>
+            </a:r>
           </a:p>
         </p:txBody>
       </p:sp>
@@ -607,7 +1240,395 @@
           <a:bodyPr/>
           <a:lstStyle/>
           <a:p>
-            <a:endParaRPr lang="en-US" dirty="0"/>
+            <a:r>
+              <a:rPr lang="en-US" dirty="0"/>
+              <a:t>Com </a:t>
+            </a:r>
+            <a:r>
+              <a:rPr lang="en-US" dirty="0" err="1"/>
+              <a:t>podem</a:t>
+            </a:r>
+            <a:r>
+              <a:rPr lang="en-US" dirty="0"/>
+              <a:t> observer </a:t>
+            </a:r>
+            <a:r>
+              <a:rPr lang="en-US" dirty="0" err="1"/>
+              <a:t>en</a:t>
+            </a:r>
+            <a:r>
+              <a:rPr lang="en-US" dirty="0"/>
+              <a:t> </a:t>
+            </a:r>
+            <a:r>
+              <a:rPr lang="en-US" dirty="0" err="1"/>
+              <a:t>el</a:t>
+            </a:r>
+            <a:r>
+              <a:rPr lang="en-US" dirty="0"/>
+              <a:t> </a:t>
+            </a:r>
+            <a:r>
+              <a:rPr lang="en-US" dirty="0" err="1"/>
+              <a:t>diagrama</a:t>
+            </a:r>
+            <a:r>
+              <a:rPr lang="en-US" dirty="0"/>
+              <a:t>, </a:t>
+            </a:r>
+            <a:r>
+              <a:rPr lang="en-US" dirty="0" err="1"/>
+              <a:t>distinguem</a:t>
+            </a:r>
+            <a:r>
+              <a:rPr lang="en-US" dirty="0"/>
+              <a:t> </a:t>
+            </a:r>
+            <a:r>
+              <a:rPr lang="en-US" dirty="0" err="1"/>
+              <a:t>clarament</a:t>
+            </a:r>
+            <a:r>
+              <a:rPr lang="en-US" dirty="0"/>
+              <a:t> 3 components </a:t>
+            </a:r>
+            <a:r>
+              <a:rPr lang="en-US" dirty="0" err="1"/>
+              <a:t>proncipals</a:t>
+            </a:r>
+            <a:r>
+              <a:rPr lang="en-US" dirty="0"/>
+              <a:t>.</a:t>
+            </a:r>
+            <a:br>
+              <a:rPr lang="en-US" dirty="0"/>
+            </a:br>
+            <a:r>
+              <a:rPr lang="en-US" dirty="0"/>
+              <a:t>El front-end on hem </a:t>
+            </a:r>
+            <a:r>
+              <a:rPr lang="en-US" dirty="0" err="1"/>
+              <a:t>optat</a:t>
+            </a:r>
+            <a:r>
+              <a:rPr lang="en-US" dirty="0"/>
+              <a:t> per </a:t>
+            </a:r>
+            <a:r>
+              <a:rPr lang="en-US" dirty="0" err="1"/>
+              <a:t>una</a:t>
+            </a:r>
+            <a:r>
+              <a:rPr lang="en-US" dirty="0"/>
+              <a:t> </a:t>
+            </a:r>
+            <a:r>
+              <a:rPr lang="en-US" dirty="0" err="1"/>
+              <a:t>arquitectura</a:t>
+            </a:r>
+            <a:r>
+              <a:rPr lang="en-US" dirty="0"/>
+              <a:t> Single page application, </a:t>
+            </a:r>
+            <a:r>
+              <a:rPr lang="en-US" dirty="0" err="1"/>
+              <a:t>utilitzant</a:t>
+            </a:r>
+            <a:r>
+              <a:rPr lang="en-US" dirty="0"/>
+              <a:t> </a:t>
+            </a:r>
+            <a:r>
+              <a:rPr lang="en-US" dirty="0" err="1"/>
+              <a:t>el</a:t>
+            </a:r>
+            <a:r>
+              <a:rPr lang="en-US" dirty="0"/>
+              <a:t> framework Angular. </a:t>
+            </a:r>
+            <a:r>
+              <a:rPr lang="en-US" dirty="0" err="1"/>
+              <a:t>Aquesta</a:t>
+            </a:r>
+            <a:r>
+              <a:rPr lang="en-US" dirty="0"/>
+              <a:t> </a:t>
+            </a:r>
+            <a:r>
+              <a:rPr lang="en-US" dirty="0" err="1"/>
+              <a:t>capa</a:t>
+            </a:r>
+            <a:r>
+              <a:rPr lang="en-US" dirty="0"/>
+              <a:t> </a:t>
+            </a:r>
+            <a:r>
+              <a:rPr lang="en-US" dirty="0" err="1"/>
+              <a:t>s’encarrega</a:t>
+            </a:r>
+            <a:r>
+              <a:rPr lang="en-US" dirty="0"/>
+              <a:t> de la </a:t>
+            </a:r>
+            <a:r>
+              <a:rPr lang="en-US" dirty="0" err="1"/>
+              <a:t>interaccio</a:t>
+            </a:r>
+            <a:r>
+              <a:rPr lang="en-US" dirty="0"/>
+              <a:t> </a:t>
+            </a:r>
+            <a:r>
+              <a:rPr lang="en-US" dirty="0" err="1"/>
+              <a:t>directa</a:t>
+            </a:r>
+            <a:r>
+              <a:rPr lang="en-US" dirty="0"/>
+              <a:t> </a:t>
+            </a:r>
+            <a:r>
+              <a:rPr lang="en-US" dirty="0" err="1"/>
+              <a:t>amb</a:t>
+            </a:r>
+            <a:r>
+              <a:rPr lang="en-US" dirty="0"/>
+              <a:t> </a:t>
+            </a:r>
+            <a:r>
+              <a:rPr lang="en-US" dirty="0" err="1"/>
+              <a:t>l’usuari</a:t>
+            </a:r>
+            <a:r>
+              <a:rPr lang="en-US" dirty="0"/>
+              <a:t> sense </a:t>
+            </a:r>
+            <a:r>
+              <a:rPr lang="en-US" dirty="0" err="1"/>
+              <a:t>necesitat</a:t>
+            </a:r>
+            <a:r>
+              <a:rPr lang="en-US" dirty="0"/>
+              <a:t> </a:t>
+            </a:r>
+            <a:r>
+              <a:rPr lang="en-US" dirty="0" err="1"/>
+              <a:t>d’estar</a:t>
+            </a:r>
+            <a:r>
+              <a:rPr lang="en-US" dirty="0"/>
+              <a:t> </a:t>
+            </a:r>
+            <a:r>
+              <a:rPr lang="en-US" dirty="0" err="1"/>
+              <a:t>carregant</a:t>
+            </a:r>
+            <a:r>
+              <a:rPr lang="en-US" dirty="0"/>
+              <a:t> la </a:t>
+            </a:r>
+            <a:r>
+              <a:rPr lang="en-US" dirty="0" err="1"/>
+              <a:t>pagina</a:t>
+            </a:r>
+            <a:r>
+              <a:rPr lang="en-US" dirty="0"/>
+              <a:t>.</a:t>
+            </a:r>
+            <a:br>
+              <a:rPr lang="en-US" dirty="0"/>
+            </a:br>
+            <a:r>
+              <a:rPr lang="en-US" dirty="0"/>
+              <a:t>Backend </a:t>
+            </a:r>
+            <a:r>
+              <a:rPr lang="en-US" dirty="0" err="1"/>
+              <a:t>Desenvolupat</a:t>
+            </a:r>
+            <a:r>
+              <a:rPr lang="en-US" dirty="0"/>
+              <a:t> mab Laravel </a:t>
+            </a:r>
+            <a:r>
+              <a:rPr lang="en-US" dirty="0" err="1"/>
+              <a:t>actua</a:t>
+            </a:r>
+            <a:r>
+              <a:rPr lang="en-US" dirty="0"/>
+              <a:t> com a </a:t>
+            </a:r>
+            <a:r>
+              <a:rPr lang="en-US" dirty="0" err="1"/>
+              <a:t>intermediari</a:t>
+            </a:r>
+            <a:r>
+              <a:rPr lang="en-US" dirty="0"/>
+              <a:t> </a:t>
+            </a:r>
+            <a:r>
+              <a:rPr lang="en-US" dirty="0" err="1"/>
+              <a:t>amb</a:t>
+            </a:r>
+            <a:r>
+              <a:rPr lang="en-US" dirty="0"/>
+              <a:t> </a:t>
+            </a:r>
+            <a:r>
+              <a:rPr lang="en-US" dirty="0" err="1"/>
+              <a:t>el</a:t>
+            </a:r>
+            <a:r>
+              <a:rPr lang="en-US" dirty="0"/>
+              <a:t> client I la base de </a:t>
+            </a:r>
+            <a:r>
+              <a:rPr lang="en-US" dirty="0" err="1"/>
+              <a:t>dades</a:t>
+            </a:r>
+            <a:r>
+              <a:rPr lang="en-US" dirty="0"/>
+              <a:t> </a:t>
+            </a:r>
+            <a:r>
+              <a:rPr lang="en-US" dirty="0" err="1"/>
+              <a:t>proporcionant</a:t>
+            </a:r>
+            <a:r>
+              <a:rPr lang="en-US" dirty="0"/>
+              <a:t> </a:t>
+            </a:r>
+            <a:r>
+              <a:rPr lang="en-US" dirty="0" err="1"/>
+              <a:t>una</a:t>
+            </a:r>
+            <a:r>
+              <a:rPr lang="en-US" dirty="0"/>
+              <a:t> API per a les </a:t>
+            </a:r>
+            <a:r>
+              <a:rPr lang="en-US" dirty="0" err="1"/>
+              <a:t>operacions</a:t>
+            </a:r>
+            <a:r>
+              <a:rPr lang="en-US" dirty="0"/>
+              <a:t>. </a:t>
+            </a:r>
+            <a:r>
+              <a:rPr lang="en-US" dirty="0" err="1"/>
+              <a:t>Gestiona</a:t>
+            </a:r>
+            <a:r>
+              <a:rPr lang="en-US" dirty="0"/>
+              <a:t> la </a:t>
+            </a:r>
+            <a:r>
+              <a:rPr lang="en-US" dirty="0" err="1"/>
+              <a:t>logica</a:t>
+            </a:r>
+            <a:r>
+              <a:rPr lang="en-US" dirty="0"/>
+              <a:t> de </a:t>
+            </a:r>
+            <a:r>
+              <a:rPr lang="en-US" dirty="0" err="1"/>
+              <a:t>negici</a:t>
+            </a:r>
+            <a:r>
+              <a:rPr lang="en-US" dirty="0"/>
+              <a:t> </a:t>
+            </a:r>
+            <a:r>
+              <a:rPr lang="en-US" dirty="0" err="1"/>
+              <a:t>retorna</a:t>
+            </a:r>
+            <a:r>
+              <a:rPr lang="en-US" dirty="0"/>
+              <a:t> les </a:t>
+            </a:r>
+            <a:r>
+              <a:rPr lang="en-US" dirty="0" err="1"/>
+              <a:t>dades</a:t>
+            </a:r>
+            <a:r>
+              <a:rPr lang="en-US" dirty="0"/>
+              <a:t> </a:t>
+            </a:r>
+            <a:r>
+              <a:rPr lang="en-US" dirty="0" err="1"/>
+              <a:t>en</a:t>
+            </a:r>
+            <a:r>
+              <a:rPr lang="en-US" dirty="0"/>
+              <a:t> format JSON.</a:t>
+            </a:r>
+            <a:br>
+              <a:rPr lang="en-US" dirty="0"/>
+            </a:br>
+            <a:r>
+              <a:rPr lang="en-US" dirty="0" err="1"/>
+              <a:t>Finalment</a:t>
+            </a:r>
+            <a:r>
+              <a:rPr lang="en-US" dirty="0"/>
+              <a:t> per a la base de </a:t>
+            </a:r>
+            <a:r>
+              <a:rPr lang="en-US" dirty="0" err="1"/>
+              <a:t>dades</a:t>
+            </a:r>
+            <a:r>
+              <a:rPr lang="en-US" dirty="0"/>
+              <a:t> hem </a:t>
+            </a:r>
+            <a:r>
+              <a:rPr lang="en-US" dirty="0" err="1"/>
+              <a:t>utilitzat</a:t>
+            </a:r>
+            <a:r>
+              <a:rPr lang="en-US" dirty="0"/>
+              <a:t> MYSQL com a Sistema de gestio de </a:t>
+            </a:r>
+            <a:r>
+              <a:rPr lang="en-US" dirty="0" err="1"/>
+              <a:t>tota</a:t>
+            </a:r>
+            <a:r>
+              <a:rPr lang="en-US" dirty="0"/>
+              <a:t> la </a:t>
+            </a:r>
+            <a:r>
+              <a:rPr lang="en-US" dirty="0" err="1"/>
+              <a:t>informacio</a:t>
+            </a:r>
+            <a:r>
+              <a:rPr lang="en-US" dirty="0"/>
+              <a:t> </a:t>
+            </a:r>
+            <a:r>
+              <a:rPr lang="en-US" dirty="0" err="1"/>
+              <a:t>necesaria</a:t>
+            </a:r>
+            <a:r>
+              <a:rPr lang="en-US" dirty="0"/>
+              <a:t> per al </a:t>
+            </a:r>
+            <a:r>
+              <a:rPr lang="en-US" dirty="0" err="1"/>
+              <a:t>funcionament</a:t>
+            </a:r>
+            <a:r>
+              <a:rPr lang="en-US" dirty="0"/>
+              <a:t> de </a:t>
+            </a:r>
+            <a:r>
+              <a:rPr lang="en-US" dirty="0" err="1"/>
+              <a:t>l’aplicacio</a:t>
+            </a:r>
+            <a:r>
+              <a:rPr lang="en-US" dirty="0"/>
+              <a:t>.</a:t>
+            </a:r>
           </a:p>
         </p:txBody>
       </p:sp>
@@ -691,6 +1712,100 @@
           <a:bodyPr/>
           <a:lstStyle/>
           <a:p>
+            <a:r>
+              <a:rPr lang="en-US" dirty="0"/>
+              <a:t>Com </a:t>
+            </a:r>
+            <a:r>
+              <a:rPr lang="en-US" dirty="0" err="1"/>
+              <a:t>podeu</a:t>
+            </a:r>
+            <a:r>
+              <a:rPr lang="en-US" dirty="0"/>
+              <a:t> </a:t>
+            </a:r>
+            <a:r>
+              <a:rPr lang="en-US" dirty="0" err="1"/>
+              <a:t>veure</a:t>
+            </a:r>
+            <a:r>
+              <a:rPr lang="en-US" dirty="0"/>
+              <a:t> </a:t>
+            </a:r>
+            <a:r>
+              <a:rPr lang="en-US" dirty="0" err="1"/>
+              <a:t>en</a:t>
+            </a:r>
+            <a:r>
+              <a:rPr lang="en-US" dirty="0"/>
+              <a:t> </a:t>
+            </a:r>
+            <a:r>
+              <a:rPr lang="en-US" dirty="0" err="1"/>
+              <a:t>el</a:t>
+            </a:r>
+            <a:r>
+              <a:rPr lang="en-US" dirty="0"/>
+              <a:t> </a:t>
+            </a:r>
+            <a:r>
+              <a:rPr lang="en-US" dirty="0" err="1"/>
+              <a:t>diagrama</a:t>
+            </a:r>
+            <a:r>
+              <a:rPr lang="en-US" dirty="0"/>
+              <a:t> de Gantt, </a:t>
+            </a:r>
+            <a:r>
+              <a:rPr lang="en-US" dirty="0" err="1"/>
+              <a:t>podeu</a:t>
+            </a:r>
+            <a:r>
+              <a:rPr lang="en-US" dirty="0"/>
+              <a:t> </a:t>
+            </a:r>
+            <a:r>
+              <a:rPr lang="en-US" dirty="0" err="1"/>
+              <a:t>veure</a:t>
+            </a:r>
+            <a:r>
+              <a:rPr lang="en-US" dirty="0"/>
+              <a:t> fins on </a:t>
+            </a:r>
+            <a:r>
+              <a:rPr lang="en-US" dirty="0" err="1"/>
+              <a:t>s’esten</a:t>
+            </a:r>
+            <a:r>
+              <a:rPr lang="en-US" dirty="0"/>
+              <a:t> </a:t>
+            </a:r>
+            <a:r>
+              <a:rPr lang="en-US" dirty="0" err="1"/>
+              <a:t>cada</a:t>
+            </a:r>
+            <a:r>
+              <a:rPr lang="en-US" dirty="0"/>
+              <a:t> </a:t>
+            </a:r>
+            <a:r>
+              <a:rPr lang="en-US" dirty="0" err="1"/>
+              <a:t>fase</a:t>
+            </a:r>
+            <a:r>
+              <a:rPr lang="en-US" dirty="0"/>
+              <a:t> de </a:t>
+            </a:r>
+            <a:r>
+              <a:rPr lang="en-US" dirty="0" err="1"/>
+              <a:t>desenvolupament</a:t>
+            </a:r>
+            <a:r>
+              <a:rPr lang="en-US" dirty="0"/>
+              <a:t>.</a:t>
+            </a:r>
+          </a:p>
+          <a:p>
             <a:endParaRPr lang="en-US" dirty="0"/>
           </a:p>
         </p:txBody>
@@ -775,6 +1890,626 @@
           <a:bodyPr/>
           <a:lstStyle/>
           <a:p>
+            <a:r>
+              <a:rPr lang="en-US" dirty="0" err="1"/>
+              <a:t>Fonamental</a:t>
+            </a:r>
+            <a:r>
+              <a:rPr lang="en-US" dirty="0"/>
+              <a:t> per a </a:t>
+            </a:r>
+            <a:r>
+              <a:rPr lang="en-US" dirty="0" err="1"/>
+              <a:t>establir</a:t>
+            </a:r>
+            <a:r>
+              <a:rPr lang="en-US" dirty="0"/>
+              <a:t> les bases del </a:t>
+            </a:r>
+            <a:r>
+              <a:rPr lang="en-US" dirty="0" err="1"/>
+              <a:t>projecte</a:t>
+            </a:r>
+            <a:r>
+              <a:rPr lang="en-US" dirty="0"/>
+              <a:t>, </a:t>
+            </a:r>
+          </a:p>
+          <a:p>
+            <a:r>
+              <a:rPr lang="en-US" dirty="0" err="1"/>
+              <a:t>Sessio</a:t>
+            </a:r>
+            <a:r>
+              <a:rPr lang="en-US" dirty="0"/>
+              <a:t> 1 </a:t>
+            </a:r>
+            <a:r>
+              <a:rPr lang="en-US" dirty="0" err="1"/>
+              <a:t>vam</a:t>
+            </a:r>
+            <a:r>
+              <a:rPr lang="en-US" dirty="0"/>
+              <a:t> definer </a:t>
+            </a:r>
+            <a:r>
+              <a:rPr lang="en-US" dirty="0" err="1"/>
+              <a:t>els</a:t>
+            </a:r>
+            <a:r>
+              <a:rPr lang="en-US" dirty="0"/>
+              <a:t> </a:t>
+            </a:r>
+            <a:r>
+              <a:rPr lang="en-US" dirty="0" err="1"/>
+              <a:t>objectius</a:t>
+            </a:r>
+            <a:r>
+              <a:rPr lang="en-US" dirty="0"/>
+              <a:t> principals de </a:t>
+            </a:r>
+            <a:r>
+              <a:rPr lang="en-US" dirty="0" err="1"/>
+              <a:t>l’aplicació</a:t>
+            </a:r>
+            <a:r>
+              <a:rPr lang="en-US" dirty="0"/>
+              <a:t> I </a:t>
+            </a:r>
+            <a:r>
+              <a:rPr lang="en-US" dirty="0" err="1"/>
+              <a:t>vam</a:t>
+            </a:r>
+            <a:r>
+              <a:rPr lang="en-US" dirty="0"/>
+              <a:t> </a:t>
+            </a:r>
+            <a:r>
+              <a:rPr lang="en-US" dirty="0" err="1"/>
+              <a:t>analitzar</a:t>
+            </a:r>
+            <a:r>
+              <a:rPr lang="en-US" dirty="0"/>
+              <a:t> </a:t>
+            </a:r>
+            <a:r>
+              <a:rPr lang="en-US" dirty="0" err="1"/>
+              <a:t>diferents</a:t>
+            </a:r>
+            <a:r>
+              <a:rPr lang="en-US" dirty="0"/>
+              <a:t> </a:t>
+            </a:r>
+            <a:r>
+              <a:rPr lang="en-US" dirty="0" err="1"/>
+              <a:t>tipus</a:t>
+            </a:r>
+            <a:r>
+              <a:rPr lang="en-US" dirty="0"/>
+              <a:t> de </a:t>
+            </a:r>
+            <a:r>
+              <a:rPr lang="en-US" dirty="0" err="1"/>
+              <a:t>usuaris</a:t>
+            </a:r>
+            <a:r>
+              <a:rPr lang="en-US" dirty="0"/>
+              <a:t>.</a:t>
+            </a:r>
+          </a:p>
+          <a:p>
+            <a:pPr marL="0" marR="0" lvl="0" indent="0" algn="l" defTabSz="914400" rtl="0" eaLnBrk="1" fontAlgn="auto" latinLnBrk="0" hangingPunct="1">
+              <a:lnSpc>
+                <a:spcPct val="100000"/>
+              </a:lnSpc>
+              <a:spcBef>
+                <a:spcPts val="0"/>
+              </a:spcBef>
+              <a:spcAft>
+                <a:spcPts val="0"/>
+              </a:spcAft>
+              <a:buClrTx/>
+              <a:buSzTx/>
+              <a:buFontTx/>
+              <a:buNone/>
+              <a:tabLst/>
+              <a:defRPr/>
+            </a:pPr>
+            <a:br>
+              <a:rPr lang="en-US" dirty="0"/>
+            </a:br>
+            <a:r>
+              <a:rPr lang="en-US" dirty="0" err="1"/>
+              <a:t>Sessio</a:t>
+            </a:r>
+            <a:r>
+              <a:rPr lang="en-US" dirty="0"/>
+              <a:t> 2 Va </a:t>
+            </a:r>
+            <a:r>
+              <a:rPr lang="en-US" dirty="0" err="1"/>
+              <a:t>consistir</a:t>
+            </a:r>
+            <a:r>
+              <a:rPr lang="en-US" dirty="0"/>
+              <a:t> </a:t>
+            </a:r>
+            <a:r>
+              <a:rPr lang="en-US" dirty="0" err="1"/>
+              <a:t>en</a:t>
+            </a:r>
+            <a:r>
+              <a:rPr lang="en-US" dirty="0"/>
+              <a:t> </a:t>
+            </a:r>
+            <a:r>
+              <a:rPr lang="en-US" dirty="0" err="1"/>
+              <a:t>l’analisi</a:t>
+            </a:r>
+            <a:r>
+              <a:rPr lang="en-US" dirty="0"/>
+              <a:t> de </a:t>
+            </a:r>
+            <a:r>
+              <a:rPr lang="en-US" dirty="0" err="1"/>
+              <a:t>interficies</a:t>
+            </a:r>
+            <a:r>
+              <a:rPr lang="en-US" dirty="0"/>
+              <a:t> </a:t>
+            </a:r>
+            <a:r>
+              <a:rPr lang="en-US" dirty="0" err="1"/>
+              <a:t>d’aplicacions</a:t>
+            </a:r>
+            <a:r>
+              <a:rPr lang="en-US" dirty="0"/>
+              <a:t> existents per </a:t>
+            </a:r>
+            <a:r>
+              <a:rPr lang="en-US" dirty="0" err="1"/>
+              <a:t>identificar</a:t>
+            </a:r>
+            <a:r>
+              <a:rPr lang="en-US" dirty="0"/>
+              <a:t> patrons de </a:t>
+            </a:r>
+            <a:r>
+              <a:rPr lang="en-US" dirty="0" err="1"/>
+              <a:t>diseny</a:t>
+            </a:r>
+            <a:br>
+              <a:rPr lang="en-US" dirty="0"/>
+            </a:br>
+            <a:br>
+              <a:rPr lang="en-US" dirty="0"/>
+            </a:br>
+            <a:r>
+              <a:rPr lang="en-US" dirty="0" err="1"/>
+              <a:t>Sessio</a:t>
+            </a:r>
+            <a:r>
+              <a:rPr lang="en-US" dirty="0"/>
+              <a:t> 3 </a:t>
+            </a:r>
+            <a:r>
+              <a:rPr lang="en-US" dirty="0" err="1"/>
+              <a:t>va</a:t>
+            </a:r>
+            <a:r>
+              <a:rPr lang="en-US" dirty="0"/>
+              <a:t> </a:t>
+            </a:r>
+            <a:r>
+              <a:rPr lang="en-US" dirty="0" err="1"/>
+              <a:t>aprofundir</a:t>
+            </a:r>
+            <a:r>
+              <a:rPr lang="en-US" dirty="0"/>
+              <a:t> </a:t>
+            </a:r>
+            <a:r>
+              <a:rPr lang="en-US" dirty="0" err="1"/>
+              <a:t>en</a:t>
+            </a:r>
+            <a:r>
+              <a:rPr lang="en-US" dirty="0"/>
+              <a:t> </a:t>
+            </a:r>
+            <a:r>
+              <a:rPr lang="en-US" dirty="0" err="1"/>
+              <a:t>els</a:t>
+            </a:r>
+            <a:r>
+              <a:rPr lang="en-US" dirty="0"/>
+              <a:t> elements </a:t>
+            </a:r>
+            <a:r>
+              <a:rPr lang="en-US" dirty="0" err="1"/>
+              <a:t>clau</a:t>
+            </a:r>
+            <a:r>
+              <a:rPr lang="en-US" dirty="0"/>
+              <a:t> de </a:t>
+            </a:r>
+            <a:r>
+              <a:rPr lang="en-US" dirty="0" err="1"/>
+              <a:t>disseny</a:t>
+            </a:r>
+            <a:r>
+              <a:rPr lang="en-US" dirty="0"/>
+              <a:t>  I la </a:t>
+            </a:r>
+            <a:r>
+              <a:rPr lang="en-US" dirty="0" err="1"/>
+              <a:t>realitzacio</a:t>
+            </a:r>
+            <a:r>
+              <a:rPr lang="en-US" dirty="0"/>
+              <a:t> d’un </a:t>
+            </a:r>
+            <a:r>
+              <a:rPr lang="en-US" dirty="0" err="1"/>
+              <a:t>analisi</a:t>
+            </a:r>
+            <a:r>
+              <a:rPr lang="en-US" dirty="0"/>
+              <a:t> DAFO del </a:t>
+            </a:r>
+            <a:r>
+              <a:rPr lang="en-US" dirty="0" err="1"/>
+              <a:t>projecte</a:t>
+            </a:r>
+            <a:br>
+              <a:rPr lang="en-US" dirty="0"/>
+            </a:br>
+            <a:br>
+              <a:rPr lang="en-US" dirty="0"/>
+            </a:br>
+            <a:r>
+              <a:rPr lang="en-US" sz="1200" dirty="0">
+                <a:solidFill>
+                  <a:srgbClr val="D7D4CC"/>
+                </a:solidFill>
+                <a:latin typeface="Raleway Medium" pitchFamily="34" charset="0"/>
+                <a:ea typeface="Raleway Medium" pitchFamily="34" charset="-122"/>
+                <a:cs typeface="Raleway Medium" pitchFamily="34" charset="-120"/>
+              </a:rPr>
+              <a:t>El Bloc 1 </a:t>
+            </a:r>
+            <a:r>
+              <a:rPr lang="en-US" sz="1200" dirty="0" err="1">
+                <a:solidFill>
+                  <a:srgbClr val="D7D4CC"/>
+                </a:solidFill>
+                <a:latin typeface="Raleway Medium" pitchFamily="34" charset="0"/>
+                <a:ea typeface="Raleway Medium" pitchFamily="34" charset="-122"/>
+                <a:cs typeface="Raleway Medium" pitchFamily="34" charset="-120"/>
+              </a:rPr>
+              <a:t>finalitza</a:t>
+            </a:r>
+            <a:r>
+              <a:rPr lang="en-US" sz="1200" dirty="0">
+                <a:solidFill>
+                  <a:srgbClr val="D7D4CC"/>
+                </a:solidFill>
+                <a:latin typeface="Raleway Medium" pitchFamily="34" charset="0"/>
+                <a:ea typeface="Raleway Medium" pitchFamily="34" charset="-122"/>
+                <a:cs typeface="Raleway Medium" pitchFamily="34" charset="-120"/>
+              </a:rPr>
+              <a:t> </a:t>
+            </a:r>
+            <a:r>
+              <a:rPr lang="en-US" sz="1200" dirty="0" err="1">
+                <a:solidFill>
+                  <a:srgbClr val="D7D4CC"/>
+                </a:solidFill>
+                <a:latin typeface="Raleway Medium" pitchFamily="34" charset="0"/>
+                <a:ea typeface="Raleway Medium" pitchFamily="34" charset="-122"/>
+                <a:cs typeface="Raleway Medium" pitchFamily="34" charset="-120"/>
+              </a:rPr>
+              <a:t>amb</a:t>
+            </a:r>
+            <a:r>
+              <a:rPr lang="en-US" sz="1200" dirty="0">
+                <a:solidFill>
+                  <a:srgbClr val="D7D4CC"/>
+                </a:solidFill>
+                <a:latin typeface="Raleway Medium" pitchFamily="34" charset="0"/>
+                <a:ea typeface="Raleway Medium" pitchFamily="34" charset="-122"/>
+                <a:cs typeface="Raleway Medium" pitchFamily="34" charset="-120"/>
+              </a:rPr>
+              <a:t> </a:t>
+            </a:r>
+            <a:r>
+              <a:rPr lang="en-US" sz="1200" dirty="0" err="1">
+                <a:solidFill>
+                  <a:srgbClr val="D7D4CC"/>
+                </a:solidFill>
+                <a:latin typeface="Raleway Medium" pitchFamily="34" charset="0"/>
+                <a:ea typeface="Raleway Medium" pitchFamily="34" charset="-122"/>
+                <a:cs typeface="Raleway Medium" pitchFamily="34" charset="-120"/>
+              </a:rPr>
+              <a:t>l'entrega</a:t>
+            </a:r>
+            <a:r>
+              <a:rPr lang="en-US" sz="1200" dirty="0">
+                <a:solidFill>
+                  <a:srgbClr val="D7D4CC"/>
+                </a:solidFill>
+                <a:latin typeface="Raleway Medium" pitchFamily="34" charset="0"/>
+                <a:ea typeface="Raleway Medium" pitchFamily="34" charset="-122"/>
+                <a:cs typeface="Raleway Medium" pitchFamily="34" charset="-120"/>
+              </a:rPr>
+              <a:t> del document </a:t>
+            </a:r>
+            <a:r>
+              <a:rPr lang="en-US" sz="1200" dirty="0" err="1">
+                <a:solidFill>
+                  <a:srgbClr val="D7D4CC"/>
+                </a:solidFill>
+                <a:latin typeface="Raleway Medium" pitchFamily="34" charset="0"/>
+                <a:ea typeface="Raleway Medium" pitchFamily="34" charset="-122"/>
+                <a:cs typeface="Raleway Medium" pitchFamily="34" charset="-120"/>
+              </a:rPr>
+              <a:t>d'anàlisi</a:t>
+            </a:r>
+            <a:r>
+              <a:rPr lang="en-US" sz="1200" dirty="0">
+                <a:solidFill>
+                  <a:srgbClr val="D7D4CC"/>
+                </a:solidFill>
+                <a:latin typeface="Raleway Medium" pitchFamily="34" charset="0"/>
+                <a:ea typeface="Raleway Medium" pitchFamily="34" charset="-122"/>
+                <a:cs typeface="Raleway Medium" pitchFamily="34" charset="-120"/>
+              </a:rPr>
+              <a:t> </a:t>
+            </a:r>
+            <a:r>
+              <a:rPr lang="en-US" sz="1200" dirty="0" err="1">
+                <a:solidFill>
+                  <a:srgbClr val="D7D4CC"/>
+                </a:solidFill>
+                <a:latin typeface="Raleway Medium" pitchFamily="34" charset="0"/>
+                <a:ea typeface="Raleway Medium" pitchFamily="34" charset="-122"/>
+                <a:cs typeface="Raleway Medium" pitchFamily="34" charset="-120"/>
+              </a:rPr>
+              <a:t>el</a:t>
+            </a:r>
+            <a:r>
+              <a:rPr lang="en-US" sz="1200" dirty="0">
+                <a:solidFill>
+                  <a:srgbClr val="D7D4CC"/>
+                </a:solidFill>
+                <a:latin typeface="Raleway Medium" pitchFamily="34" charset="0"/>
+                <a:ea typeface="Raleway Medium" pitchFamily="34" charset="-122"/>
+                <a:cs typeface="Raleway Medium" pitchFamily="34" charset="-120"/>
+              </a:rPr>
+              <a:t> 19/09/2024, que </a:t>
+            </a:r>
+            <a:r>
+              <a:rPr lang="en-US" sz="1200" dirty="0" err="1">
+                <a:solidFill>
+                  <a:srgbClr val="D7D4CC"/>
+                </a:solidFill>
+                <a:latin typeface="Raleway Medium" pitchFamily="34" charset="0"/>
+                <a:ea typeface="Raleway Medium" pitchFamily="34" charset="-122"/>
+                <a:cs typeface="Raleway Medium" pitchFamily="34" charset="-120"/>
+              </a:rPr>
+              <a:t>haurà</a:t>
+            </a:r>
+            <a:r>
+              <a:rPr lang="en-US" sz="1200" dirty="0">
+                <a:solidFill>
+                  <a:srgbClr val="D7D4CC"/>
+                </a:solidFill>
+                <a:latin typeface="Raleway Medium" pitchFamily="34" charset="0"/>
+                <a:ea typeface="Raleway Medium" pitchFamily="34" charset="-122"/>
+                <a:cs typeface="Raleway Medium" pitchFamily="34" charset="-120"/>
+              </a:rPr>
+              <a:t> </a:t>
+            </a:r>
+            <a:r>
+              <a:rPr lang="en-US" sz="1200" dirty="0" err="1">
+                <a:solidFill>
+                  <a:srgbClr val="D7D4CC"/>
+                </a:solidFill>
+                <a:latin typeface="Raleway Medium" pitchFamily="34" charset="0"/>
+                <a:ea typeface="Raleway Medium" pitchFamily="34" charset="-122"/>
+                <a:cs typeface="Raleway Medium" pitchFamily="34" charset="-120"/>
+              </a:rPr>
+              <a:t>d'incloure</a:t>
+            </a:r>
+            <a:r>
+              <a:rPr lang="en-US" sz="1200" dirty="0">
+                <a:solidFill>
+                  <a:srgbClr val="D7D4CC"/>
+                </a:solidFill>
+                <a:latin typeface="Raleway Medium" pitchFamily="34" charset="0"/>
+                <a:ea typeface="Raleway Medium" pitchFamily="34" charset="-122"/>
+                <a:cs typeface="Raleway Medium" pitchFamily="34" charset="-120"/>
+              </a:rPr>
+              <a:t> la </a:t>
+            </a:r>
+            <a:r>
+              <a:rPr lang="en-US" sz="1200" dirty="0" err="1">
+                <a:solidFill>
+                  <a:srgbClr val="D7D4CC"/>
+                </a:solidFill>
+                <a:latin typeface="Raleway Medium" pitchFamily="34" charset="0"/>
+                <a:ea typeface="Raleway Medium" pitchFamily="34" charset="-122"/>
+                <a:cs typeface="Raleway Medium" pitchFamily="34" charset="-120"/>
+              </a:rPr>
+              <a:t>definició</a:t>
+            </a:r>
+            <a:r>
+              <a:rPr lang="en-US" sz="1200" dirty="0">
+                <a:solidFill>
+                  <a:srgbClr val="D7D4CC"/>
+                </a:solidFill>
+                <a:latin typeface="Raleway Medium" pitchFamily="34" charset="0"/>
+                <a:ea typeface="Raleway Medium" pitchFamily="34" charset="-122"/>
+                <a:cs typeface="Raleway Medium" pitchFamily="34" charset="-120"/>
+              </a:rPr>
+              <a:t> del </a:t>
+            </a:r>
+            <a:r>
+              <a:rPr lang="en-US" sz="1200" dirty="0" err="1">
+                <a:solidFill>
+                  <a:srgbClr val="D7D4CC"/>
+                </a:solidFill>
+                <a:latin typeface="Raleway Medium" pitchFamily="34" charset="0"/>
+                <a:ea typeface="Raleway Medium" pitchFamily="34" charset="-122"/>
+                <a:cs typeface="Raleway Medium" pitchFamily="34" charset="-120"/>
+              </a:rPr>
+              <a:t>projecte</a:t>
+            </a:r>
+            <a:r>
+              <a:rPr lang="en-US" sz="1200" dirty="0">
+                <a:solidFill>
+                  <a:srgbClr val="D7D4CC"/>
+                </a:solidFill>
+                <a:latin typeface="Raleway Medium" pitchFamily="34" charset="0"/>
+                <a:ea typeface="Raleway Medium" pitchFamily="34" charset="-122"/>
+                <a:cs typeface="Raleway Medium" pitchFamily="34" charset="-120"/>
+              </a:rPr>
+              <a:t>, </a:t>
+            </a:r>
+            <a:r>
+              <a:rPr lang="en-US" sz="1200" dirty="0" err="1">
+                <a:solidFill>
+                  <a:srgbClr val="D7D4CC"/>
+                </a:solidFill>
+                <a:latin typeface="Raleway Medium" pitchFamily="34" charset="0"/>
+                <a:ea typeface="Raleway Medium" pitchFamily="34" charset="-122"/>
+                <a:cs typeface="Raleway Medium" pitchFamily="34" charset="-120"/>
+              </a:rPr>
+              <a:t>usuaris</a:t>
+            </a:r>
+            <a:r>
+              <a:rPr lang="en-US" sz="1200" dirty="0">
+                <a:solidFill>
+                  <a:srgbClr val="D7D4CC"/>
+                </a:solidFill>
+                <a:latin typeface="Raleway Medium" pitchFamily="34" charset="0"/>
+                <a:ea typeface="Raleway Medium" pitchFamily="34" charset="-122"/>
+                <a:cs typeface="Raleway Medium" pitchFamily="34" charset="-120"/>
+              </a:rPr>
+              <a:t>/</a:t>
+            </a:r>
+            <a:r>
+              <a:rPr lang="en-US" sz="1200" dirty="0" err="1">
+                <a:solidFill>
+                  <a:srgbClr val="D7D4CC"/>
+                </a:solidFill>
+                <a:latin typeface="Raleway Medium" pitchFamily="34" charset="0"/>
+                <a:ea typeface="Raleway Medium" pitchFamily="34" charset="-122"/>
+                <a:cs typeface="Raleway Medium" pitchFamily="34" charset="-120"/>
+              </a:rPr>
+              <a:t>perfils</a:t>
+            </a:r>
+            <a:r>
+              <a:rPr lang="en-US" sz="1200" dirty="0">
+                <a:solidFill>
+                  <a:srgbClr val="D7D4CC"/>
+                </a:solidFill>
+                <a:latin typeface="Raleway Medium" pitchFamily="34" charset="0"/>
+                <a:ea typeface="Raleway Medium" pitchFamily="34" charset="-122"/>
+                <a:cs typeface="Raleway Medium" pitchFamily="34" charset="-120"/>
+              </a:rPr>
+              <a:t>, </a:t>
+            </a:r>
+            <a:r>
+              <a:rPr lang="en-US" sz="1200" dirty="0" err="1">
+                <a:solidFill>
+                  <a:srgbClr val="D7D4CC"/>
+                </a:solidFill>
+                <a:latin typeface="Raleway Medium" pitchFamily="34" charset="0"/>
+                <a:ea typeface="Raleway Medium" pitchFamily="34" charset="-122"/>
+                <a:cs typeface="Raleway Medium" pitchFamily="34" charset="-120"/>
+              </a:rPr>
+              <a:t>anàlisi</a:t>
+            </a:r>
+            <a:r>
+              <a:rPr lang="en-US" sz="1200" dirty="0">
+                <a:solidFill>
+                  <a:srgbClr val="D7D4CC"/>
+                </a:solidFill>
+                <a:latin typeface="Raleway Medium" pitchFamily="34" charset="0"/>
+                <a:ea typeface="Raleway Medium" pitchFamily="34" charset="-122"/>
+                <a:cs typeface="Raleway Medium" pitchFamily="34" charset="-120"/>
+              </a:rPr>
+              <a:t> </a:t>
+            </a:r>
+            <a:r>
+              <a:rPr lang="en-US" sz="1200" dirty="0" err="1">
+                <a:solidFill>
+                  <a:srgbClr val="D7D4CC"/>
+                </a:solidFill>
+                <a:latin typeface="Raleway Medium" pitchFamily="34" charset="0"/>
+                <a:ea typeface="Raleway Medium" pitchFamily="34" charset="-122"/>
+                <a:cs typeface="Raleway Medium" pitchFamily="34" charset="-120"/>
+              </a:rPr>
+              <a:t>d'interfícies</a:t>
+            </a:r>
+            <a:r>
+              <a:rPr lang="en-US" sz="1200" dirty="0">
+                <a:solidFill>
+                  <a:srgbClr val="D7D4CC"/>
+                </a:solidFill>
+                <a:latin typeface="Raleway Medium" pitchFamily="34" charset="0"/>
+                <a:ea typeface="Raleway Medium" pitchFamily="34" charset="-122"/>
+                <a:cs typeface="Raleway Medium" pitchFamily="34" charset="-120"/>
+              </a:rPr>
+              <a:t> existents </a:t>
+            </a:r>
+            <a:r>
+              <a:rPr lang="en-US" sz="1200" dirty="0" err="1">
+                <a:solidFill>
+                  <a:srgbClr val="D7D4CC"/>
+                </a:solidFill>
+                <a:latin typeface="Raleway Medium" pitchFamily="34" charset="0"/>
+                <a:ea typeface="Raleway Medium" pitchFamily="34" charset="-122"/>
+                <a:cs typeface="Raleway Medium" pitchFamily="34" charset="-120"/>
+              </a:rPr>
+              <a:t>i</a:t>
+            </a:r>
+            <a:r>
+              <a:rPr lang="en-US" sz="1200" dirty="0">
+                <a:solidFill>
+                  <a:srgbClr val="D7D4CC"/>
+                </a:solidFill>
+                <a:latin typeface="Raleway Medium" pitchFamily="34" charset="0"/>
+                <a:ea typeface="Raleway Medium" pitchFamily="34" charset="-122"/>
+                <a:cs typeface="Raleway Medium" pitchFamily="34" charset="-120"/>
+              </a:rPr>
+              <a:t> </a:t>
+            </a:r>
+            <a:r>
+              <a:rPr lang="en-US" sz="1200" dirty="0" err="1">
+                <a:solidFill>
+                  <a:srgbClr val="D7D4CC"/>
+                </a:solidFill>
+                <a:latin typeface="Raleway Medium" pitchFamily="34" charset="0"/>
+                <a:ea typeface="Raleway Medium" pitchFamily="34" charset="-122"/>
+                <a:cs typeface="Raleway Medium" pitchFamily="34" charset="-120"/>
+              </a:rPr>
+              <a:t>el</a:t>
+            </a:r>
+            <a:r>
+              <a:rPr lang="en-US" sz="1200" dirty="0">
+                <a:solidFill>
+                  <a:srgbClr val="D7D4CC"/>
+                </a:solidFill>
+                <a:latin typeface="Raleway Medium" pitchFamily="34" charset="0"/>
+                <a:ea typeface="Raleway Medium" pitchFamily="34" charset="-122"/>
+                <a:cs typeface="Raleway Medium" pitchFamily="34" charset="-120"/>
+              </a:rPr>
+              <a:t> DAFO.</a:t>
+            </a:r>
+            <a:endParaRPr lang="en-US" sz="1200" dirty="0"/>
+          </a:p>
+          <a:p>
             <a:endParaRPr lang="en-US" dirty="0"/>
           </a:p>
         </p:txBody>
@@ -859,6 +2594,195 @@
           <a:bodyPr/>
           <a:lstStyle/>
           <a:p>
+            <a:r>
+              <a:rPr lang="en-US" dirty="0"/>
+              <a:t>El bloc 2 </a:t>
+            </a:r>
+            <a:r>
+              <a:rPr lang="en-US" dirty="0" err="1"/>
+              <a:t>va</a:t>
+            </a:r>
+            <a:r>
+              <a:rPr lang="en-US" dirty="0"/>
+              <a:t> ser crucial per a la </a:t>
+            </a:r>
+            <a:r>
+              <a:rPr lang="en-US" dirty="0" err="1"/>
+              <a:t>definicio</a:t>
+            </a:r>
+            <a:r>
+              <a:rPr lang="en-US" dirty="0"/>
+              <a:t> de </a:t>
+            </a:r>
+            <a:r>
+              <a:rPr lang="en-US" dirty="0" err="1"/>
+              <a:t>l’aparença</a:t>
+            </a:r>
+            <a:r>
+              <a:rPr lang="en-US" dirty="0"/>
+              <a:t> I la </a:t>
+            </a:r>
+            <a:r>
+              <a:rPr lang="en-US" dirty="0" err="1"/>
+              <a:t>usabilitat</a:t>
+            </a:r>
+            <a:r>
+              <a:rPr lang="en-US" dirty="0"/>
+              <a:t> de la </a:t>
+            </a:r>
+            <a:r>
+              <a:rPr lang="en-US" dirty="0" err="1"/>
+              <a:t>interficie</a:t>
+            </a:r>
+            <a:br>
+              <a:rPr lang="en-US" dirty="0"/>
+            </a:br>
+            <a:br>
+              <a:rPr lang="en-US" dirty="0"/>
+            </a:br>
+            <a:r>
+              <a:rPr lang="en-US" dirty="0"/>
+              <a:t>Sessions 4 I 5 es van </a:t>
+            </a:r>
+            <a:r>
+              <a:rPr lang="en-US" dirty="0" err="1"/>
+              <a:t>dedicar</a:t>
+            </a:r>
+            <a:r>
+              <a:rPr lang="en-US" dirty="0"/>
+              <a:t> a la </a:t>
+            </a:r>
+            <a:r>
+              <a:rPr lang="en-US" dirty="0" err="1"/>
+              <a:t>definicio</a:t>
+            </a:r>
+            <a:r>
+              <a:rPr lang="en-US" dirty="0"/>
+              <a:t> de la </a:t>
+            </a:r>
+            <a:r>
+              <a:rPr lang="en-US" dirty="0" err="1"/>
+              <a:t>guia</a:t>
+            </a:r>
+            <a:r>
+              <a:rPr lang="en-US" dirty="0"/>
+              <a:t> </a:t>
+            </a:r>
+            <a:r>
+              <a:rPr lang="en-US" dirty="0" err="1"/>
+              <a:t>d’estils</a:t>
+            </a:r>
+            <a:br>
+              <a:rPr lang="en-US" dirty="0"/>
+            </a:br>
+            <a:r>
+              <a:rPr lang="en-US" dirty="0" err="1"/>
+              <a:t>Sessio</a:t>
+            </a:r>
+            <a:r>
+              <a:rPr lang="en-US" dirty="0"/>
+              <a:t> 6 </a:t>
+            </a:r>
+            <a:r>
+              <a:rPr lang="en-US" dirty="0" err="1"/>
+              <a:t>vam</a:t>
+            </a:r>
+            <a:r>
+              <a:rPr lang="en-US" dirty="0"/>
+              <a:t> </a:t>
+            </a:r>
+            <a:r>
+              <a:rPr lang="en-US" dirty="0" err="1"/>
+              <a:t>introduir</a:t>
+            </a:r>
+            <a:r>
+              <a:rPr lang="en-US" dirty="0"/>
+              <a:t> </a:t>
+            </a:r>
+            <a:r>
+              <a:rPr lang="en-US" dirty="0" err="1"/>
+              <a:t>els</a:t>
+            </a:r>
+            <a:r>
+              <a:rPr lang="en-US" dirty="0"/>
+              <a:t> </a:t>
+            </a:r>
+            <a:r>
+              <a:rPr lang="en-US" dirty="0" err="1"/>
+              <a:t>conceptes</a:t>
+            </a:r>
+            <a:r>
+              <a:rPr lang="en-US" dirty="0"/>
+              <a:t> </a:t>
+            </a:r>
+            <a:r>
+              <a:rPr lang="en-US" dirty="0" err="1"/>
+              <a:t>d’usabilitat</a:t>
+            </a:r>
+            <a:br>
+              <a:rPr lang="en-US" dirty="0"/>
+            </a:br>
+            <a:r>
+              <a:rPr lang="en-US" dirty="0"/>
+              <a:t>Sessions 7i8 </a:t>
+            </a:r>
+            <a:r>
+              <a:rPr lang="en-US" dirty="0" err="1"/>
+              <a:t>fase</a:t>
+            </a:r>
+            <a:r>
+              <a:rPr lang="en-US" dirty="0"/>
+              <a:t> de </a:t>
+            </a:r>
+            <a:r>
+              <a:rPr lang="en-US" dirty="0" err="1"/>
+              <a:t>prototipat</a:t>
+            </a:r>
+            <a:r>
+              <a:rPr lang="en-US" dirty="0"/>
+              <a:t> I </a:t>
+            </a:r>
+            <a:r>
+              <a:rPr lang="en-US" dirty="0" err="1"/>
+              <a:t>diseny</a:t>
+            </a:r>
+            <a:r>
+              <a:rPr lang="en-US" dirty="0"/>
+              <a:t> de </a:t>
+            </a:r>
+            <a:r>
+              <a:rPr lang="en-US" dirty="0" err="1"/>
+              <a:t>formularis</a:t>
+            </a:r>
+            <a:br>
+              <a:rPr lang="en-US" dirty="0"/>
+            </a:br>
+            <a:r>
+              <a:rPr lang="en-US" dirty="0" err="1"/>
+              <a:t>Sessio</a:t>
+            </a:r>
+            <a:r>
+              <a:rPr lang="en-US" dirty="0"/>
+              <a:t> 9 </a:t>
+            </a:r>
+            <a:r>
+              <a:rPr lang="en-US" dirty="0" err="1"/>
+              <a:t>Consolidació</a:t>
+            </a:r>
+            <a:r>
+              <a:rPr lang="en-US" dirty="0"/>
+              <a:t> del </a:t>
+            </a:r>
+            <a:r>
+              <a:rPr lang="en-US" dirty="0" err="1"/>
+              <a:t>diseny</a:t>
+            </a:r>
+            <a:br>
+              <a:rPr lang="en-US" dirty="0"/>
+            </a:br>
+            <a:br>
+              <a:rPr lang="en-US" dirty="0"/>
+            </a:br>
             <a:endParaRPr lang="en-US" dirty="0"/>
           </a:p>
         </p:txBody>
@@ -1687,7 +3611,66 @@
           <a:bodyPr/>
           <a:lstStyle/>
           <a:p>
-            <a:endParaRPr lang="en-US" dirty="0"/>
+            <a:r>
+              <a:rPr lang="en-US" dirty="0"/>
+              <a:t>El </a:t>
+            </a:r>
+            <a:r>
+              <a:rPr lang="en-US" dirty="0" err="1"/>
+              <a:t>modul</a:t>
+            </a:r>
+            <a:r>
+              <a:rPr lang="en-US" dirty="0"/>
+              <a:t> es </a:t>
+            </a:r>
+            <a:r>
+              <a:rPr lang="en-US" dirty="0" err="1"/>
+              <a:t>considera</a:t>
+            </a:r>
+            <a:r>
+              <a:rPr lang="en-US" dirty="0"/>
+              <a:t> </a:t>
+            </a:r>
+            <a:r>
+              <a:rPr lang="en-US" dirty="0" err="1"/>
+              <a:t>superat</a:t>
+            </a:r>
+            <a:r>
+              <a:rPr lang="en-US" dirty="0"/>
+              <a:t> </a:t>
+            </a:r>
+            <a:r>
+              <a:rPr lang="en-US" dirty="0" err="1"/>
+              <a:t>quan</a:t>
+            </a:r>
+            <a:r>
+              <a:rPr lang="en-US" dirty="0"/>
+              <a:t> </a:t>
+            </a:r>
+            <a:r>
+              <a:rPr lang="en-US" dirty="0" err="1"/>
+              <a:t>s’an</a:t>
+            </a:r>
+            <a:r>
+              <a:rPr lang="en-US" dirty="0"/>
+              <a:t> </a:t>
+            </a:r>
+            <a:r>
+              <a:rPr lang="en-US" dirty="0" err="1"/>
+              <a:t>asolit</a:t>
+            </a:r>
+            <a:r>
+              <a:rPr lang="en-US" dirty="0"/>
+              <a:t> tots </a:t>
+            </a:r>
+            <a:r>
+              <a:rPr lang="en-US" dirty="0" err="1"/>
+              <a:t>els</a:t>
+            </a:r>
+            <a:r>
+              <a:rPr lang="en-US" dirty="0"/>
+              <a:t> RAs</a:t>
+            </a:r>
           </a:p>
         </p:txBody>
       </p:sp>
@@ -2129,6 +4112,90 @@
             <a:fld id="{F7021451-1387-4CA6-816F-3879F97B5CBC}" type="slidenum">
               <a:rPr lang="en-US"/>
               <a:t>28</a:t>
+            </a:fld>
+            <a:endParaRPr lang="en-US"/>
+          </a:p>
+        </p:txBody>
+      </p:sp>
+    </p:spTree>
+    <p:extLst>
+      <p:ext uri="{BB962C8B-B14F-4D97-AF65-F5344CB8AC3E}">
+        <p14:creationId xmlns:p14="http://schemas.microsoft.com/office/powerpoint/2010/main" val="1024086991"/>
+      </p:ext>
+    </p:extLst>
+  </p:cSld>
+  <p:clrMapOvr>
+    <a:masterClrMapping/>
+  </p:clrMapOvr>
+</p:notes>
+</file>
+
+<file path=ppt/notesSlides/notesSlide29.xml><?xml version="1.0" encoding="utf-8"?>
+<p:notes xmlns:a="http://schemas.openxmlformats.org/drawingml/2006/main" xmlns:r="http://schemas.openxmlformats.org/officeDocument/2006/relationships" xmlns:p="http://schemas.openxmlformats.org/presentationml/2006/main">
+  <p:cSld>
+    <p:spTree>
+      <p:nvGrpSpPr>
+        <p:cNvPr id="1" name=""/>
+        <p:cNvGrpSpPr/>
+        <p:nvPr/>
+      </p:nvGrpSpPr>
+      <p:grpSpPr>
+        <a:xfrm>
+          <a:off x="0" y="0"/>
+          <a:ext cx="0" cy="0"/>
+          <a:chOff x="0" y="0"/>
+          <a:chExt cx="0" cy="0"/>
+        </a:xfrm>
+      </p:grpSpPr>
+      <p:sp>
+        <p:nvSpPr>
+          <p:cNvPr id="2" name="Slide Image Placeholder 1"/>
+          <p:cNvSpPr>
+            <a:spLocks noGrp="1" noRot="1" noChangeAspect="1"/>
+          </p:cNvSpPr>
+          <p:nvPr>
+            <p:ph type="sldImg"/>
+          </p:nvPr>
+        </p:nvSpPr>
+        <p:spPr/>
+      </p:sp>
+      <p:sp>
+        <p:nvSpPr>
+          <p:cNvPr id="3" name="Notes Placeholder 2"/>
+          <p:cNvSpPr>
+            <a:spLocks noGrp="1"/>
+          </p:cNvSpPr>
+          <p:nvPr>
+            <p:ph type="body" idx="1"/>
+          </p:nvPr>
+        </p:nvSpPr>
+        <p:spPr/>
+        <p:txBody>
+          <a:bodyPr/>
+          <a:lstStyle/>
+          <a:p>
+            <a:endParaRPr lang="en-US" dirty="0"/>
+          </a:p>
+        </p:txBody>
+      </p:sp>
+      <p:sp>
+        <p:nvSpPr>
+          <p:cNvPr id="4" name="Slide Number Placeholder 3"/>
+          <p:cNvSpPr>
+            <a:spLocks noGrp="1"/>
+          </p:cNvSpPr>
+          <p:nvPr>
+            <p:ph type="sldNum" sz="quarter" idx="10"/>
+          </p:nvPr>
+        </p:nvSpPr>
+        <p:spPr/>
+        <p:txBody>
+          <a:bodyPr/>
+          <a:lstStyle/>
+          <a:p>
+            <a:fld id="{F7021451-1387-4CA6-816F-3879F97B5CBC}" type="slidenum">
+              <a:rPr lang="en-US"/>
+              <a:t>29</a:t>
             </a:fld>
             <a:endParaRPr lang="en-US"/>
           </a:p>
@@ -4152,6 +6219,84 @@
 </p:sldLayout>
 </file>
 
+<file path=ppt/slideLayouts/slideLayout28.xml><?xml version="1.0" encoding="utf-8"?>
+<p:sldLayout xmlns:a="http://schemas.openxmlformats.org/drawingml/2006/main" xmlns:r="http://schemas.openxmlformats.org/officeDocument/2006/relationships" xmlns:p="http://schemas.openxmlformats.org/presentationml/2006/main">
+  <p:cSld name="Slide 29 master">
+    <p:bg>
+      <p:bgPr>
+        <a:solidFill>
+          <a:srgbClr val="000000"/>
+        </a:solidFill>
+        <a:effectLst/>
+      </p:bgPr>
+    </p:bg>
+    <p:spTree>
+      <p:nvGrpSpPr>
+        <p:cNvPr id="1" name=""/>
+        <p:cNvGrpSpPr/>
+        <p:nvPr/>
+      </p:nvGrpSpPr>
+      <p:grpSpPr>
+        <a:xfrm>
+          <a:off x="0" y="0"/>
+          <a:ext cx="0" cy="0"/>
+          <a:chOff x="0" y="0"/>
+          <a:chExt cx="0" cy="0"/>
+        </a:xfrm>
+      </p:grpSpPr>
+      <p:sp>
+        <p:nvSpPr>
+          <p:cNvPr id="2" name="Shape 0"/>
+          <p:cNvSpPr/>
+          <p:nvPr/>
+        </p:nvSpPr>
+        <p:spPr>
+          <a:xfrm>
+            <a:off x="0" y="0"/>
+            <a:ext cx="14630400" cy="8229600"/>
+          </a:xfrm>
+          <a:prstGeom prst="rect">
+            <a:avLst/>
+          </a:prstGeom>
+          <a:solidFill>
+            <a:srgbClr val="1B1B1E"/>
+          </a:solidFill>
+          <a:ln/>
+        </p:spPr>
+      </p:sp>
+      <p:sp>
+        <p:nvSpPr>
+          <p:cNvPr id="3" name="Shape 1"/>
+          <p:cNvSpPr/>
+          <p:nvPr/>
+        </p:nvSpPr>
+        <p:spPr>
+          <a:xfrm>
+            <a:off x="0" y="0"/>
+            <a:ext cx="14630400" cy="8229600"/>
+          </a:xfrm>
+          <a:prstGeom prst="rect">
+            <a:avLst/>
+          </a:prstGeom>
+          <a:solidFill>
+            <a:srgbClr val="27272B"/>
+          </a:solidFill>
+          <a:ln/>
+        </p:spPr>
+      </p:sp>
+    </p:spTree>
+    <p:extLst>
+      <p:ext uri="{BB962C8B-B14F-4D97-AF65-F5344CB8AC3E}">
+        <p14:creationId xmlns:p14="http://schemas.microsoft.com/office/powerpoint/2010/main" val="3290348853"/>
+      </p:ext>
+    </p:extLst>
+  </p:cSld>
+  <p:clrMapOvr>
+    <a:masterClrMapping/>
+  </p:clrMapOvr>
+</p:sldLayout>
+</file>
+
 <file path=ppt/slideLayouts/slideLayout3.xml><?xml version="1.0" encoding="utf-8"?>
 <p:sldLayout xmlns:a="http://schemas.openxmlformats.org/drawingml/2006/main" xmlns:r="http://schemas.openxmlformats.org/officeDocument/2006/relationships" xmlns:p="http://schemas.openxmlformats.org/presentationml/2006/main" preserve="1">
   <p:cSld name="Slide 2 master">
@@ -4716,6 +6861,7 @@
     <p:sldLayoutId id="2147483673" r:id="rId25"/>
     <p:sldLayoutId id="2147483674" r:id="rId26"/>
     <p:sldLayoutId id="2147483675" r:id="rId27"/>
+    <p:sldLayoutId id="2147483676" r:id="rId28"/>
   </p:sldLayoutIdLst>
   <p:hf sldNum="0" hdr="0" ftr="0" dt="0"/>
   <p:txStyles>
@@ -5814,6 +7960,17 @@
               <a:buNone/>
             </a:pPr>
             <a:r>
+              <a:rPr lang="en-US" sz="1550" dirty="0" err="1">
+                <a:solidFill>
+                  <a:srgbClr val="D7D4CC"/>
+                </a:solidFill>
+                <a:latin typeface="Raleway Medium" pitchFamily="34" charset="0"/>
+                <a:ea typeface="Raleway Medium" pitchFamily="34" charset="-122"/>
+                <a:cs typeface="Raleway Medium" pitchFamily="34" charset="-120"/>
+              </a:rPr>
+              <a:t>Utilitzant</a:t>
+            </a:r>
+            <a:r>
               <a:rPr lang="en-US" sz="1550" dirty="0">
                 <a:solidFill>
                   <a:srgbClr val="D7D4CC"/>
@@ -5822,7 +7979,7 @@
                 <a:ea typeface="Raleway Medium" pitchFamily="34" charset="-122"/>
                 <a:cs typeface="Raleway Medium" pitchFamily="34" charset="-120"/>
               </a:rPr>
-              <a:t>Servir com a instrument d'avaluació pràctic de les competències del mòdul</a:t>
+              <a:t> com a instrument d'avaluació pràctic de les competències del mòdul</a:t>
             </a:r>
             <a:endParaRPr lang="en-US" sz="1550" dirty="0"/>
           </a:p>
@@ -13777,7 +15934,7 @@
 
 <file path=ppt/slides/slide2.xml><?xml version="1.0" encoding="utf-8"?>
 <p:sld xmlns:a="http://schemas.openxmlformats.org/drawingml/2006/main" xmlns:r="http://schemas.openxmlformats.org/officeDocument/2006/relationships" xmlns:p="http://schemas.openxmlformats.org/presentationml/2006/main">
-  <p:cSld name="Slide 2">
+  <p:cSld name="Slide 4">
     <p:spTree>
       <p:nvGrpSpPr>
         <p:cNvPr id="1" name=""/>
@@ -13792,59 +15949,35 @@
           <a:chExt cx="0" cy="0"/>
         </a:xfrm>
       </p:grpSpPr>
-      <p:pic>
-        <p:nvPicPr>
-          <p:cNvPr id="2" name="Image 0" descr="preencoded.png"/>
-          <p:cNvPicPr>
-            <a:picLocks noChangeAspect="1"/>
-          </p:cNvPicPr>
-          <p:nvPr/>
-        </p:nvPicPr>
-        <p:blipFill>
-          <a:blip r:embed="rId3"/>
-          <a:stretch>
-            <a:fillRect/>
-          </a:stretch>
-        </p:blipFill>
-        <p:spPr>
-          <a:xfrm>
-            <a:off x="0" y="0"/>
-            <a:ext cx="5486400" cy="8229600"/>
-          </a:xfrm>
-          <a:prstGeom prst="rect">
-            <a:avLst/>
-          </a:prstGeom>
-        </p:spPr>
-      </p:pic>
-      <p:sp>
-        <p:nvSpPr>
-          <p:cNvPr id="3" name="Text 0"/>
-          <p:cNvSpPr/>
-          <p:nvPr/>
-        </p:nvSpPr>
-        <p:spPr>
-          <a:xfrm>
-            <a:off x="6367462" y="943451"/>
-            <a:ext cx="5585579" cy="664369"/>
-          </a:xfrm>
-          <a:prstGeom prst="rect">
-            <a:avLst/>
-          </a:prstGeom>
-          <a:noFill/>
-          <a:ln/>
-        </p:spPr>
-        <p:txBody>
-          <a:bodyPr wrap="none" lIns="0" tIns="0" rIns="0" bIns="0" rtlCol="0" anchor="t"/>
-          <a:lstStyle/>
-          <a:p>
-            <a:pPr marL="0" indent="0" algn="l">
-              <a:lnSpc>
-                <a:spcPts val="5200"/>
-              </a:lnSpc>
-              <a:buNone/>
-            </a:pPr>
-            <a:r>
-              <a:rPr lang="en-US" sz="4150" b="1" dirty="0">
+      <p:sp>
+        <p:nvSpPr>
+          <p:cNvPr id="2" name="Text 0"/>
+          <p:cNvSpPr/>
+          <p:nvPr/>
+        </p:nvSpPr>
+        <p:spPr>
+          <a:xfrm>
+            <a:off x="839867" y="659963"/>
+            <a:ext cx="3466386" cy="433149"/>
+          </a:xfrm>
+          <a:prstGeom prst="rect">
+            <a:avLst/>
+          </a:prstGeom>
+          <a:noFill/>
+          <a:ln/>
+        </p:spPr>
+        <p:txBody>
+          <a:bodyPr wrap="none" lIns="0" tIns="0" rIns="0" bIns="0" rtlCol="0" anchor="t"/>
+          <a:lstStyle/>
+          <a:p>
+            <a:pPr marL="0" indent="0" algn="l">
+              <a:lnSpc>
+                <a:spcPts val="3400"/>
+              </a:lnSpc>
+              <a:buNone/>
+            </a:pPr>
+            <a:r>
+              <a:rPr lang="en-US" sz="2700" b="1" dirty="0">
                 <a:solidFill>
                   <a:srgbClr val="FFE14D"/>
                 </a:solidFill>
@@ -13852,26 +15985,26 @@
                 <a:ea typeface="Comfortaa Bold" pitchFamily="34" charset="-122"/>
                 <a:cs typeface="Comfortaa Bold" pitchFamily="34" charset="-120"/>
               </a:rPr>
-              <a:t>Objectius del mòdul</a:t>
-            </a:r>
-            <a:endParaRPr lang="en-US" sz="4150" dirty="0"/>
-          </a:p>
-        </p:txBody>
-      </p:sp>
-      <p:sp>
-        <p:nvSpPr>
-          <p:cNvPr id="4" name="Shape 1"/>
-          <p:cNvSpPr/>
-          <p:nvPr/>
-        </p:nvSpPr>
-        <p:spPr>
-          <a:xfrm>
-            <a:off x="6367462" y="1966555"/>
-            <a:ext cx="538043" cy="538043"/>
+              <a:t>Continguts</a:t>
+            </a:r>
+            <a:endParaRPr lang="en-US" sz="2700" dirty="0"/>
+          </a:p>
+        </p:txBody>
+      </p:sp>
+      <p:sp>
+        <p:nvSpPr>
+          <p:cNvPr id="3" name="Shape 1"/>
+          <p:cNvSpPr/>
+          <p:nvPr/>
+        </p:nvSpPr>
+        <p:spPr>
+          <a:xfrm>
+            <a:off x="839867" y="1405057"/>
+            <a:ext cx="1295043" cy="1121331"/>
           </a:xfrm>
           <a:prstGeom prst="roundRect">
             <a:avLst>
-              <a:gd name="adj" fmla="val 66680"/>
+              <a:gd name="adj" fmla="val 20867"/>
             </a:avLst>
           </a:prstGeom>
           <a:solidFill>
@@ -13887,59 +16020,35 @@
           </a:p>
         </p:txBody>
       </p:sp>
-      <p:pic>
-        <p:nvPicPr>
-          <p:cNvPr id="5" name="Image 1" descr="preencoded.png"/>
-          <p:cNvPicPr>
-            <a:picLocks noChangeAspect="1"/>
-          </p:cNvPicPr>
-          <p:nvPr/>
-        </p:nvPicPr>
-        <p:blipFill>
-          <a:blip r:embed="rId4"/>
-          <a:stretch>
-            <a:fillRect/>
-          </a:stretch>
-        </p:blipFill>
-        <p:spPr>
-          <a:xfrm>
-            <a:off x="6477000" y="2036207"/>
-            <a:ext cx="318849" cy="398621"/>
-          </a:xfrm>
-          <a:prstGeom prst="rect">
-            <a:avLst/>
-          </a:prstGeom>
-        </p:spPr>
-      </p:pic>
-      <p:sp>
-        <p:nvSpPr>
-          <p:cNvPr id="6" name="Text 2"/>
-          <p:cNvSpPr/>
-          <p:nvPr/>
-        </p:nvSpPr>
-        <p:spPr>
-          <a:xfrm>
-            <a:off x="7144583" y="2048708"/>
-            <a:ext cx="2764274" cy="996553"/>
-          </a:xfrm>
-          <a:prstGeom prst="rect">
-            <a:avLst/>
-          </a:prstGeom>
-          <a:noFill/>
-          <a:ln/>
-        </p:spPr>
-        <p:txBody>
-          <a:bodyPr wrap="square" lIns="0" tIns="0" rIns="0" bIns="0" rtlCol="0" anchor="t"/>
-          <a:lstStyle/>
-          <a:p>
-            <a:pPr marL="0" indent="0" algn="l">
-              <a:lnSpc>
-                <a:spcPts val="2600"/>
-              </a:lnSpc>
-              <a:buNone/>
-            </a:pPr>
-            <a:r>
-              <a:rPr lang="en-US" sz="2050" b="1" dirty="0">
+      <p:sp>
+        <p:nvSpPr>
+          <p:cNvPr id="4" name="Text 2"/>
+          <p:cNvSpPr/>
+          <p:nvPr/>
+        </p:nvSpPr>
+        <p:spPr>
+          <a:xfrm>
+            <a:off x="1377672" y="1828562"/>
+            <a:ext cx="219313" cy="274201"/>
+          </a:xfrm>
+          <a:prstGeom prst="rect">
+            <a:avLst/>
+          </a:prstGeom>
+          <a:noFill/>
+          <a:ln/>
+        </p:spPr>
+        <p:txBody>
+          <a:bodyPr wrap="none" lIns="0" tIns="0" rIns="0" bIns="0" rtlCol="0" anchor="t"/>
+          <a:lstStyle/>
+          <a:p>
+            <a:pPr marL="0" indent="0" algn="ctr">
+              <a:lnSpc>
+                <a:spcPts val="2750"/>
+              </a:lnSpc>
+              <a:buNone/>
+            </a:pPr>
+            <a:r>
+              <a:rPr lang="en-US" sz="1700" b="1" dirty="0">
                 <a:solidFill>
                   <a:srgbClr val="D7D4CC"/>
                 </a:solidFill>
@@ -13947,22 +16056,64 @@
                 <a:ea typeface="Comfortaa Bold" pitchFamily="34" charset="-122"/>
                 <a:cs typeface="Comfortaa Bold" pitchFamily="34" charset="-120"/>
               </a:rPr>
-              <a:t>Comprendre els fonaments del disseny d'interfícies</a:t>
-            </a:r>
-            <a:endParaRPr lang="en-US" sz="2050" dirty="0"/>
-          </a:p>
-        </p:txBody>
-      </p:sp>
-      <p:sp>
-        <p:nvSpPr>
-          <p:cNvPr id="7" name="Text 3"/>
-          <p:cNvSpPr/>
-          <p:nvPr/>
-        </p:nvSpPr>
-        <p:spPr>
-          <a:xfrm>
-            <a:off x="7144583" y="3188732"/>
-            <a:ext cx="2764274" cy="2296001"/>
+              <a:t>1</a:t>
+            </a:r>
+            <a:endParaRPr lang="en-US" sz="1700" dirty="0"/>
+          </a:p>
+        </p:txBody>
+      </p:sp>
+      <p:sp>
+        <p:nvSpPr>
+          <p:cNvPr id="5" name="Text 3"/>
+          <p:cNvSpPr/>
+          <p:nvPr/>
+        </p:nvSpPr>
+        <p:spPr>
+          <a:xfrm>
+            <a:off x="2290882" y="1561028"/>
+            <a:ext cx="2029539" cy="216694"/>
+          </a:xfrm>
+          <a:prstGeom prst="rect">
+            <a:avLst/>
+          </a:prstGeom>
+          <a:noFill/>
+          <a:ln/>
+        </p:spPr>
+        <p:txBody>
+          <a:bodyPr wrap="none" lIns="0" tIns="0" rIns="0" bIns="0" rtlCol="0" anchor="t"/>
+          <a:lstStyle/>
+          <a:p>
+            <a:pPr marL="0" indent="0" algn="l">
+              <a:lnSpc>
+                <a:spcPts val="1700"/>
+              </a:lnSpc>
+              <a:buNone/>
+            </a:pPr>
+            <a:r>
+              <a:rPr lang="en-US" sz="1350" b="1" dirty="0">
+                <a:solidFill>
+                  <a:srgbClr val="D7D4CC"/>
+                </a:solidFill>
+                <a:latin typeface="Comfortaa Bold" pitchFamily="34" charset="0"/>
+                <a:ea typeface="Comfortaa Bold" pitchFamily="34" charset="-122"/>
+                <a:cs typeface="Comfortaa Bold" pitchFamily="34" charset="-120"/>
+              </a:rPr>
+              <a:t>Introducció i objectius</a:t>
+            </a:r>
+            <a:endParaRPr lang="en-US" sz="1350" dirty="0"/>
+          </a:p>
+        </p:txBody>
+      </p:sp>
+      <p:sp>
+        <p:nvSpPr>
+          <p:cNvPr id="6" name="Text 4"/>
+          <p:cNvSpPr/>
+          <p:nvPr/>
+        </p:nvSpPr>
+        <p:spPr>
+          <a:xfrm>
+            <a:off x="2290882" y="1871305"/>
+            <a:ext cx="11343680" cy="499110"/>
           </a:xfrm>
           <a:prstGeom prst="rect">
             <a:avLst/>
@@ -13976,39 +16127,68 @@
           <a:p>
             <a:pPr marL="0" indent="0" algn="l">
               <a:lnSpc>
-                <a:spcPts val="3000"/>
-              </a:lnSpc>
-              <a:buNone/>
-            </a:pPr>
-            <a:r>
-              <a:rPr lang="en-US" sz="1850" dirty="0">
-                <a:solidFill>
-                  <a:srgbClr val="D7D4CC"/>
-                </a:solidFill>
-                <a:latin typeface="Raleway Medium" pitchFamily="34" charset="0"/>
-                <a:ea typeface="Raleway Medium" pitchFamily="34" charset="-122"/>
-                <a:cs typeface="Raleway Medium" pitchFamily="34" charset="-120"/>
-              </a:rPr>
-              <a:t>Aprendre els principis de percepció visual i la seva aplicació en el disseny d'interfícies web efectius per a entorns esportius.</a:t>
-            </a:r>
-            <a:endParaRPr lang="en-US" sz="1850" dirty="0"/>
-          </a:p>
-        </p:txBody>
-      </p:sp>
-      <p:sp>
-        <p:nvSpPr>
-          <p:cNvPr id="8" name="Shape 4"/>
-          <p:cNvSpPr/>
-          <p:nvPr/>
-        </p:nvSpPr>
-        <p:spPr>
-          <a:xfrm>
-            <a:off x="10207823" y="1966555"/>
-            <a:ext cx="538043" cy="538043"/>
+                <a:spcPts val="1950"/>
+              </a:lnSpc>
+              <a:buNone/>
+            </a:pPr>
+            <a:r>
+              <a:rPr lang="en-US" sz="1200" dirty="0">
+                <a:solidFill>
+                  <a:srgbClr val="D7D4CC"/>
+                </a:solidFill>
+                <a:latin typeface="Raleway Medium" pitchFamily="34" charset="0"/>
+                <a:ea typeface="Raleway Medium" pitchFamily="34" charset="-122"/>
+                <a:cs typeface="Raleway Medium" pitchFamily="34" charset="-120"/>
+              </a:rPr>
+              <a:t>Objectius del mòdul, competències professionals, resultats d'aprenentatge (RAs), criteris d'avaluació (CAs), contextualització del projecte en l'entorn professional i justificació pedagògica de l'enfocament adoptat</a:t>
+            </a:r>
+            <a:endParaRPr lang="en-US" sz="1200" dirty="0"/>
+          </a:p>
+        </p:txBody>
+      </p:sp>
+      <p:sp>
+        <p:nvSpPr>
+          <p:cNvPr id="7" name="Shape 5"/>
+          <p:cNvSpPr/>
+          <p:nvPr/>
+        </p:nvSpPr>
+        <p:spPr>
+          <a:xfrm>
+            <a:off x="2212896" y="2516862"/>
+            <a:ext cx="11499652" cy="11430"/>
           </a:xfrm>
           <a:prstGeom prst="roundRect">
             <a:avLst>
-              <a:gd name="adj" fmla="val 66680"/>
+              <a:gd name="adj" fmla="val 2047152"/>
+            </a:avLst>
+          </a:prstGeom>
+          <a:solidFill>
+            <a:srgbClr val="5F5F63"/>
+          </a:solidFill>
+          <a:ln/>
+        </p:spPr>
+        <p:txBody>
+          <a:bodyPr/>
+          <a:lstStyle/>
+          <a:p>
+            <a:endParaRPr lang="es-ES"/>
+          </a:p>
+        </p:txBody>
+      </p:sp>
+      <p:sp>
+        <p:nvSpPr>
+          <p:cNvPr id="8" name="Shape 6"/>
+          <p:cNvSpPr/>
+          <p:nvPr/>
+        </p:nvSpPr>
+        <p:spPr>
+          <a:xfrm>
+            <a:off x="839867" y="2604373"/>
+            <a:ext cx="2590086" cy="1121331"/>
+          </a:xfrm>
+          <a:prstGeom prst="roundRect">
+            <a:avLst>
+              <a:gd name="adj" fmla="val 20867"/>
             </a:avLst>
           </a:prstGeom>
           <a:solidFill>
@@ -14024,59 +16204,35 @@
           </a:p>
         </p:txBody>
       </p:sp>
-      <p:pic>
-        <p:nvPicPr>
-          <p:cNvPr id="9" name="Image 2" descr="preencoded.png"/>
-          <p:cNvPicPr>
-            <a:picLocks noChangeAspect="1"/>
-          </p:cNvPicPr>
-          <p:nvPr/>
-        </p:nvPicPr>
-        <p:blipFill>
-          <a:blip r:embed="rId5"/>
-          <a:stretch>
-            <a:fillRect/>
-          </a:stretch>
-        </p:blipFill>
-        <p:spPr>
-          <a:xfrm>
-            <a:off x="10317361" y="2036207"/>
-            <a:ext cx="318849" cy="398621"/>
-          </a:xfrm>
-          <a:prstGeom prst="rect">
-            <a:avLst/>
-          </a:prstGeom>
-        </p:spPr>
-      </p:pic>
-      <p:sp>
-        <p:nvSpPr>
-          <p:cNvPr id="10" name="Text 5"/>
-          <p:cNvSpPr/>
-          <p:nvPr/>
-        </p:nvSpPr>
-        <p:spPr>
-          <a:xfrm>
-            <a:off x="10984944" y="2048708"/>
-            <a:ext cx="2764393" cy="664369"/>
-          </a:xfrm>
-          <a:prstGeom prst="rect">
-            <a:avLst/>
-          </a:prstGeom>
-          <a:noFill/>
-          <a:ln/>
-        </p:spPr>
-        <p:txBody>
-          <a:bodyPr wrap="square" lIns="0" tIns="0" rIns="0" bIns="0" rtlCol="0" anchor="t"/>
-          <a:lstStyle/>
-          <a:p>
-            <a:pPr marL="0" indent="0" algn="l">
-              <a:lnSpc>
-                <a:spcPts val="2600"/>
-              </a:lnSpc>
-              <a:buNone/>
-            </a:pPr>
-            <a:r>
-              <a:rPr lang="en-US" sz="2050" b="1" dirty="0">
+      <p:sp>
+        <p:nvSpPr>
+          <p:cNvPr id="9" name="Text 7"/>
+          <p:cNvSpPr/>
+          <p:nvPr/>
+        </p:nvSpPr>
+        <p:spPr>
+          <a:xfrm>
+            <a:off x="2025253" y="3027878"/>
+            <a:ext cx="219313" cy="274201"/>
+          </a:xfrm>
+          <a:prstGeom prst="rect">
+            <a:avLst/>
+          </a:prstGeom>
+          <a:noFill/>
+          <a:ln/>
+        </p:spPr>
+        <p:txBody>
+          <a:bodyPr wrap="none" lIns="0" tIns="0" rIns="0" bIns="0" rtlCol="0" anchor="t"/>
+          <a:lstStyle/>
+          <a:p>
+            <a:pPr marL="0" indent="0" algn="ctr">
+              <a:lnSpc>
+                <a:spcPts val="2750"/>
+              </a:lnSpc>
+              <a:buNone/>
+            </a:pPr>
+            <a:r>
+              <a:rPr lang="en-US" sz="1700" b="1" dirty="0">
                 <a:solidFill>
                   <a:srgbClr val="D7D4CC"/>
                 </a:solidFill>
@@ -14084,22 +16240,64 @@
                 <a:ea typeface="Comfortaa Bold" pitchFamily="34" charset="-122"/>
                 <a:cs typeface="Comfortaa Bold" pitchFamily="34" charset="-120"/>
               </a:rPr>
-              <a:t>Aplicar conceptes d'usabilitat</a:t>
-            </a:r>
-            <a:endParaRPr lang="en-US" sz="2050" dirty="0"/>
-          </a:p>
-        </p:txBody>
-      </p:sp>
-      <p:sp>
-        <p:nvSpPr>
-          <p:cNvPr id="11" name="Text 6"/>
-          <p:cNvSpPr/>
-          <p:nvPr/>
-        </p:nvSpPr>
-        <p:spPr>
-          <a:xfrm>
-            <a:off x="10984944" y="2856547"/>
-            <a:ext cx="2764393" cy="2296001"/>
+              <a:t>2</a:t>
+            </a:r>
+            <a:endParaRPr lang="en-US" sz="1700" dirty="0"/>
+          </a:p>
+        </p:txBody>
+      </p:sp>
+      <p:sp>
+        <p:nvSpPr>
+          <p:cNvPr id="10" name="Text 8"/>
+          <p:cNvSpPr/>
+          <p:nvPr/>
+        </p:nvSpPr>
+        <p:spPr>
+          <a:xfrm>
+            <a:off x="3585924" y="2760345"/>
+            <a:ext cx="2100024" cy="216694"/>
+          </a:xfrm>
+          <a:prstGeom prst="rect">
+            <a:avLst/>
+          </a:prstGeom>
+          <a:noFill/>
+          <a:ln/>
+        </p:spPr>
+        <p:txBody>
+          <a:bodyPr wrap="none" lIns="0" tIns="0" rIns="0" bIns="0" rtlCol="0" anchor="t"/>
+          <a:lstStyle/>
+          <a:p>
+            <a:pPr marL="0" indent="0" algn="l">
+              <a:lnSpc>
+                <a:spcPts val="1700"/>
+              </a:lnSpc>
+              <a:buNone/>
+            </a:pPr>
+            <a:r>
+              <a:rPr lang="en-US" sz="1350" b="1" dirty="0">
+                <a:solidFill>
+                  <a:srgbClr val="D7D4CC"/>
+                </a:solidFill>
+                <a:latin typeface="Comfortaa Bold" pitchFamily="34" charset="0"/>
+                <a:ea typeface="Comfortaa Bold" pitchFamily="34" charset="-122"/>
+                <a:cs typeface="Comfortaa Bold" pitchFamily="34" charset="-120"/>
+              </a:rPr>
+              <a:t>Descripció del projecte</a:t>
+            </a:r>
+            <a:endParaRPr lang="en-US" sz="1350" dirty="0"/>
+          </a:p>
+        </p:txBody>
+      </p:sp>
+      <p:sp>
+        <p:nvSpPr>
+          <p:cNvPr id="11" name="Text 9"/>
+          <p:cNvSpPr/>
+          <p:nvPr/>
+        </p:nvSpPr>
+        <p:spPr>
+          <a:xfrm>
+            <a:off x="3585924" y="3070622"/>
+            <a:ext cx="10048637" cy="499110"/>
           </a:xfrm>
           <a:prstGeom prst="rect">
             <a:avLst/>
@@ -14113,39 +16311,68 @@
           <a:p>
             <a:pPr marL="0" indent="0" algn="l">
               <a:lnSpc>
-                <a:spcPts val="3000"/>
-              </a:lnSpc>
-              <a:buNone/>
-            </a:pPr>
-            <a:r>
-              <a:rPr lang="en-US" sz="1850" dirty="0">
-                <a:solidFill>
-                  <a:srgbClr val="D7D4CC"/>
-                </a:solidFill>
-                <a:latin typeface="Raleway Medium" pitchFamily="34" charset="0"/>
-                <a:ea typeface="Raleway Medium" pitchFamily="34" charset="-122"/>
-                <a:cs typeface="Raleway Medium" pitchFamily="34" charset="-120"/>
-              </a:rPr>
-              <a:t>Implementar metodologies de disseny centrat en l'usuari per crear interfícies intuïtives per a la gestió de reserves.</a:t>
-            </a:r>
-            <a:endParaRPr lang="en-US" sz="1850" dirty="0"/>
-          </a:p>
-        </p:txBody>
-      </p:sp>
-      <p:sp>
-        <p:nvSpPr>
-          <p:cNvPr id="12" name="Shape 7"/>
-          <p:cNvSpPr/>
-          <p:nvPr/>
-        </p:nvSpPr>
-        <p:spPr>
-          <a:xfrm>
-            <a:off x="6367462" y="5963007"/>
-            <a:ext cx="538043" cy="538043"/>
+                <a:spcPts val="1950"/>
+              </a:lnSpc>
+              <a:buNone/>
+            </a:pPr>
+            <a:r>
+              <a:rPr lang="en-US" sz="1200" dirty="0">
+                <a:solidFill>
+                  <a:srgbClr val="D7D4CC"/>
+                </a:solidFill>
+                <a:latin typeface="Raleway Medium" pitchFamily="34" charset="0"/>
+                <a:ea typeface="Raleway Medium" pitchFamily="34" charset="-122"/>
+                <a:cs typeface="Raleway Medium" pitchFamily="34" charset="-120"/>
+              </a:rPr>
+              <a:t>Introducció a la problemàtica actual dels poliesportius, necessitats dels usuaris, objectius específics del sistema de reserves, avantatges de la solució web i metodologia d'ensenyament-aprenentatge basada en projectes</a:t>
+            </a:r>
+            <a:endParaRPr lang="en-US" sz="1200" dirty="0"/>
+          </a:p>
+        </p:txBody>
+      </p:sp>
+      <p:sp>
+        <p:nvSpPr>
+          <p:cNvPr id="12" name="Shape 10"/>
+          <p:cNvSpPr/>
+          <p:nvPr/>
+        </p:nvSpPr>
+        <p:spPr>
+          <a:xfrm>
+            <a:off x="3507938" y="3716179"/>
+            <a:ext cx="10204609" cy="11430"/>
           </a:xfrm>
           <a:prstGeom prst="roundRect">
             <a:avLst>
-              <a:gd name="adj" fmla="val 66680"/>
+              <a:gd name="adj" fmla="val 2047152"/>
+            </a:avLst>
+          </a:prstGeom>
+          <a:solidFill>
+            <a:srgbClr val="5F5F63"/>
+          </a:solidFill>
+          <a:ln/>
+        </p:spPr>
+        <p:txBody>
+          <a:bodyPr/>
+          <a:lstStyle/>
+          <a:p>
+            <a:endParaRPr lang="es-ES"/>
+          </a:p>
+        </p:txBody>
+      </p:sp>
+      <p:sp>
+        <p:nvSpPr>
+          <p:cNvPr id="13" name="Shape 11"/>
+          <p:cNvSpPr/>
+          <p:nvPr/>
+        </p:nvSpPr>
+        <p:spPr>
+          <a:xfrm>
+            <a:off x="839867" y="3803690"/>
+            <a:ext cx="3885128" cy="1121331"/>
+          </a:xfrm>
+          <a:prstGeom prst="roundRect">
+            <a:avLst>
+              <a:gd name="adj" fmla="val 20867"/>
             </a:avLst>
           </a:prstGeom>
           <a:solidFill>
@@ -14161,59 +16388,35 @@
           </a:p>
         </p:txBody>
       </p:sp>
-      <p:pic>
-        <p:nvPicPr>
-          <p:cNvPr id="13" name="Image 3" descr="preencoded.png"/>
-          <p:cNvPicPr>
-            <a:picLocks noChangeAspect="1"/>
-          </p:cNvPicPr>
-          <p:nvPr/>
-        </p:nvPicPr>
-        <p:blipFill>
-          <a:blip r:embed="rId6"/>
-          <a:stretch>
-            <a:fillRect/>
-          </a:stretch>
-        </p:blipFill>
-        <p:spPr>
-          <a:xfrm>
-            <a:off x="6477000" y="6032659"/>
-            <a:ext cx="318849" cy="398621"/>
-          </a:xfrm>
-          <a:prstGeom prst="rect">
-            <a:avLst/>
-          </a:prstGeom>
-        </p:spPr>
-      </p:pic>
-      <p:sp>
-        <p:nvSpPr>
-          <p:cNvPr id="14" name="Text 8"/>
-          <p:cNvSpPr/>
-          <p:nvPr/>
-        </p:nvSpPr>
-        <p:spPr>
-          <a:xfrm>
-            <a:off x="7144583" y="6045160"/>
-            <a:ext cx="6386274" cy="332184"/>
-          </a:xfrm>
-          <a:prstGeom prst="rect">
-            <a:avLst/>
-          </a:prstGeom>
-          <a:noFill/>
-          <a:ln/>
-        </p:spPr>
-        <p:txBody>
-          <a:bodyPr wrap="none" lIns="0" tIns="0" rIns="0" bIns="0" rtlCol="0" anchor="t"/>
-          <a:lstStyle/>
-          <a:p>
-            <a:pPr marL="0" indent="0" algn="l">
-              <a:lnSpc>
-                <a:spcPts val="2600"/>
-              </a:lnSpc>
-              <a:buNone/>
-            </a:pPr>
-            <a:r>
-              <a:rPr lang="en-US" sz="2050" b="1" dirty="0">
+      <p:sp>
+        <p:nvSpPr>
+          <p:cNvPr id="14" name="Text 12"/>
+          <p:cNvSpPr/>
+          <p:nvPr/>
+        </p:nvSpPr>
+        <p:spPr>
+          <a:xfrm>
+            <a:off x="2672715" y="4227195"/>
+            <a:ext cx="219313" cy="274201"/>
+          </a:xfrm>
+          <a:prstGeom prst="rect">
+            <a:avLst/>
+          </a:prstGeom>
+          <a:noFill/>
+          <a:ln/>
+        </p:spPr>
+        <p:txBody>
+          <a:bodyPr wrap="none" lIns="0" tIns="0" rIns="0" bIns="0" rtlCol="0" anchor="t"/>
+          <a:lstStyle/>
+          <a:p>
+            <a:pPr marL="0" indent="0" algn="ctr">
+              <a:lnSpc>
+                <a:spcPts val="2750"/>
+              </a:lnSpc>
+              <a:buNone/>
+            </a:pPr>
+            <a:r>
+              <a:rPr lang="en-US" sz="1700" b="1" dirty="0">
                 <a:solidFill>
                   <a:srgbClr val="D7D4CC"/>
                 </a:solidFill>
@@ -14221,22 +16424,64 @@
                 <a:ea typeface="Comfortaa Bold" pitchFamily="34" charset="-122"/>
                 <a:cs typeface="Comfortaa Bold" pitchFamily="34" charset="-120"/>
               </a:rPr>
-              <a:t>Desenvolupar estructures HTML semàntiques</a:t>
-            </a:r>
-            <a:endParaRPr lang="en-US" sz="2050" dirty="0"/>
-          </a:p>
-        </p:txBody>
-      </p:sp>
-      <p:sp>
-        <p:nvSpPr>
-          <p:cNvPr id="15" name="Text 9"/>
-          <p:cNvSpPr/>
-          <p:nvPr/>
-        </p:nvSpPr>
-        <p:spPr>
-          <a:xfrm>
-            <a:off x="7144583" y="6520815"/>
-            <a:ext cx="6604754" cy="765334"/>
+              <a:t>3</a:t>
+            </a:r>
+            <a:endParaRPr lang="en-US" sz="1700" dirty="0"/>
+          </a:p>
+        </p:txBody>
+      </p:sp>
+      <p:sp>
+        <p:nvSpPr>
+          <p:cNvPr id="15" name="Text 13"/>
+          <p:cNvSpPr/>
+          <p:nvPr/>
+        </p:nvSpPr>
+        <p:spPr>
+          <a:xfrm>
+            <a:off x="4880967" y="3959662"/>
+            <a:ext cx="2193250" cy="216694"/>
+          </a:xfrm>
+          <a:prstGeom prst="rect">
+            <a:avLst/>
+          </a:prstGeom>
+          <a:noFill/>
+          <a:ln/>
+        </p:spPr>
+        <p:txBody>
+          <a:bodyPr wrap="none" lIns="0" tIns="0" rIns="0" bIns="0" rtlCol="0" anchor="t"/>
+          <a:lstStyle/>
+          <a:p>
+            <a:pPr marL="0" indent="0" algn="l">
+              <a:lnSpc>
+                <a:spcPts val="1700"/>
+              </a:lnSpc>
+              <a:buNone/>
+            </a:pPr>
+            <a:r>
+              <a:rPr lang="en-US" sz="1350" b="1" dirty="0">
+                <a:solidFill>
+                  <a:srgbClr val="D7D4CC"/>
+                </a:solidFill>
+                <a:latin typeface="Comfortaa Bold" pitchFamily="34" charset="0"/>
+                <a:ea typeface="Comfortaa Bold" pitchFamily="34" charset="-122"/>
+                <a:cs typeface="Comfortaa Bold" pitchFamily="34" charset="-120"/>
+              </a:rPr>
+              <a:t>Estructura i planificació</a:t>
+            </a:r>
+            <a:endParaRPr lang="en-US" sz="1350" dirty="0"/>
+          </a:p>
+        </p:txBody>
+      </p:sp>
+      <p:sp>
+        <p:nvSpPr>
+          <p:cNvPr id="16" name="Text 14"/>
+          <p:cNvSpPr/>
+          <p:nvPr/>
+        </p:nvSpPr>
+        <p:spPr>
+          <a:xfrm>
+            <a:off x="4880967" y="4269938"/>
+            <a:ext cx="8753594" cy="499110"/>
           </a:xfrm>
           <a:prstGeom prst="rect">
             <a:avLst/>
@@ -14250,22 +16495,390 @@
           <a:p>
             <a:pPr marL="0" indent="0" algn="l">
               <a:lnSpc>
-                <a:spcPts val="3000"/>
-              </a:lnSpc>
-              <a:buNone/>
-            </a:pPr>
-            <a:r>
-              <a:rPr lang="en-US" sz="1850" dirty="0">
-                <a:solidFill>
-                  <a:srgbClr val="D7D4CC"/>
-                </a:solidFill>
-                <a:latin typeface="Raleway Medium" pitchFamily="34" charset="0"/>
-                <a:ea typeface="Raleway Medium" pitchFamily="34" charset="-122"/>
-                <a:cs typeface="Raleway Medium" pitchFamily="34" charset="-120"/>
-              </a:rPr>
-              <a:t>Crear estructures de contingut coherents i optimitzades per a les diferents seccions de l'aplicació.</a:t>
-            </a:r>
-            <a:endParaRPr lang="en-US" sz="1850" dirty="0"/>
+                <a:spcPts val="1950"/>
+              </a:lnSpc>
+              <a:buNone/>
+            </a:pPr>
+            <a:r>
+              <a:rPr lang="en-US" sz="1200" dirty="0">
+                <a:solidFill>
+                  <a:srgbClr val="D7D4CC"/>
+                </a:solidFill>
+                <a:latin typeface="Raleway Medium" pitchFamily="34" charset="0"/>
+                <a:ea typeface="Raleway Medium" pitchFamily="34" charset="-122"/>
+                <a:cs typeface="Raleway Medium" pitchFamily="34" charset="-120"/>
+              </a:rPr>
+              <a:t>Arquitectura del projecte (frontend/backend), tecnologies utilitzades, planificació temporal per setmanes, distribució d'hores per activitat, fases de desenvolupament i entregables intermedis</a:t>
+            </a:r>
+            <a:endParaRPr lang="en-US" sz="1200" dirty="0"/>
+          </a:p>
+        </p:txBody>
+      </p:sp>
+      <p:sp>
+        <p:nvSpPr>
+          <p:cNvPr id="17" name="Shape 15"/>
+          <p:cNvSpPr/>
+          <p:nvPr/>
+        </p:nvSpPr>
+        <p:spPr>
+          <a:xfrm>
+            <a:off x="4802981" y="4915495"/>
+            <a:ext cx="8909566" cy="11430"/>
+          </a:xfrm>
+          <a:prstGeom prst="roundRect">
+            <a:avLst>
+              <a:gd name="adj" fmla="val 2047152"/>
+            </a:avLst>
+          </a:prstGeom>
+          <a:solidFill>
+            <a:srgbClr val="5F5F63"/>
+          </a:solidFill>
+          <a:ln/>
+        </p:spPr>
+        <p:txBody>
+          <a:bodyPr/>
+          <a:lstStyle/>
+          <a:p>
+            <a:endParaRPr lang="es-ES"/>
+          </a:p>
+        </p:txBody>
+      </p:sp>
+      <p:sp>
+        <p:nvSpPr>
+          <p:cNvPr id="18" name="Shape 16"/>
+          <p:cNvSpPr/>
+          <p:nvPr/>
+        </p:nvSpPr>
+        <p:spPr>
+          <a:xfrm>
+            <a:off x="839867" y="5003006"/>
+            <a:ext cx="5180171" cy="1121331"/>
+          </a:xfrm>
+          <a:prstGeom prst="roundRect">
+            <a:avLst>
+              <a:gd name="adj" fmla="val 20867"/>
+            </a:avLst>
+          </a:prstGeom>
+          <a:solidFill>
+            <a:srgbClr val="46464A"/>
+          </a:solidFill>
+          <a:ln/>
+        </p:spPr>
+        <p:txBody>
+          <a:bodyPr/>
+          <a:lstStyle/>
+          <a:p>
+            <a:endParaRPr lang="es-ES"/>
+          </a:p>
+        </p:txBody>
+      </p:sp>
+      <p:sp>
+        <p:nvSpPr>
+          <p:cNvPr id="19" name="Text 17"/>
+          <p:cNvSpPr/>
+          <p:nvPr/>
+        </p:nvSpPr>
+        <p:spPr>
+          <a:xfrm>
+            <a:off x="3320296" y="5426512"/>
+            <a:ext cx="219313" cy="274201"/>
+          </a:xfrm>
+          <a:prstGeom prst="rect">
+            <a:avLst/>
+          </a:prstGeom>
+          <a:noFill/>
+          <a:ln/>
+        </p:spPr>
+        <p:txBody>
+          <a:bodyPr wrap="none" lIns="0" tIns="0" rIns="0" bIns="0" rtlCol="0" anchor="t"/>
+          <a:lstStyle/>
+          <a:p>
+            <a:pPr marL="0" indent="0" algn="ctr">
+              <a:lnSpc>
+                <a:spcPts val="2750"/>
+              </a:lnSpc>
+              <a:buNone/>
+            </a:pPr>
+            <a:r>
+              <a:rPr lang="en-US" sz="1700" b="1" dirty="0">
+                <a:solidFill>
+                  <a:srgbClr val="D7D4CC"/>
+                </a:solidFill>
+                <a:latin typeface="Comfortaa Bold" pitchFamily="34" charset="0"/>
+                <a:ea typeface="Comfortaa Bold" pitchFamily="34" charset="-122"/>
+                <a:cs typeface="Comfortaa Bold" pitchFamily="34" charset="-120"/>
+              </a:rPr>
+              <a:t>4</a:t>
+            </a:r>
+            <a:endParaRPr lang="en-US" sz="1700" dirty="0"/>
+          </a:p>
+        </p:txBody>
+      </p:sp>
+      <p:sp>
+        <p:nvSpPr>
+          <p:cNvPr id="20" name="Text 18"/>
+          <p:cNvSpPr/>
+          <p:nvPr/>
+        </p:nvSpPr>
+        <p:spPr>
+          <a:xfrm>
+            <a:off x="6176010" y="5158978"/>
+            <a:ext cx="1733193" cy="216694"/>
+          </a:xfrm>
+          <a:prstGeom prst="rect">
+            <a:avLst/>
+          </a:prstGeom>
+          <a:noFill/>
+          <a:ln/>
+        </p:spPr>
+        <p:txBody>
+          <a:bodyPr wrap="none" lIns="0" tIns="0" rIns="0" bIns="0" rtlCol="0" anchor="t"/>
+          <a:lstStyle/>
+          <a:p>
+            <a:pPr marL="0" indent="0" algn="l">
+              <a:lnSpc>
+                <a:spcPts val="1700"/>
+              </a:lnSpc>
+              <a:buNone/>
+            </a:pPr>
+            <a:r>
+              <a:rPr lang="en-US" sz="1350" b="1" dirty="0">
+                <a:solidFill>
+                  <a:srgbClr val="D7D4CC"/>
+                </a:solidFill>
+                <a:latin typeface="Comfortaa Bold" pitchFamily="34" charset="0"/>
+                <a:ea typeface="Comfortaa Bold" pitchFamily="34" charset="-122"/>
+                <a:cs typeface="Comfortaa Bold" pitchFamily="34" charset="-120"/>
+              </a:rPr>
+              <a:t>Blocs de treball</a:t>
+            </a:r>
+            <a:endParaRPr lang="en-US" sz="1350" dirty="0"/>
+          </a:p>
+        </p:txBody>
+      </p:sp>
+      <p:sp>
+        <p:nvSpPr>
+          <p:cNvPr id="21" name="Text 19"/>
+          <p:cNvSpPr/>
+          <p:nvPr/>
+        </p:nvSpPr>
+        <p:spPr>
+          <a:xfrm>
+            <a:off x="6176010" y="5469255"/>
+            <a:ext cx="7458551" cy="499110"/>
+          </a:xfrm>
+          <a:prstGeom prst="rect">
+            <a:avLst/>
+          </a:prstGeom>
+          <a:noFill/>
+          <a:ln/>
+        </p:spPr>
+        <p:txBody>
+          <a:bodyPr wrap="square" lIns="0" tIns="0" rIns="0" bIns="0" rtlCol="0" anchor="t"/>
+          <a:lstStyle/>
+          <a:p>
+            <a:pPr marL="0" indent="0" algn="l">
+              <a:lnSpc>
+                <a:spcPts val="1950"/>
+              </a:lnSpc>
+              <a:buNone/>
+            </a:pPr>
+            <a:r>
+              <a:rPr lang="en-US" sz="1200" dirty="0">
+                <a:solidFill>
+                  <a:srgbClr val="D7D4CC"/>
+                </a:solidFill>
+                <a:latin typeface="Raleway Medium" pitchFamily="34" charset="0"/>
+                <a:ea typeface="Raleway Medium" pitchFamily="34" charset="-122"/>
+                <a:cs typeface="Raleway Medium" pitchFamily="34" charset="-120"/>
+              </a:rPr>
+              <a:t>Bloc 1: Anàlisi de requisits i usuaris, Bloc 2: Disseny d'interfície i wireframes, Bloc 3: Estructura HTML semàntica, Bloc 4: Estils CSS i responsive design, Blocs 5-7: JavaScript, APIs i integració</a:t>
+            </a:r>
+            <a:endParaRPr lang="en-US" sz="1200" dirty="0"/>
+          </a:p>
+        </p:txBody>
+      </p:sp>
+      <p:sp>
+        <p:nvSpPr>
+          <p:cNvPr id="22" name="Shape 20"/>
+          <p:cNvSpPr/>
+          <p:nvPr/>
+        </p:nvSpPr>
+        <p:spPr>
+          <a:xfrm>
+            <a:off x="6098024" y="6114812"/>
+            <a:ext cx="7614523" cy="11430"/>
+          </a:xfrm>
+          <a:prstGeom prst="roundRect">
+            <a:avLst>
+              <a:gd name="adj" fmla="val 2047152"/>
+            </a:avLst>
+          </a:prstGeom>
+          <a:solidFill>
+            <a:srgbClr val="5F5F63"/>
+          </a:solidFill>
+          <a:ln/>
+        </p:spPr>
+        <p:txBody>
+          <a:bodyPr/>
+          <a:lstStyle/>
+          <a:p>
+            <a:endParaRPr lang="es-ES"/>
+          </a:p>
+        </p:txBody>
+      </p:sp>
+      <p:sp>
+        <p:nvSpPr>
+          <p:cNvPr id="23" name="Shape 21"/>
+          <p:cNvSpPr/>
+          <p:nvPr/>
+        </p:nvSpPr>
+        <p:spPr>
+          <a:xfrm>
+            <a:off x="839867" y="6202323"/>
+            <a:ext cx="6475333" cy="1370886"/>
+          </a:xfrm>
+          <a:prstGeom prst="roundRect">
+            <a:avLst>
+              <a:gd name="adj" fmla="val 17068"/>
+            </a:avLst>
+          </a:prstGeom>
+          <a:solidFill>
+            <a:srgbClr val="46464A"/>
+          </a:solidFill>
+          <a:ln/>
+        </p:spPr>
+        <p:txBody>
+          <a:bodyPr/>
+          <a:lstStyle/>
+          <a:p>
+            <a:endParaRPr lang="es-ES"/>
+          </a:p>
+        </p:txBody>
+      </p:sp>
+      <p:sp>
+        <p:nvSpPr>
+          <p:cNvPr id="24" name="Text 22"/>
+          <p:cNvSpPr/>
+          <p:nvPr/>
+        </p:nvSpPr>
+        <p:spPr>
+          <a:xfrm>
+            <a:off x="3967877" y="6750606"/>
+            <a:ext cx="219313" cy="274201"/>
+          </a:xfrm>
+          <a:prstGeom prst="rect">
+            <a:avLst/>
+          </a:prstGeom>
+          <a:noFill/>
+          <a:ln/>
+        </p:spPr>
+        <p:txBody>
+          <a:bodyPr wrap="none" lIns="0" tIns="0" rIns="0" bIns="0" rtlCol="0" anchor="t"/>
+          <a:lstStyle/>
+          <a:p>
+            <a:pPr marL="0" indent="0" algn="ctr">
+              <a:lnSpc>
+                <a:spcPts val="2750"/>
+              </a:lnSpc>
+              <a:buNone/>
+            </a:pPr>
+            <a:r>
+              <a:rPr lang="en-US" sz="1700" b="1" dirty="0">
+                <a:solidFill>
+                  <a:srgbClr val="D7D4CC"/>
+                </a:solidFill>
+                <a:latin typeface="Comfortaa Bold" pitchFamily="34" charset="0"/>
+                <a:ea typeface="Comfortaa Bold" pitchFamily="34" charset="-122"/>
+                <a:cs typeface="Comfortaa Bold" pitchFamily="34" charset="-120"/>
+              </a:rPr>
+              <a:t>5</a:t>
+            </a:r>
+            <a:endParaRPr lang="en-US" sz="1700" dirty="0"/>
+          </a:p>
+        </p:txBody>
+      </p:sp>
+      <p:sp>
+        <p:nvSpPr>
+          <p:cNvPr id="25" name="Text 23"/>
+          <p:cNvSpPr/>
+          <p:nvPr/>
+        </p:nvSpPr>
+        <p:spPr>
+          <a:xfrm>
+            <a:off x="7471172" y="6358295"/>
+            <a:ext cx="1915001" cy="216694"/>
+          </a:xfrm>
+          <a:prstGeom prst="rect">
+            <a:avLst/>
+          </a:prstGeom>
+          <a:noFill/>
+          <a:ln/>
+        </p:spPr>
+        <p:txBody>
+          <a:bodyPr wrap="none" lIns="0" tIns="0" rIns="0" bIns="0" rtlCol="0" anchor="t"/>
+          <a:lstStyle/>
+          <a:p>
+            <a:pPr marL="0" indent="0" algn="l">
+              <a:lnSpc>
+                <a:spcPts val="1700"/>
+              </a:lnSpc>
+              <a:buNone/>
+            </a:pPr>
+            <a:r>
+              <a:rPr lang="en-US" sz="1350" b="1" dirty="0">
+                <a:solidFill>
+                  <a:srgbClr val="D7D4CC"/>
+                </a:solidFill>
+                <a:latin typeface="Comfortaa Bold" pitchFamily="34" charset="0"/>
+                <a:ea typeface="Comfortaa Bold" pitchFamily="34" charset="-122"/>
+                <a:cs typeface="Comfortaa Bold" pitchFamily="34" charset="-120"/>
+              </a:rPr>
+              <a:t>Fase final i avaluació</a:t>
+            </a:r>
+            <a:endParaRPr lang="en-US" sz="1350" dirty="0"/>
+          </a:p>
+        </p:txBody>
+      </p:sp>
+      <p:sp>
+        <p:nvSpPr>
+          <p:cNvPr id="26" name="Text 24"/>
+          <p:cNvSpPr/>
+          <p:nvPr/>
+        </p:nvSpPr>
+        <p:spPr>
+          <a:xfrm>
+            <a:off x="7471172" y="6668572"/>
+            <a:ext cx="6163389" cy="748665"/>
+          </a:xfrm>
+          <a:prstGeom prst="rect">
+            <a:avLst/>
+          </a:prstGeom>
+          <a:noFill/>
+          <a:ln/>
+        </p:spPr>
+        <p:txBody>
+          <a:bodyPr wrap="square" lIns="0" tIns="0" rIns="0" bIns="0" rtlCol="0" anchor="t"/>
+          <a:lstStyle/>
+          <a:p>
+            <a:pPr marL="0" indent="0" algn="l">
+              <a:lnSpc>
+                <a:spcPts val="1950"/>
+              </a:lnSpc>
+              <a:buNone/>
+            </a:pPr>
+            <a:r>
+              <a:rPr lang="en-US" sz="1200" dirty="0">
+                <a:solidFill>
+                  <a:srgbClr val="D7D4CC"/>
+                </a:solidFill>
+                <a:latin typeface="Raleway Medium" pitchFamily="34" charset="0"/>
+                <a:ea typeface="Raleway Medium" pitchFamily="34" charset="-122"/>
+                <a:cs typeface="Raleway Medium" pitchFamily="34" charset="-120"/>
+              </a:rPr>
+              <a:t>Integració de components, testeig d'usabilitat, instruccions d'instal·lació i desplegament, criteris d'avaluació específics, instruments d'avaluació (rúbriques) i percentatges de qualificació per activitat</a:t>
+            </a:r>
+            <a:endParaRPr lang="en-US" sz="1200" dirty="0"/>
           </a:p>
         </p:txBody>
       </p:sp>
@@ -33434,7 +36047,1079 @@
 </p:sld>
 </file>
 
+<file path=ppt/slides/slide29.xml><?xml version="1.0" encoding="utf-8"?>
+<p:sld xmlns:a="http://schemas.openxmlformats.org/drawingml/2006/main" xmlns:r="http://schemas.openxmlformats.org/officeDocument/2006/relationships" xmlns:p="http://schemas.openxmlformats.org/presentationml/2006/main">
+  <p:cSld>
+    <p:spTree>
+      <p:nvGrpSpPr>
+        <p:cNvPr id="1" name=""/>
+        <p:cNvGrpSpPr/>
+        <p:nvPr/>
+      </p:nvGrpSpPr>
+      <p:grpSpPr>
+        <a:xfrm>
+          <a:off x="0" y="0"/>
+          <a:ext cx="0" cy="0"/>
+          <a:chOff x="0" y="0"/>
+          <a:chExt cx="0" cy="0"/>
+        </a:xfrm>
+      </p:grpSpPr>
+      <p:sp>
+        <p:nvSpPr>
+          <p:cNvPr id="2" name="Text 0"/>
+          <p:cNvSpPr/>
+          <p:nvPr/>
+        </p:nvSpPr>
+        <p:spPr>
+          <a:xfrm>
+            <a:off x="881063" y="867608"/>
+            <a:ext cx="5314950" cy="664369"/>
+          </a:xfrm>
+          <a:prstGeom prst="rect">
+            <a:avLst/>
+          </a:prstGeom>
+          <a:noFill/>
+          <a:ln/>
+        </p:spPr>
+        <p:txBody>
+          <a:bodyPr wrap="none" lIns="0" tIns="0" rIns="0" bIns="0" rtlCol="0" anchor="t"/>
+          <a:lstStyle/>
+          <a:p>
+            <a:pPr marL="0" indent="0" algn="l">
+              <a:lnSpc>
+                <a:spcPts val="5200"/>
+              </a:lnSpc>
+              <a:buNone/>
+            </a:pPr>
+            <a:r>
+              <a:rPr lang="en-US" sz="4150" b="1" dirty="0">
+                <a:solidFill>
+                  <a:srgbClr val="FFE14D"/>
+                </a:solidFill>
+                <a:latin typeface="Comfortaa Bold" pitchFamily="34" charset="0"/>
+                <a:ea typeface="Comfortaa Bold" pitchFamily="34" charset="-122"/>
+                <a:cs typeface="Comfortaa Bold" pitchFamily="34" charset="-120"/>
+              </a:rPr>
+              <a:t>Conclusions</a:t>
+            </a:r>
+            <a:endParaRPr lang="en-US" sz="4150" dirty="0"/>
+          </a:p>
+        </p:txBody>
+      </p:sp>
+      <p:pic>
+        <p:nvPicPr>
+          <p:cNvPr id="3" name="Image 0" descr="preencoded.png"/>
+          <p:cNvPicPr>
+            <a:picLocks noChangeAspect="1"/>
+          </p:cNvPicPr>
+          <p:nvPr/>
+        </p:nvPicPr>
+        <p:blipFill>
+          <a:blip r:embed="rId3"/>
+          <a:stretch>
+            <a:fillRect/>
+          </a:stretch>
+        </p:blipFill>
+        <p:spPr>
+          <a:xfrm>
+            <a:off x="881063" y="2010251"/>
+            <a:ext cx="6434138" cy="956667"/>
+          </a:xfrm>
+          <a:prstGeom prst="rect">
+            <a:avLst/>
+          </a:prstGeom>
+        </p:spPr>
+      </p:pic>
+      <p:sp>
+        <p:nvSpPr>
+          <p:cNvPr id="4" name="Text 1"/>
+          <p:cNvSpPr/>
+          <p:nvPr/>
+        </p:nvSpPr>
+        <p:spPr>
+          <a:xfrm>
+            <a:off x="1120140" y="3205996"/>
+            <a:ext cx="2657475" cy="332184"/>
+          </a:xfrm>
+          <a:prstGeom prst="rect">
+            <a:avLst/>
+          </a:prstGeom>
+          <a:noFill/>
+          <a:ln/>
+        </p:spPr>
+        <p:txBody>
+          <a:bodyPr wrap="none" lIns="0" tIns="0" rIns="0" bIns="0" rtlCol="0" anchor="t"/>
+          <a:lstStyle/>
+          <a:p>
+            <a:pPr marL="0" indent="0" algn="l">
+              <a:lnSpc>
+                <a:spcPts val="2600"/>
+              </a:lnSpc>
+              <a:buNone/>
+            </a:pPr>
+            <a:r>
+              <a:rPr lang="en-US" sz="2050" b="1" dirty="0">
+                <a:solidFill>
+                  <a:srgbClr val="D7D4CC"/>
+                </a:solidFill>
+                <a:latin typeface="Comfortaa Bold" pitchFamily="34" charset="0"/>
+                <a:ea typeface="Comfortaa Bold" pitchFamily="34" charset="-122"/>
+                <a:cs typeface="Comfortaa Bold" pitchFamily="34" charset="-120"/>
+              </a:rPr>
+              <a:t>Projecte Real</a:t>
+            </a:r>
+            <a:endParaRPr lang="en-US" sz="2050" dirty="0"/>
+          </a:p>
+        </p:txBody>
+      </p:sp>
+      <p:sp>
+        <p:nvSpPr>
+          <p:cNvPr id="5" name="Text 2"/>
+          <p:cNvSpPr/>
+          <p:nvPr/>
+        </p:nvSpPr>
+        <p:spPr>
+          <a:xfrm>
+            <a:off x="1120140" y="3681651"/>
+            <a:ext cx="5955982" cy="765334"/>
+          </a:xfrm>
+          <a:prstGeom prst="rect">
+            <a:avLst/>
+          </a:prstGeom>
+          <a:noFill/>
+          <a:ln/>
+        </p:spPr>
+        <p:txBody>
+          <a:bodyPr wrap="square" lIns="0" tIns="0" rIns="0" bIns="0" rtlCol="0" anchor="t"/>
+          <a:lstStyle/>
+          <a:p>
+            <a:pPr marL="0" indent="0" algn="l">
+              <a:lnSpc>
+                <a:spcPts val="3000"/>
+              </a:lnSpc>
+              <a:buNone/>
+            </a:pPr>
+            <a:r>
+              <a:rPr lang="en-US" sz="1850" dirty="0">
+                <a:solidFill>
+                  <a:srgbClr val="D7D4CC"/>
+                </a:solidFill>
+                <a:latin typeface="Raleway Medium" pitchFamily="34" charset="0"/>
+                <a:ea typeface="Raleway Medium" pitchFamily="34" charset="-122"/>
+                <a:cs typeface="Raleway Medium" pitchFamily="34" charset="-120"/>
+              </a:rPr>
+              <a:t>Desenvolupament d'una interfície completa per al poliesportiu, aplicant tots els coneixements adquirits.</a:t>
+            </a:r>
+            <a:endParaRPr lang="en-US" sz="1850" dirty="0"/>
+          </a:p>
+        </p:txBody>
+      </p:sp>
+      <p:pic>
+        <p:nvPicPr>
+          <p:cNvPr id="6" name="Image 1" descr="preencoded.png"/>
+          <p:cNvPicPr>
+            <a:picLocks noChangeAspect="1"/>
+          </p:cNvPicPr>
+          <p:nvPr/>
+        </p:nvPicPr>
+        <p:blipFill>
+          <a:blip r:embed="rId4"/>
+          <a:stretch>
+            <a:fillRect/>
+          </a:stretch>
+        </p:blipFill>
+        <p:spPr>
+          <a:xfrm>
+            <a:off x="7315200" y="2010251"/>
+            <a:ext cx="6434138" cy="956667"/>
+          </a:xfrm>
+          <a:prstGeom prst="rect">
+            <a:avLst/>
+          </a:prstGeom>
+        </p:spPr>
+      </p:pic>
+      <p:sp>
+        <p:nvSpPr>
+          <p:cNvPr id="7" name="Text 3"/>
+          <p:cNvSpPr/>
+          <p:nvPr/>
+        </p:nvSpPr>
+        <p:spPr>
+          <a:xfrm>
+            <a:off x="7554278" y="3205996"/>
+            <a:ext cx="3284577" cy="332184"/>
+          </a:xfrm>
+          <a:prstGeom prst="rect">
+            <a:avLst/>
+          </a:prstGeom>
+          <a:noFill/>
+          <a:ln/>
+        </p:spPr>
+        <p:txBody>
+          <a:bodyPr wrap="none" lIns="0" tIns="0" rIns="0" bIns="0" rtlCol="0" anchor="t"/>
+          <a:lstStyle/>
+          <a:p>
+            <a:pPr marL="0" indent="0" algn="l">
+              <a:lnSpc>
+                <a:spcPts val="2600"/>
+              </a:lnSpc>
+              <a:buNone/>
+            </a:pPr>
+            <a:r>
+              <a:rPr lang="en-US" sz="2050" b="1" dirty="0">
+                <a:solidFill>
+                  <a:srgbClr val="D7D4CC"/>
+                </a:solidFill>
+                <a:latin typeface="Comfortaa Bold" pitchFamily="34" charset="0"/>
+                <a:ea typeface="Comfortaa Bold" pitchFamily="34" charset="-122"/>
+                <a:cs typeface="Comfortaa Bold" pitchFamily="34" charset="-120"/>
+              </a:rPr>
+              <a:t>Competències Integrals</a:t>
+            </a:r>
+            <a:endParaRPr lang="en-US" sz="2050" dirty="0"/>
+          </a:p>
+        </p:txBody>
+      </p:sp>
+      <p:sp>
+        <p:nvSpPr>
+          <p:cNvPr id="8" name="Text 4"/>
+          <p:cNvSpPr/>
+          <p:nvPr/>
+        </p:nvSpPr>
+        <p:spPr>
+          <a:xfrm>
+            <a:off x="7554278" y="3681651"/>
+            <a:ext cx="5955982" cy="765334"/>
+          </a:xfrm>
+          <a:prstGeom prst="rect">
+            <a:avLst/>
+          </a:prstGeom>
+          <a:noFill/>
+          <a:ln/>
+        </p:spPr>
+        <p:txBody>
+          <a:bodyPr wrap="square" lIns="0" tIns="0" rIns="0" bIns="0" rtlCol="0" anchor="t"/>
+          <a:lstStyle/>
+          <a:p>
+            <a:pPr marL="0" indent="0" algn="l">
+              <a:lnSpc>
+                <a:spcPts val="3000"/>
+              </a:lnSpc>
+              <a:buNone/>
+            </a:pPr>
+            <a:r>
+              <a:rPr lang="en-US" sz="1850" dirty="0">
+                <a:solidFill>
+                  <a:srgbClr val="D7D4CC"/>
+                </a:solidFill>
+                <a:latin typeface="Raleway Medium" pitchFamily="34" charset="0"/>
+                <a:ea typeface="Raleway Medium" pitchFamily="34" charset="-122"/>
+                <a:cs typeface="Raleway Medium" pitchFamily="34" charset="-120"/>
+              </a:rPr>
+              <a:t>Combinació d'habilitats tècniques i creatives en un entorn de treball professional.</a:t>
+            </a:r>
+            <a:endParaRPr lang="en-US" sz="1850" dirty="0"/>
+          </a:p>
+        </p:txBody>
+      </p:sp>
+      <p:pic>
+        <p:nvPicPr>
+          <p:cNvPr id="9" name="Image 2" descr="preencoded.png"/>
+          <p:cNvPicPr>
+            <a:picLocks noChangeAspect="1"/>
+          </p:cNvPicPr>
+          <p:nvPr/>
+        </p:nvPicPr>
+        <p:blipFill>
+          <a:blip r:embed="rId5"/>
+          <a:stretch>
+            <a:fillRect/>
+          </a:stretch>
+        </p:blipFill>
+        <p:spPr>
+          <a:xfrm>
+            <a:off x="881063" y="4686062"/>
+            <a:ext cx="6434138" cy="956667"/>
+          </a:xfrm>
+          <a:prstGeom prst="rect">
+            <a:avLst/>
+          </a:prstGeom>
+        </p:spPr>
+      </p:pic>
+      <p:sp>
+        <p:nvSpPr>
+          <p:cNvPr id="10" name="Text 5"/>
+          <p:cNvSpPr/>
+          <p:nvPr/>
+        </p:nvSpPr>
+        <p:spPr>
+          <a:xfrm>
+            <a:off x="1120140" y="5881807"/>
+            <a:ext cx="2717483" cy="332184"/>
+          </a:xfrm>
+          <a:prstGeom prst="rect">
+            <a:avLst/>
+          </a:prstGeom>
+          <a:noFill/>
+          <a:ln/>
+        </p:spPr>
+        <p:txBody>
+          <a:bodyPr wrap="none" lIns="0" tIns="0" rIns="0" bIns="0" rtlCol="0" anchor="t"/>
+          <a:lstStyle/>
+          <a:p>
+            <a:pPr marL="0" indent="0" algn="l">
+              <a:lnSpc>
+                <a:spcPts val="2600"/>
+              </a:lnSpc>
+              <a:buNone/>
+            </a:pPr>
+            <a:r>
+              <a:rPr lang="en-US" sz="2050" b="1" dirty="0">
+                <a:solidFill>
+                  <a:srgbClr val="D7D4CC"/>
+                </a:solidFill>
+                <a:latin typeface="Comfortaa Bold" pitchFamily="34" charset="0"/>
+                <a:ea typeface="Comfortaa Bold" pitchFamily="34" charset="-122"/>
+                <a:cs typeface="Comfortaa Bold" pitchFamily="34" charset="-120"/>
+              </a:rPr>
+              <a:t>Avaluació Contínua</a:t>
+            </a:r>
+            <a:endParaRPr lang="en-US" sz="2050" dirty="0"/>
+          </a:p>
+        </p:txBody>
+      </p:sp>
+      <p:sp>
+        <p:nvSpPr>
+          <p:cNvPr id="11" name="Text 6"/>
+          <p:cNvSpPr/>
+          <p:nvPr/>
+        </p:nvSpPr>
+        <p:spPr>
+          <a:xfrm>
+            <a:off x="1120140" y="6357461"/>
+            <a:ext cx="5955982" cy="765334"/>
+          </a:xfrm>
+          <a:prstGeom prst="rect">
+            <a:avLst/>
+          </a:prstGeom>
+          <a:noFill/>
+          <a:ln/>
+        </p:spPr>
+        <p:txBody>
+          <a:bodyPr wrap="square" lIns="0" tIns="0" rIns="0" bIns="0" rtlCol="0" anchor="t"/>
+          <a:lstStyle/>
+          <a:p>
+            <a:pPr marL="0" indent="0" algn="l">
+              <a:lnSpc>
+                <a:spcPts val="3000"/>
+              </a:lnSpc>
+              <a:buNone/>
+            </a:pPr>
+            <a:r>
+              <a:rPr lang="en-US" sz="1850" dirty="0">
+                <a:solidFill>
+                  <a:srgbClr val="D7D4CC"/>
+                </a:solidFill>
+                <a:latin typeface="Raleway Medium" pitchFamily="34" charset="0"/>
+                <a:ea typeface="Raleway Medium" pitchFamily="34" charset="-122"/>
+                <a:cs typeface="Raleway Medium" pitchFamily="34" charset="-120"/>
+              </a:rPr>
+              <a:t>Seguiment progressiu mitjançant activitats que construeixen el projecte complet.</a:t>
+            </a:r>
+            <a:endParaRPr lang="en-US" sz="1850" dirty="0"/>
+          </a:p>
+        </p:txBody>
+      </p:sp>
+      <p:pic>
+        <p:nvPicPr>
+          <p:cNvPr id="12" name="Image 3" descr="preencoded.png"/>
+          <p:cNvPicPr>
+            <a:picLocks noChangeAspect="1"/>
+          </p:cNvPicPr>
+          <p:nvPr/>
+        </p:nvPicPr>
+        <p:blipFill>
+          <a:blip r:embed="rId6"/>
+          <a:stretch>
+            <a:fillRect/>
+          </a:stretch>
+        </p:blipFill>
+        <p:spPr>
+          <a:xfrm>
+            <a:off x="7315200" y="4686062"/>
+            <a:ext cx="6434138" cy="956667"/>
+          </a:xfrm>
+          <a:prstGeom prst="rect">
+            <a:avLst/>
+          </a:prstGeom>
+        </p:spPr>
+      </p:pic>
+      <p:sp>
+        <p:nvSpPr>
+          <p:cNvPr id="13" name="Text 7"/>
+          <p:cNvSpPr/>
+          <p:nvPr/>
+        </p:nvSpPr>
+        <p:spPr>
+          <a:xfrm>
+            <a:off x="7554278" y="5881807"/>
+            <a:ext cx="2703076" cy="332184"/>
+          </a:xfrm>
+          <a:prstGeom prst="rect">
+            <a:avLst/>
+          </a:prstGeom>
+          <a:noFill/>
+          <a:ln/>
+        </p:spPr>
+        <p:txBody>
+          <a:bodyPr wrap="none" lIns="0" tIns="0" rIns="0" bIns="0" rtlCol="0" anchor="t"/>
+          <a:lstStyle/>
+          <a:p>
+            <a:pPr marL="0" indent="0" algn="l">
+              <a:lnSpc>
+                <a:spcPts val="2600"/>
+              </a:lnSpc>
+              <a:buNone/>
+            </a:pPr>
+            <a:r>
+              <a:rPr lang="en-US" sz="2050" b="1" dirty="0">
+                <a:solidFill>
+                  <a:srgbClr val="D7D4CC"/>
+                </a:solidFill>
+                <a:latin typeface="Comfortaa Bold" pitchFamily="34" charset="0"/>
+                <a:ea typeface="Comfortaa Bold" pitchFamily="34" charset="-122"/>
+                <a:cs typeface="Comfortaa Bold" pitchFamily="34" charset="-120"/>
+              </a:rPr>
+              <a:t>Preparació Laboral</a:t>
+            </a:r>
+            <a:endParaRPr lang="en-US" sz="2050" dirty="0"/>
+          </a:p>
+        </p:txBody>
+      </p:sp>
+      <p:sp>
+        <p:nvSpPr>
+          <p:cNvPr id="14" name="Text 8"/>
+          <p:cNvSpPr/>
+          <p:nvPr/>
+        </p:nvSpPr>
+        <p:spPr>
+          <a:xfrm>
+            <a:off x="7554278" y="6357461"/>
+            <a:ext cx="5955982" cy="765334"/>
+          </a:xfrm>
+          <a:prstGeom prst="rect">
+            <a:avLst/>
+          </a:prstGeom>
+          <a:noFill/>
+          <a:ln/>
+        </p:spPr>
+        <p:txBody>
+          <a:bodyPr wrap="square" lIns="0" tIns="0" rIns="0" bIns="0" rtlCol="0" anchor="t"/>
+          <a:lstStyle/>
+          <a:p>
+            <a:pPr marL="0" indent="0" algn="l">
+              <a:lnSpc>
+                <a:spcPts val="3000"/>
+              </a:lnSpc>
+              <a:buNone/>
+            </a:pPr>
+            <a:r>
+              <a:rPr lang="en-US" sz="1850" dirty="0">
+                <a:solidFill>
+                  <a:srgbClr val="D7D4CC"/>
+                </a:solidFill>
+                <a:latin typeface="Raleway Medium" pitchFamily="34" charset="0"/>
+                <a:ea typeface="Raleway Medium" pitchFamily="34" charset="-122"/>
+                <a:cs typeface="Raleway Medium" pitchFamily="34" charset="-120"/>
+              </a:rPr>
+              <a:t>Els alumnes finalitzaran amb un projecte per al portafoli i preparats pel món professional.</a:t>
+            </a:r>
+            <a:endParaRPr lang="en-US" sz="1850" dirty="0"/>
+          </a:p>
+        </p:txBody>
+      </p:sp>
+    </p:spTree>
+  </p:cSld>
+  <p:clrMapOvr>
+    <a:masterClrMapping/>
+  </p:clrMapOvr>
+</p:sld>
+</file>
+
 <file path=ppt/slides/slide3.xml><?xml version="1.0" encoding="utf-8"?>
+<p:sld xmlns:a="http://schemas.openxmlformats.org/drawingml/2006/main" xmlns:r="http://schemas.openxmlformats.org/officeDocument/2006/relationships" xmlns:p="http://schemas.openxmlformats.org/presentationml/2006/main">
+  <p:cSld name="Slide 2">
+    <p:spTree>
+      <p:nvGrpSpPr>
+        <p:cNvPr id="1" name=""/>
+        <p:cNvGrpSpPr/>
+        <p:nvPr/>
+      </p:nvGrpSpPr>
+      <p:grpSpPr>
+        <a:xfrm>
+          <a:off x="0" y="0"/>
+          <a:ext cx="0" cy="0"/>
+          <a:chOff x="0" y="0"/>
+          <a:chExt cx="0" cy="0"/>
+        </a:xfrm>
+      </p:grpSpPr>
+      <p:pic>
+        <p:nvPicPr>
+          <p:cNvPr id="2" name="Image 0" descr="preencoded.png"/>
+          <p:cNvPicPr>
+            <a:picLocks noChangeAspect="1"/>
+          </p:cNvPicPr>
+          <p:nvPr/>
+        </p:nvPicPr>
+        <p:blipFill>
+          <a:blip r:embed="rId3"/>
+          <a:stretch>
+            <a:fillRect/>
+          </a:stretch>
+        </p:blipFill>
+        <p:spPr>
+          <a:xfrm>
+            <a:off x="0" y="0"/>
+            <a:ext cx="5486400" cy="8229600"/>
+          </a:xfrm>
+          <a:prstGeom prst="rect">
+            <a:avLst/>
+          </a:prstGeom>
+        </p:spPr>
+      </p:pic>
+      <p:sp>
+        <p:nvSpPr>
+          <p:cNvPr id="3" name="Text 0"/>
+          <p:cNvSpPr/>
+          <p:nvPr/>
+        </p:nvSpPr>
+        <p:spPr>
+          <a:xfrm>
+            <a:off x="6367462" y="943451"/>
+            <a:ext cx="5585579" cy="664369"/>
+          </a:xfrm>
+          <a:prstGeom prst="rect">
+            <a:avLst/>
+          </a:prstGeom>
+          <a:noFill/>
+          <a:ln/>
+        </p:spPr>
+        <p:txBody>
+          <a:bodyPr wrap="none" lIns="0" tIns="0" rIns="0" bIns="0" rtlCol="0" anchor="t"/>
+          <a:lstStyle/>
+          <a:p>
+            <a:pPr marL="0" indent="0" algn="l">
+              <a:lnSpc>
+                <a:spcPts val="5200"/>
+              </a:lnSpc>
+              <a:buNone/>
+            </a:pPr>
+            <a:r>
+              <a:rPr lang="en-US" sz="4150" b="1" dirty="0">
+                <a:solidFill>
+                  <a:srgbClr val="FFE14D"/>
+                </a:solidFill>
+                <a:latin typeface="Comfortaa Bold" pitchFamily="34" charset="0"/>
+                <a:ea typeface="Comfortaa Bold" pitchFamily="34" charset="-122"/>
+                <a:cs typeface="Comfortaa Bold" pitchFamily="34" charset="-120"/>
+              </a:rPr>
+              <a:t>Objectius del mòdul</a:t>
+            </a:r>
+            <a:endParaRPr lang="en-US" sz="4150" dirty="0"/>
+          </a:p>
+        </p:txBody>
+      </p:sp>
+      <p:sp>
+        <p:nvSpPr>
+          <p:cNvPr id="4" name="Shape 1"/>
+          <p:cNvSpPr/>
+          <p:nvPr/>
+        </p:nvSpPr>
+        <p:spPr>
+          <a:xfrm>
+            <a:off x="6367462" y="1966555"/>
+            <a:ext cx="538043" cy="538043"/>
+          </a:xfrm>
+          <a:prstGeom prst="roundRect">
+            <a:avLst>
+              <a:gd name="adj" fmla="val 66680"/>
+            </a:avLst>
+          </a:prstGeom>
+          <a:solidFill>
+            <a:srgbClr val="46464A"/>
+          </a:solidFill>
+          <a:ln/>
+        </p:spPr>
+        <p:txBody>
+          <a:bodyPr/>
+          <a:lstStyle/>
+          <a:p>
+            <a:endParaRPr lang="es-ES"/>
+          </a:p>
+        </p:txBody>
+      </p:sp>
+      <p:pic>
+        <p:nvPicPr>
+          <p:cNvPr id="5" name="Image 1" descr="preencoded.png"/>
+          <p:cNvPicPr>
+            <a:picLocks noChangeAspect="1"/>
+          </p:cNvPicPr>
+          <p:nvPr/>
+        </p:nvPicPr>
+        <p:blipFill>
+          <a:blip r:embed="rId4"/>
+          <a:stretch>
+            <a:fillRect/>
+          </a:stretch>
+        </p:blipFill>
+        <p:spPr>
+          <a:xfrm>
+            <a:off x="6477000" y="2036207"/>
+            <a:ext cx="318849" cy="398621"/>
+          </a:xfrm>
+          <a:prstGeom prst="rect">
+            <a:avLst/>
+          </a:prstGeom>
+        </p:spPr>
+      </p:pic>
+      <p:sp>
+        <p:nvSpPr>
+          <p:cNvPr id="6" name="Text 2"/>
+          <p:cNvSpPr/>
+          <p:nvPr/>
+        </p:nvSpPr>
+        <p:spPr>
+          <a:xfrm>
+            <a:off x="7144583" y="2048708"/>
+            <a:ext cx="2764274" cy="996553"/>
+          </a:xfrm>
+          <a:prstGeom prst="rect">
+            <a:avLst/>
+          </a:prstGeom>
+          <a:noFill/>
+          <a:ln/>
+        </p:spPr>
+        <p:txBody>
+          <a:bodyPr wrap="square" lIns="0" tIns="0" rIns="0" bIns="0" rtlCol="0" anchor="t"/>
+          <a:lstStyle/>
+          <a:p>
+            <a:pPr marL="0" indent="0" algn="l">
+              <a:lnSpc>
+                <a:spcPts val="2600"/>
+              </a:lnSpc>
+              <a:buNone/>
+            </a:pPr>
+            <a:r>
+              <a:rPr lang="en-US" sz="2050" b="1" dirty="0">
+                <a:solidFill>
+                  <a:srgbClr val="D7D4CC"/>
+                </a:solidFill>
+                <a:latin typeface="Comfortaa Bold" pitchFamily="34" charset="0"/>
+                <a:ea typeface="Comfortaa Bold" pitchFamily="34" charset="-122"/>
+                <a:cs typeface="Comfortaa Bold" pitchFamily="34" charset="-120"/>
+              </a:rPr>
+              <a:t>Comprendre els fonaments del disseny d'interfícies</a:t>
+            </a:r>
+            <a:endParaRPr lang="en-US" sz="2050" dirty="0"/>
+          </a:p>
+        </p:txBody>
+      </p:sp>
+      <p:sp>
+        <p:nvSpPr>
+          <p:cNvPr id="7" name="Text 3"/>
+          <p:cNvSpPr/>
+          <p:nvPr/>
+        </p:nvSpPr>
+        <p:spPr>
+          <a:xfrm>
+            <a:off x="7144583" y="3188732"/>
+            <a:ext cx="2764274" cy="2296001"/>
+          </a:xfrm>
+          <a:prstGeom prst="rect">
+            <a:avLst/>
+          </a:prstGeom>
+          <a:noFill/>
+          <a:ln/>
+        </p:spPr>
+        <p:txBody>
+          <a:bodyPr wrap="square" lIns="0" tIns="0" rIns="0" bIns="0" rtlCol="0" anchor="t"/>
+          <a:lstStyle/>
+          <a:p>
+            <a:pPr marL="0" indent="0" algn="l">
+              <a:lnSpc>
+                <a:spcPts val="3000"/>
+              </a:lnSpc>
+              <a:buNone/>
+            </a:pPr>
+            <a:r>
+              <a:rPr lang="en-US" sz="1850" dirty="0">
+                <a:solidFill>
+                  <a:srgbClr val="D7D4CC"/>
+                </a:solidFill>
+                <a:latin typeface="Raleway Medium" pitchFamily="34" charset="0"/>
+                <a:ea typeface="Raleway Medium" pitchFamily="34" charset="-122"/>
+                <a:cs typeface="Raleway Medium" pitchFamily="34" charset="-120"/>
+              </a:rPr>
+              <a:t>Aprendre els principis de percepció visual i la seva aplicació en el disseny d'interfícies web efectius per a entorns esportius.</a:t>
+            </a:r>
+            <a:endParaRPr lang="en-US" sz="1850" dirty="0"/>
+          </a:p>
+        </p:txBody>
+      </p:sp>
+      <p:sp>
+        <p:nvSpPr>
+          <p:cNvPr id="8" name="Shape 4"/>
+          <p:cNvSpPr/>
+          <p:nvPr/>
+        </p:nvSpPr>
+        <p:spPr>
+          <a:xfrm>
+            <a:off x="10207823" y="1966555"/>
+            <a:ext cx="538043" cy="538043"/>
+          </a:xfrm>
+          <a:prstGeom prst="roundRect">
+            <a:avLst>
+              <a:gd name="adj" fmla="val 66680"/>
+            </a:avLst>
+          </a:prstGeom>
+          <a:solidFill>
+            <a:srgbClr val="46464A"/>
+          </a:solidFill>
+          <a:ln/>
+        </p:spPr>
+        <p:txBody>
+          <a:bodyPr/>
+          <a:lstStyle/>
+          <a:p>
+            <a:endParaRPr lang="es-ES"/>
+          </a:p>
+        </p:txBody>
+      </p:sp>
+      <p:pic>
+        <p:nvPicPr>
+          <p:cNvPr id="9" name="Image 2" descr="preencoded.png"/>
+          <p:cNvPicPr>
+            <a:picLocks noChangeAspect="1"/>
+          </p:cNvPicPr>
+          <p:nvPr/>
+        </p:nvPicPr>
+        <p:blipFill>
+          <a:blip r:embed="rId5"/>
+          <a:stretch>
+            <a:fillRect/>
+          </a:stretch>
+        </p:blipFill>
+        <p:spPr>
+          <a:xfrm>
+            <a:off x="10317361" y="2036207"/>
+            <a:ext cx="318849" cy="398621"/>
+          </a:xfrm>
+          <a:prstGeom prst="rect">
+            <a:avLst/>
+          </a:prstGeom>
+        </p:spPr>
+      </p:pic>
+      <p:sp>
+        <p:nvSpPr>
+          <p:cNvPr id="10" name="Text 5"/>
+          <p:cNvSpPr/>
+          <p:nvPr/>
+        </p:nvSpPr>
+        <p:spPr>
+          <a:xfrm>
+            <a:off x="10984944" y="2048708"/>
+            <a:ext cx="2764393" cy="664369"/>
+          </a:xfrm>
+          <a:prstGeom prst="rect">
+            <a:avLst/>
+          </a:prstGeom>
+          <a:noFill/>
+          <a:ln/>
+        </p:spPr>
+        <p:txBody>
+          <a:bodyPr wrap="square" lIns="0" tIns="0" rIns="0" bIns="0" rtlCol="0" anchor="t"/>
+          <a:lstStyle/>
+          <a:p>
+            <a:pPr marL="0" indent="0" algn="l">
+              <a:lnSpc>
+                <a:spcPts val="2600"/>
+              </a:lnSpc>
+              <a:buNone/>
+            </a:pPr>
+            <a:r>
+              <a:rPr lang="en-US" sz="2050" b="1" dirty="0">
+                <a:solidFill>
+                  <a:srgbClr val="D7D4CC"/>
+                </a:solidFill>
+                <a:latin typeface="Comfortaa Bold" pitchFamily="34" charset="0"/>
+                <a:ea typeface="Comfortaa Bold" pitchFamily="34" charset="-122"/>
+                <a:cs typeface="Comfortaa Bold" pitchFamily="34" charset="-120"/>
+              </a:rPr>
+              <a:t>Aplicar conceptes d'usabilitat</a:t>
+            </a:r>
+            <a:endParaRPr lang="en-US" sz="2050" dirty="0"/>
+          </a:p>
+        </p:txBody>
+      </p:sp>
+      <p:sp>
+        <p:nvSpPr>
+          <p:cNvPr id="11" name="Text 6"/>
+          <p:cNvSpPr/>
+          <p:nvPr/>
+        </p:nvSpPr>
+        <p:spPr>
+          <a:xfrm>
+            <a:off x="10984944" y="2856547"/>
+            <a:ext cx="2764393" cy="2296001"/>
+          </a:xfrm>
+          <a:prstGeom prst="rect">
+            <a:avLst/>
+          </a:prstGeom>
+          <a:noFill/>
+          <a:ln/>
+        </p:spPr>
+        <p:txBody>
+          <a:bodyPr wrap="square" lIns="0" tIns="0" rIns="0" bIns="0" rtlCol="0" anchor="t"/>
+          <a:lstStyle/>
+          <a:p>
+            <a:pPr marL="0" indent="0" algn="l">
+              <a:lnSpc>
+                <a:spcPts val="3000"/>
+              </a:lnSpc>
+              <a:buNone/>
+            </a:pPr>
+            <a:r>
+              <a:rPr lang="en-US" sz="1850" dirty="0">
+                <a:solidFill>
+                  <a:srgbClr val="D7D4CC"/>
+                </a:solidFill>
+                <a:latin typeface="Raleway Medium" pitchFamily="34" charset="0"/>
+                <a:ea typeface="Raleway Medium" pitchFamily="34" charset="-122"/>
+                <a:cs typeface="Raleway Medium" pitchFamily="34" charset="-120"/>
+              </a:rPr>
+              <a:t>Implementar metodologies de disseny centrat en l'usuari per crear interfícies intuïtives per a la gestió de reserves.</a:t>
+            </a:r>
+            <a:endParaRPr lang="en-US" sz="1850" dirty="0"/>
+          </a:p>
+        </p:txBody>
+      </p:sp>
+      <p:sp>
+        <p:nvSpPr>
+          <p:cNvPr id="12" name="Shape 7"/>
+          <p:cNvSpPr/>
+          <p:nvPr/>
+        </p:nvSpPr>
+        <p:spPr>
+          <a:xfrm>
+            <a:off x="6367462" y="5963007"/>
+            <a:ext cx="538043" cy="538043"/>
+          </a:xfrm>
+          <a:prstGeom prst="roundRect">
+            <a:avLst>
+              <a:gd name="adj" fmla="val 66680"/>
+            </a:avLst>
+          </a:prstGeom>
+          <a:solidFill>
+            <a:srgbClr val="46464A"/>
+          </a:solidFill>
+          <a:ln/>
+        </p:spPr>
+        <p:txBody>
+          <a:bodyPr/>
+          <a:lstStyle/>
+          <a:p>
+            <a:endParaRPr lang="es-ES"/>
+          </a:p>
+        </p:txBody>
+      </p:sp>
+      <p:pic>
+        <p:nvPicPr>
+          <p:cNvPr id="13" name="Image 3" descr="preencoded.png"/>
+          <p:cNvPicPr>
+            <a:picLocks noChangeAspect="1"/>
+          </p:cNvPicPr>
+          <p:nvPr/>
+        </p:nvPicPr>
+        <p:blipFill>
+          <a:blip r:embed="rId6"/>
+          <a:stretch>
+            <a:fillRect/>
+          </a:stretch>
+        </p:blipFill>
+        <p:spPr>
+          <a:xfrm>
+            <a:off x="6477000" y="6032659"/>
+            <a:ext cx="318849" cy="398621"/>
+          </a:xfrm>
+          <a:prstGeom prst="rect">
+            <a:avLst/>
+          </a:prstGeom>
+        </p:spPr>
+      </p:pic>
+      <p:sp>
+        <p:nvSpPr>
+          <p:cNvPr id="14" name="Text 8"/>
+          <p:cNvSpPr/>
+          <p:nvPr/>
+        </p:nvSpPr>
+        <p:spPr>
+          <a:xfrm>
+            <a:off x="7144583" y="6045160"/>
+            <a:ext cx="6386274" cy="332184"/>
+          </a:xfrm>
+          <a:prstGeom prst="rect">
+            <a:avLst/>
+          </a:prstGeom>
+          <a:noFill/>
+          <a:ln/>
+        </p:spPr>
+        <p:txBody>
+          <a:bodyPr wrap="none" lIns="0" tIns="0" rIns="0" bIns="0" rtlCol="0" anchor="t"/>
+          <a:lstStyle/>
+          <a:p>
+            <a:pPr marL="0" indent="0" algn="l">
+              <a:lnSpc>
+                <a:spcPts val="2600"/>
+              </a:lnSpc>
+              <a:buNone/>
+            </a:pPr>
+            <a:r>
+              <a:rPr lang="en-US" sz="2050" b="1" dirty="0">
+                <a:solidFill>
+                  <a:srgbClr val="D7D4CC"/>
+                </a:solidFill>
+                <a:latin typeface="Comfortaa Bold" pitchFamily="34" charset="0"/>
+                <a:ea typeface="Comfortaa Bold" pitchFamily="34" charset="-122"/>
+                <a:cs typeface="Comfortaa Bold" pitchFamily="34" charset="-120"/>
+              </a:rPr>
+              <a:t>Desenvolupar estructures HTML semàntiques</a:t>
+            </a:r>
+            <a:endParaRPr lang="en-US" sz="2050" dirty="0"/>
+          </a:p>
+        </p:txBody>
+      </p:sp>
+      <p:sp>
+        <p:nvSpPr>
+          <p:cNvPr id="15" name="Text 9"/>
+          <p:cNvSpPr/>
+          <p:nvPr/>
+        </p:nvSpPr>
+        <p:spPr>
+          <a:xfrm>
+            <a:off x="7144583" y="6520815"/>
+            <a:ext cx="6604754" cy="765334"/>
+          </a:xfrm>
+          <a:prstGeom prst="rect">
+            <a:avLst/>
+          </a:prstGeom>
+          <a:noFill/>
+          <a:ln/>
+        </p:spPr>
+        <p:txBody>
+          <a:bodyPr wrap="square" lIns="0" tIns="0" rIns="0" bIns="0" rtlCol="0" anchor="t"/>
+          <a:lstStyle/>
+          <a:p>
+            <a:pPr marL="0" indent="0" algn="l">
+              <a:lnSpc>
+                <a:spcPts val="3000"/>
+              </a:lnSpc>
+              <a:buNone/>
+            </a:pPr>
+            <a:r>
+              <a:rPr lang="en-US" sz="1850" dirty="0">
+                <a:solidFill>
+                  <a:srgbClr val="D7D4CC"/>
+                </a:solidFill>
+                <a:latin typeface="Raleway Medium" pitchFamily="34" charset="0"/>
+                <a:ea typeface="Raleway Medium" pitchFamily="34" charset="-122"/>
+                <a:cs typeface="Raleway Medium" pitchFamily="34" charset="-120"/>
+              </a:rPr>
+              <a:t>Crear estructures de contingut coherents i optimitzades per a les diferents seccions de l'aplicació.</a:t>
+            </a:r>
+            <a:endParaRPr lang="en-US" sz="1850" dirty="0"/>
+          </a:p>
+        </p:txBody>
+      </p:sp>
+    </p:spTree>
+  </p:cSld>
+  <p:clrMapOvr>
+    <a:masterClrMapping/>
+  </p:clrMapOvr>
+</p:sld>
+</file>
+
+<file path=ppt/slides/slide30.xml><?xml version="1.0" encoding="utf-8"?>
+<p:sld xmlns:a="http://schemas.openxmlformats.org/drawingml/2006/main" xmlns:r="http://schemas.openxmlformats.org/officeDocument/2006/relationships" xmlns:p="http://schemas.openxmlformats.org/presentationml/2006/main">
+  <p:cSld>
+    <p:spTree>
+      <p:nvGrpSpPr>
+        <p:cNvPr id="1" name=""/>
+        <p:cNvGrpSpPr/>
+        <p:nvPr/>
+      </p:nvGrpSpPr>
+      <p:grpSpPr>
+        <a:xfrm>
+          <a:off x="0" y="0"/>
+          <a:ext cx="0" cy="0"/>
+          <a:chOff x="0" y="0"/>
+          <a:chExt cx="0" cy="0"/>
+        </a:xfrm>
+      </p:grpSpPr>
+      <p:sp>
+        <p:nvSpPr>
+          <p:cNvPr id="2" name="CuadroTexto 1">
+            <a:extLst>
+              <a:ext uri="{FF2B5EF4-FFF2-40B4-BE49-F238E27FC236}">
+                <a16:creationId xmlns:a16="http://schemas.microsoft.com/office/drawing/2014/main" id="{B75A22D7-2221-F6D2-CA54-DF4307E542BE}"/>
+              </a:ext>
+            </a:extLst>
+          </p:cNvPr>
+          <p:cNvSpPr txBox="1"/>
+          <p:nvPr/>
+        </p:nvSpPr>
+        <p:spPr>
+          <a:xfrm>
+            <a:off x="2978103" y="3328026"/>
+            <a:ext cx="8683040" cy="1569660"/>
+          </a:xfrm>
+          <a:prstGeom prst="rect">
+            <a:avLst/>
+          </a:prstGeom>
+          <a:noFill/>
+        </p:spPr>
+        <p:txBody>
+          <a:bodyPr rot="0" spcFirstLastPara="0" vertOverflow="overflow" horzOverflow="overflow" vert="horz" wrap="square" lIns="91440" tIns="45720" rIns="91440" bIns="45720" numCol="1" spcCol="0" rtlCol="0" fromWordArt="0" anchor="t" anchorCtr="0" forceAA="0" compatLnSpc="1">
+            <a:prstTxWarp prst="textNoShape">
+              <a:avLst/>
+            </a:prstTxWarp>
+            <a:spAutoFit/>
+          </a:bodyPr>
+          <a:lstStyle/>
+          <a:p>
+            <a:r>
+              <a:rPr lang="ca-ES-valencia" sz="9600" dirty="0">
+                <a:ea typeface="Calibri"/>
+                <a:cs typeface="Calibri"/>
+              </a:rPr>
+              <a:t>Moltes gràcies!!!</a:t>
+            </a:r>
+          </a:p>
+        </p:txBody>
+      </p:sp>
+    </p:spTree>
+    <p:extLst>
+      <p:ext uri="{BB962C8B-B14F-4D97-AF65-F5344CB8AC3E}">
+        <p14:creationId xmlns:p14="http://schemas.microsoft.com/office/powerpoint/2010/main" val="1580748575"/>
+      </p:ext>
+    </p:extLst>
+  </p:cSld>
+  <p:clrMapOvr>
+    <a:masterClrMapping/>
+  </p:clrMapOvr>
+</p:sld>
+</file>
+
+<file path=ppt/slides/slide4.xml><?xml version="1.0" encoding="utf-8"?>
 <p:sld xmlns:a="http://schemas.openxmlformats.org/drawingml/2006/main" xmlns:r="http://schemas.openxmlformats.org/officeDocument/2006/relationships" xmlns:p="http://schemas.openxmlformats.org/presentationml/2006/main">
   <p:cSld name="Slide 3">
     <p:spTree>
@@ -33901,964 +37586,6 @@
               <a:t>Integrar elements multimèdia (imatges, icones) de manera coherent en la interfície.</a:t>
             </a:r>
             <a:endParaRPr lang="en-US" sz="1950" dirty="0"/>
-          </a:p>
-        </p:txBody>
-      </p:sp>
-    </p:spTree>
-  </p:cSld>
-  <p:clrMapOvr>
-    <a:masterClrMapping/>
-  </p:clrMapOvr>
-</p:sld>
-</file>
-
-<file path=ppt/slides/slide4.xml><?xml version="1.0" encoding="utf-8"?>
-<p:sld xmlns:a="http://schemas.openxmlformats.org/drawingml/2006/main" xmlns:r="http://schemas.openxmlformats.org/officeDocument/2006/relationships" xmlns:p="http://schemas.openxmlformats.org/presentationml/2006/main">
-  <p:cSld name="Slide 4">
-    <p:spTree>
-      <p:nvGrpSpPr>
-        <p:cNvPr id="1" name=""/>
-        <p:cNvGrpSpPr/>
-        <p:nvPr/>
-      </p:nvGrpSpPr>
-      <p:grpSpPr>
-        <a:xfrm>
-          <a:off x="0" y="0"/>
-          <a:ext cx="0" cy="0"/>
-          <a:chOff x="0" y="0"/>
-          <a:chExt cx="0" cy="0"/>
-        </a:xfrm>
-      </p:grpSpPr>
-      <p:sp>
-        <p:nvSpPr>
-          <p:cNvPr id="2" name="Text 0"/>
-          <p:cNvSpPr/>
-          <p:nvPr/>
-        </p:nvSpPr>
-        <p:spPr>
-          <a:xfrm>
-            <a:off x="839867" y="659963"/>
-            <a:ext cx="3466386" cy="433149"/>
-          </a:xfrm>
-          <a:prstGeom prst="rect">
-            <a:avLst/>
-          </a:prstGeom>
-          <a:noFill/>
-          <a:ln/>
-        </p:spPr>
-        <p:txBody>
-          <a:bodyPr wrap="none" lIns="0" tIns="0" rIns="0" bIns="0" rtlCol="0" anchor="t"/>
-          <a:lstStyle/>
-          <a:p>
-            <a:pPr marL="0" indent="0" algn="l">
-              <a:lnSpc>
-                <a:spcPts val="3400"/>
-              </a:lnSpc>
-              <a:buNone/>
-            </a:pPr>
-            <a:r>
-              <a:rPr lang="en-US" sz="2700" b="1" dirty="0">
-                <a:solidFill>
-                  <a:srgbClr val="FFE14D"/>
-                </a:solidFill>
-                <a:latin typeface="Comfortaa Bold" pitchFamily="34" charset="0"/>
-                <a:ea typeface="Comfortaa Bold" pitchFamily="34" charset="-122"/>
-                <a:cs typeface="Comfortaa Bold" pitchFamily="34" charset="-120"/>
-              </a:rPr>
-              <a:t>Continguts</a:t>
-            </a:r>
-            <a:endParaRPr lang="en-US" sz="2700" dirty="0"/>
-          </a:p>
-        </p:txBody>
-      </p:sp>
-      <p:sp>
-        <p:nvSpPr>
-          <p:cNvPr id="3" name="Shape 1"/>
-          <p:cNvSpPr/>
-          <p:nvPr/>
-        </p:nvSpPr>
-        <p:spPr>
-          <a:xfrm>
-            <a:off x="839867" y="1405057"/>
-            <a:ext cx="1295043" cy="1121331"/>
-          </a:xfrm>
-          <a:prstGeom prst="roundRect">
-            <a:avLst>
-              <a:gd name="adj" fmla="val 20867"/>
-            </a:avLst>
-          </a:prstGeom>
-          <a:solidFill>
-            <a:srgbClr val="46464A"/>
-          </a:solidFill>
-          <a:ln/>
-        </p:spPr>
-        <p:txBody>
-          <a:bodyPr/>
-          <a:lstStyle/>
-          <a:p>
-            <a:endParaRPr lang="es-ES"/>
-          </a:p>
-        </p:txBody>
-      </p:sp>
-      <p:sp>
-        <p:nvSpPr>
-          <p:cNvPr id="4" name="Text 2"/>
-          <p:cNvSpPr/>
-          <p:nvPr/>
-        </p:nvSpPr>
-        <p:spPr>
-          <a:xfrm>
-            <a:off x="1377672" y="1828562"/>
-            <a:ext cx="219313" cy="274201"/>
-          </a:xfrm>
-          <a:prstGeom prst="rect">
-            <a:avLst/>
-          </a:prstGeom>
-          <a:noFill/>
-          <a:ln/>
-        </p:spPr>
-        <p:txBody>
-          <a:bodyPr wrap="none" lIns="0" tIns="0" rIns="0" bIns="0" rtlCol="0" anchor="t"/>
-          <a:lstStyle/>
-          <a:p>
-            <a:pPr marL="0" indent="0" algn="ctr">
-              <a:lnSpc>
-                <a:spcPts val="2750"/>
-              </a:lnSpc>
-              <a:buNone/>
-            </a:pPr>
-            <a:r>
-              <a:rPr lang="en-US" sz="1700" b="1" dirty="0">
-                <a:solidFill>
-                  <a:srgbClr val="D7D4CC"/>
-                </a:solidFill>
-                <a:latin typeface="Comfortaa Bold" pitchFamily="34" charset="0"/>
-                <a:ea typeface="Comfortaa Bold" pitchFamily="34" charset="-122"/>
-                <a:cs typeface="Comfortaa Bold" pitchFamily="34" charset="-120"/>
-              </a:rPr>
-              <a:t>1</a:t>
-            </a:r>
-            <a:endParaRPr lang="en-US" sz="1700" dirty="0"/>
-          </a:p>
-        </p:txBody>
-      </p:sp>
-      <p:sp>
-        <p:nvSpPr>
-          <p:cNvPr id="5" name="Text 3"/>
-          <p:cNvSpPr/>
-          <p:nvPr/>
-        </p:nvSpPr>
-        <p:spPr>
-          <a:xfrm>
-            <a:off x="2290882" y="1561028"/>
-            <a:ext cx="2029539" cy="216694"/>
-          </a:xfrm>
-          <a:prstGeom prst="rect">
-            <a:avLst/>
-          </a:prstGeom>
-          <a:noFill/>
-          <a:ln/>
-        </p:spPr>
-        <p:txBody>
-          <a:bodyPr wrap="none" lIns="0" tIns="0" rIns="0" bIns="0" rtlCol="0" anchor="t"/>
-          <a:lstStyle/>
-          <a:p>
-            <a:pPr marL="0" indent="0" algn="l">
-              <a:lnSpc>
-                <a:spcPts val="1700"/>
-              </a:lnSpc>
-              <a:buNone/>
-            </a:pPr>
-            <a:r>
-              <a:rPr lang="en-US" sz="1350" b="1" dirty="0">
-                <a:solidFill>
-                  <a:srgbClr val="D7D4CC"/>
-                </a:solidFill>
-                <a:latin typeface="Comfortaa Bold" pitchFamily="34" charset="0"/>
-                <a:ea typeface="Comfortaa Bold" pitchFamily="34" charset="-122"/>
-                <a:cs typeface="Comfortaa Bold" pitchFamily="34" charset="-120"/>
-              </a:rPr>
-              <a:t>Introducció i objectius</a:t>
-            </a:r>
-            <a:endParaRPr lang="en-US" sz="1350" dirty="0"/>
-          </a:p>
-        </p:txBody>
-      </p:sp>
-      <p:sp>
-        <p:nvSpPr>
-          <p:cNvPr id="6" name="Text 4"/>
-          <p:cNvSpPr/>
-          <p:nvPr/>
-        </p:nvSpPr>
-        <p:spPr>
-          <a:xfrm>
-            <a:off x="2290882" y="1871305"/>
-            <a:ext cx="11343680" cy="499110"/>
-          </a:xfrm>
-          <a:prstGeom prst="rect">
-            <a:avLst/>
-          </a:prstGeom>
-          <a:noFill/>
-          <a:ln/>
-        </p:spPr>
-        <p:txBody>
-          <a:bodyPr wrap="square" lIns="0" tIns="0" rIns="0" bIns="0" rtlCol="0" anchor="t"/>
-          <a:lstStyle/>
-          <a:p>
-            <a:pPr marL="0" indent="0" algn="l">
-              <a:lnSpc>
-                <a:spcPts val="1950"/>
-              </a:lnSpc>
-              <a:buNone/>
-            </a:pPr>
-            <a:r>
-              <a:rPr lang="en-US" sz="1200" dirty="0">
-                <a:solidFill>
-                  <a:srgbClr val="D7D4CC"/>
-                </a:solidFill>
-                <a:latin typeface="Raleway Medium" pitchFamily="34" charset="0"/>
-                <a:ea typeface="Raleway Medium" pitchFamily="34" charset="-122"/>
-                <a:cs typeface="Raleway Medium" pitchFamily="34" charset="-120"/>
-              </a:rPr>
-              <a:t>Objectius del mòdul, competències professionals, resultats d'aprenentatge (RAs), criteris d'avaluació (CAs), contextualització del projecte en l'entorn professional i justificació pedagògica de l'enfocament adoptat</a:t>
-            </a:r>
-            <a:endParaRPr lang="en-US" sz="1200" dirty="0"/>
-          </a:p>
-        </p:txBody>
-      </p:sp>
-      <p:sp>
-        <p:nvSpPr>
-          <p:cNvPr id="7" name="Shape 5"/>
-          <p:cNvSpPr/>
-          <p:nvPr/>
-        </p:nvSpPr>
-        <p:spPr>
-          <a:xfrm>
-            <a:off x="2212896" y="2516862"/>
-            <a:ext cx="11499652" cy="11430"/>
-          </a:xfrm>
-          <a:prstGeom prst="roundRect">
-            <a:avLst>
-              <a:gd name="adj" fmla="val 2047152"/>
-            </a:avLst>
-          </a:prstGeom>
-          <a:solidFill>
-            <a:srgbClr val="5F5F63"/>
-          </a:solidFill>
-          <a:ln/>
-        </p:spPr>
-        <p:txBody>
-          <a:bodyPr/>
-          <a:lstStyle/>
-          <a:p>
-            <a:endParaRPr lang="es-ES"/>
-          </a:p>
-        </p:txBody>
-      </p:sp>
-      <p:sp>
-        <p:nvSpPr>
-          <p:cNvPr id="8" name="Shape 6"/>
-          <p:cNvSpPr/>
-          <p:nvPr/>
-        </p:nvSpPr>
-        <p:spPr>
-          <a:xfrm>
-            <a:off x="839867" y="2604373"/>
-            <a:ext cx="2590086" cy="1121331"/>
-          </a:xfrm>
-          <a:prstGeom prst="roundRect">
-            <a:avLst>
-              <a:gd name="adj" fmla="val 20867"/>
-            </a:avLst>
-          </a:prstGeom>
-          <a:solidFill>
-            <a:srgbClr val="46464A"/>
-          </a:solidFill>
-          <a:ln/>
-        </p:spPr>
-        <p:txBody>
-          <a:bodyPr/>
-          <a:lstStyle/>
-          <a:p>
-            <a:endParaRPr lang="es-ES"/>
-          </a:p>
-        </p:txBody>
-      </p:sp>
-      <p:sp>
-        <p:nvSpPr>
-          <p:cNvPr id="9" name="Text 7"/>
-          <p:cNvSpPr/>
-          <p:nvPr/>
-        </p:nvSpPr>
-        <p:spPr>
-          <a:xfrm>
-            <a:off x="2025253" y="3027878"/>
-            <a:ext cx="219313" cy="274201"/>
-          </a:xfrm>
-          <a:prstGeom prst="rect">
-            <a:avLst/>
-          </a:prstGeom>
-          <a:noFill/>
-          <a:ln/>
-        </p:spPr>
-        <p:txBody>
-          <a:bodyPr wrap="none" lIns="0" tIns="0" rIns="0" bIns="0" rtlCol="0" anchor="t"/>
-          <a:lstStyle/>
-          <a:p>
-            <a:pPr marL="0" indent="0" algn="ctr">
-              <a:lnSpc>
-                <a:spcPts val="2750"/>
-              </a:lnSpc>
-              <a:buNone/>
-            </a:pPr>
-            <a:r>
-              <a:rPr lang="en-US" sz="1700" b="1" dirty="0">
-                <a:solidFill>
-                  <a:srgbClr val="D7D4CC"/>
-                </a:solidFill>
-                <a:latin typeface="Comfortaa Bold" pitchFamily="34" charset="0"/>
-                <a:ea typeface="Comfortaa Bold" pitchFamily="34" charset="-122"/>
-                <a:cs typeface="Comfortaa Bold" pitchFamily="34" charset="-120"/>
-              </a:rPr>
-              <a:t>2</a:t>
-            </a:r>
-            <a:endParaRPr lang="en-US" sz="1700" dirty="0"/>
-          </a:p>
-        </p:txBody>
-      </p:sp>
-      <p:sp>
-        <p:nvSpPr>
-          <p:cNvPr id="10" name="Text 8"/>
-          <p:cNvSpPr/>
-          <p:nvPr/>
-        </p:nvSpPr>
-        <p:spPr>
-          <a:xfrm>
-            <a:off x="3585924" y="2760345"/>
-            <a:ext cx="2100024" cy="216694"/>
-          </a:xfrm>
-          <a:prstGeom prst="rect">
-            <a:avLst/>
-          </a:prstGeom>
-          <a:noFill/>
-          <a:ln/>
-        </p:spPr>
-        <p:txBody>
-          <a:bodyPr wrap="none" lIns="0" tIns="0" rIns="0" bIns="0" rtlCol="0" anchor="t"/>
-          <a:lstStyle/>
-          <a:p>
-            <a:pPr marL="0" indent="0" algn="l">
-              <a:lnSpc>
-                <a:spcPts val="1700"/>
-              </a:lnSpc>
-              <a:buNone/>
-            </a:pPr>
-            <a:r>
-              <a:rPr lang="en-US" sz="1350" b="1" dirty="0">
-                <a:solidFill>
-                  <a:srgbClr val="D7D4CC"/>
-                </a:solidFill>
-                <a:latin typeface="Comfortaa Bold" pitchFamily="34" charset="0"/>
-                <a:ea typeface="Comfortaa Bold" pitchFamily="34" charset="-122"/>
-                <a:cs typeface="Comfortaa Bold" pitchFamily="34" charset="-120"/>
-              </a:rPr>
-              <a:t>Descripció del projecte</a:t>
-            </a:r>
-            <a:endParaRPr lang="en-US" sz="1350" dirty="0"/>
-          </a:p>
-        </p:txBody>
-      </p:sp>
-      <p:sp>
-        <p:nvSpPr>
-          <p:cNvPr id="11" name="Text 9"/>
-          <p:cNvSpPr/>
-          <p:nvPr/>
-        </p:nvSpPr>
-        <p:spPr>
-          <a:xfrm>
-            <a:off x="3585924" y="3070622"/>
-            <a:ext cx="10048637" cy="499110"/>
-          </a:xfrm>
-          <a:prstGeom prst="rect">
-            <a:avLst/>
-          </a:prstGeom>
-          <a:noFill/>
-          <a:ln/>
-        </p:spPr>
-        <p:txBody>
-          <a:bodyPr wrap="square" lIns="0" tIns="0" rIns="0" bIns="0" rtlCol="0" anchor="t"/>
-          <a:lstStyle/>
-          <a:p>
-            <a:pPr marL="0" indent="0" algn="l">
-              <a:lnSpc>
-                <a:spcPts val="1950"/>
-              </a:lnSpc>
-              <a:buNone/>
-            </a:pPr>
-            <a:r>
-              <a:rPr lang="en-US" sz="1200" dirty="0">
-                <a:solidFill>
-                  <a:srgbClr val="D7D4CC"/>
-                </a:solidFill>
-                <a:latin typeface="Raleway Medium" pitchFamily="34" charset="0"/>
-                <a:ea typeface="Raleway Medium" pitchFamily="34" charset="-122"/>
-                <a:cs typeface="Raleway Medium" pitchFamily="34" charset="-120"/>
-              </a:rPr>
-              <a:t>Introducció a la problemàtica actual dels poliesportius, necessitats dels usuaris, objectius específics del sistema de reserves, avantatges de la solució web i metodologia d'ensenyament-aprenentatge basada en projectes</a:t>
-            </a:r>
-            <a:endParaRPr lang="en-US" sz="1200" dirty="0"/>
-          </a:p>
-        </p:txBody>
-      </p:sp>
-      <p:sp>
-        <p:nvSpPr>
-          <p:cNvPr id="12" name="Shape 10"/>
-          <p:cNvSpPr/>
-          <p:nvPr/>
-        </p:nvSpPr>
-        <p:spPr>
-          <a:xfrm>
-            <a:off x="3507938" y="3716179"/>
-            <a:ext cx="10204609" cy="11430"/>
-          </a:xfrm>
-          <a:prstGeom prst="roundRect">
-            <a:avLst>
-              <a:gd name="adj" fmla="val 2047152"/>
-            </a:avLst>
-          </a:prstGeom>
-          <a:solidFill>
-            <a:srgbClr val="5F5F63"/>
-          </a:solidFill>
-          <a:ln/>
-        </p:spPr>
-        <p:txBody>
-          <a:bodyPr/>
-          <a:lstStyle/>
-          <a:p>
-            <a:endParaRPr lang="es-ES"/>
-          </a:p>
-        </p:txBody>
-      </p:sp>
-      <p:sp>
-        <p:nvSpPr>
-          <p:cNvPr id="13" name="Shape 11"/>
-          <p:cNvSpPr/>
-          <p:nvPr/>
-        </p:nvSpPr>
-        <p:spPr>
-          <a:xfrm>
-            <a:off x="839867" y="3803690"/>
-            <a:ext cx="3885128" cy="1121331"/>
-          </a:xfrm>
-          <a:prstGeom prst="roundRect">
-            <a:avLst>
-              <a:gd name="adj" fmla="val 20867"/>
-            </a:avLst>
-          </a:prstGeom>
-          <a:solidFill>
-            <a:srgbClr val="46464A"/>
-          </a:solidFill>
-          <a:ln/>
-        </p:spPr>
-        <p:txBody>
-          <a:bodyPr/>
-          <a:lstStyle/>
-          <a:p>
-            <a:endParaRPr lang="es-ES"/>
-          </a:p>
-        </p:txBody>
-      </p:sp>
-      <p:sp>
-        <p:nvSpPr>
-          <p:cNvPr id="14" name="Text 12"/>
-          <p:cNvSpPr/>
-          <p:nvPr/>
-        </p:nvSpPr>
-        <p:spPr>
-          <a:xfrm>
-            <a:off x="2672715" y="4227195"/>
-            <a:ext cx="219313" cy="274201"/>
-          </a:xfrm>
-          <a:prstGeom prst="rect">
-            <a:avLst/>
-          </a:prstGeom>
-          <a:noFill/>
-          <a:ln/>
-        </p:spPr>
-        <p:txBody>
-          <a:bodyPr wrap="none" lIns="0" tIns="0" rIns="0" bIns="0" rtlCol="0" anchor="t"/>
-          <a:lstStyle/>
-          <a:p>
-            <a:pPr marL="0" indent="0" algn="ctr">
-              <a:lnSpc>
-                <a:spcPts val="2750"/>
-              </a:lnSpc>
-              <a:buNone/>
-            </a:pPr>
-            <a:r>
-              <a:rPr lang="en-US" sz="1700" b="1" dirty="0">
-                <a:solidFill>
-                  <a:srgbClr val="D7D4CC"/>
-                </a:solidFill>
-                <a:latin typeface="Comfortaa Bold" pitchFamily="34" charset="0"/>
-                <a:ea typeface="Comfortaa Bold" pitchFamily="34" charset="-122"/>
-                <a:cs typeface="Comfortaa Bold" pitchFamily="34" charset="-120"/>
-              </a:rPr>
-              <a:t>3</a:t>
-            </a:r>
-            <a:endParaRPr lang="en-US" sz="1700" dirty="0"/>
-          </a:p>
-        </p:txBody>
-      </p:sp>
-      <p:sp>
-        <p:nvSpPr>
-          <p:cNvPr id="15" name="Text 13"/>
-          <p:cNvSpPr/>
-          <p:nvPr/>
-        </p:nvSpPr>
-        <p:spPr>
-          <a:xfrm>
-            <a:off x="4880967" y="3959662"/>
-            <a:ext cx="2193250" cy="216694"/>
-          </a:xfrm>
-          <a:prstGeom prst="rect">
-            <a:avLst/>
-          </a:prstGeom>
-          <a:noFill/>
-          <a:ln/>
-        </p:spPr>
-        <p:txBody>
-          <a:bodyPr wrap="none" lIns="0" tIns="0" rIns="0" bIns="0" rtlCol="0" anchor="t"/>
-          <a:lstStyle/>
-          <a:p>
-            <a:pPr marL="0" indent="0" algn="l">
-              <a:lnSpc>
-                <a:spcPts val="1700"/>
-              </a:lnSpc>
-              <a:buNone/>
-            </a:pPr>
-            <a:r>
-              <a:rPr lang="en-US" sz="1350" b="1" dirty="0">
-                <a:solidFill>
-                  <a:srgbClr val="D7D4CC"/>
-                </a:solidFill>
-                <a:latin typeface="Comfortaa Bold" pitchFamily="34" charset="0"/>
-                <a:ea typeface="Comfortaa Bold" pitchFamily="34" charset="-122"/>
-                <a:cs typeface="Comfortaa Bold" pitchFamily="34" charset="-120"/>
-              </a:rPr>
-              <a:t>Estructura i planificació</a:t>
-            </a:r>
-            <a:endParaRPr lang="en-US" sz="1350" dirty="0"/>
-          </a:p>
-        </p:txBody>
-      </p:sp>
-      <p:sp>
-        <p:nvSpPr>
-          <p:cNvPr id="16" name="Text 14"/>
-          <p:cNvSpPr/>
-          <p:nvPr/>
-        </p:nvSpPr>
-        <p:spPr>
-          <a:xfrm>
-            <a:off x="4880967" y="4269938"/>
-            <a:ext cx="8753594" cy="499110"/>
-          </a:xfrm>
-          <a:prstGeom prst="rect">
-            <a:avLst/>
-          </a:prstGeom>
-          <a:noFill/>
-          <a:ln/>
-        </p:spPr>
-        <p:txBody>
-          <a:bodyPr wrap="square" lIns="0" tIns="0" rIns="0" bIns="0" rtlCol="0" anchor="t"/>
-          <a:lstStyle/>
-          <a:p>
-            <a:pPr marL="0" indent="0" algn="l">
-              <a:lnSpc>
-                <a:spcPts val="1950"/>
-              </a:lnSpc>
-              <a:buNone/>
-            </a:pPr>
-            <a:r>
-              <a:rPr lang="en-US" sz="1200" dirty="0">
-                <a:solidFill>
-                  <a:srgbClr val="D7D4CC"/>
-                </a:solidFill>
-                <a:latin typeface="Raleway Medium" pitchFamily="34" charset="0"/>
-                <a:ea typeface="Raleway Medium" pitchFamily="34" charset="-122"/>
-                <a:cs typeface="Raleway Medium" pitchFamily="34" charset="-120"/>
-              </a:rPr>
-              <a:t>Arquitectura del projecte (frontend/backend), tecnologies utilitzades, planificació temporal per setmanes, distribució d'hores per activitat, fases de desenvolupament i entregables intermedis</a:t>
-            </a:r>
-            <a:endParaRPr lang="en-US" sz="1200" dirty="0"/>
-          </a:p>
-        </p:txBody>
-      </p:sp>
-      <p:sp>
-        <p:nvSpPr>
-          <p:cNvPr id="17" name="Shape 15"/>
-          <p:cNvSpPr/>
-          <p:nvPr/>
-        </p:nvSpPr>
-        <p:spPr>
-          <a:xfrm>
-            <a:off x="4802981" y="4915495"/>
-            <a:ext cx="8909566" cy="11430"/>
-          </a:xfrm>
-          <a:prstGeom prst="roundRect">
-            <a:avLst>
-              <a:gd name="adj" fmla="val 2047152"/>
-            </a:avLst>
-          </a:prstGeom>
-          <a:solidFill>
-            <a:srgbClr val="5F5F63"/>
-          </a:solidFill>
-          <a:ln/>
-        </p:spPr>
-        <p:txBody>
-          <a:bodyPr/>
-          <a:lstStyle/>
-          <a:p>
-            <a:endParaRPr lang="es-ES"/>
-          </a:p>
-        </p:txBody>
-      </p:sp>
-      <p:sp>
-        <p:nvSpPr>
-          <p:cNvPr id="18" name="Shape 16"/>
-          <p:cNvSpPr/>
-          <p:nvPr/>
-        </p:nvSpPr>
-        <p:spPr>
-          <a:xfrm>
-            <a:off x="839867" y="5003006"/>
-            <a:ext cx="5180171" cy="1121331"/>
-          </a:xfrm>
-          <a:prstGeom prst="roundRect">
-            <a:avLst>
-              <a:gd name="adj" fmla="val 20867"/>
-            </a:avLst>
-          </a:prstGeom>
-          <a:solidFill>
-            <a:srgbClr val="46464A"/>
-          </a:solidFill>
-          <a:ln/>
-        </p:spPr>
-        <p:txBody>
-          <a:bodyPr/>
-          <a:lstStyle/>
-          <a:p>
-            <a:endParaRPr lang="es-ES"/>
-          </a:p>
-        </p:txBody>
-      </p:sp>
-      <p:sp>
-        <p:nvSpPr>
-          <p:cNvPr id="19" name="Text 17"/>
-          <p:cNvSpPr/>
-          <p:nvPr/>
-        </p:nvSpPr>
-        <p:spPr>
-          <a:xfrm>
-            <a:off x="3320296" y="5426512"/>
-            <a:ext cx="219313" cy="274201"/>
-          </a:xfrm>
-          <a:prstGeom prst="rect">
-            <a:avLst/>
-          </a:prstGeom>
-          <a:noFill/>
-          <a:ln/>
-        </p:spPr>
-        <p:txBody>
-          <a:bodyPr wrap="none" lIns="0" tIns="0" rIns="0" bIns="0" rtlCol="0" anchor="t"/>
-          <a:lstStyle/>
-          <a:p>
-            <a:pPr marL="0" indent="0" algn="ctr">
-              <a:lnSpc>
-                <a:spcPts val="2750"/>
-              </a:lnSpc>
-              <a:buNone/>
-            </a:pPr>
-            <a:r>
-              <a:rPr lang="en-US" sz="1700" b="1" dirty="0">
-                <a:solidFill>
-                  <a:srgbClr val="D7D4CC"/>
-                </a:solidFill>
-                <a:latin typeface="Comfortaa Bold" pitchFamily="34" charset="0"/>
-                <a:ea typeface="Comfortaa Bold" pitchFamily="34" charset="-122"/>
-                <a:cs typeface="Comfortaa Bold" pitchFamily="34" charset="-120"/>
-              </a:rPr>
-              <a:t>4</a:t>
-            </a:r>
-            <a:endParaRPr lang="en-US" sz="1700" dirty="0"/>
-          </a:p>
-        </p:txBody>
-      </p:sp>
-      <p:sp>
-        <p:nvSpPr>
-          <p:cNvPr id="20" name="Text 18"/>
-          <p:cNvSpPr/>
-          <p:nvPr/>
-        </p:nvSpPr>
-        <p:spPr>
-          <a:xfrm>
-            <a:off x="6176010" y="5158978"/>
-            <a:ext cx="1733193" cy="216694"/>
-          </a:xfrm>
-          <a:prstGeom prst="rect">
-            <a:avLst/>
-          </a:prstGeom>
-          <a:noFill/>
-          <a:ln/>
-        </p:spPr>
-        <p:txBody>
-          <a:bodyPr wrap="none" lIns="0" tIns="0" rIns="0" bIns="0" rtlCol="0" anchor="t"/>
-          <a:lstStyle/>
-          <a:p>
-            <a:pPr marL="0" indent="0" algn="l">
-              <a:lnSpc>
-                <a:spcPts val="1700"/>
-              </a:lnSpc>
-              <a:buNone/>
-            </a:pPr>
-            <a:r>
-              <a:rPr lang="en-US" sz="1350" b="1" dirty="0">
-                <a:solidFill>
-                  <a:srgbClr val="D7D4CC"/>
-                </a:solidFill>
-                <a:latin typeface="Comfortaa Bold" pitchFamily="34" charset="0"/>
-                <a:ea typeface="Comfortaa Bold" pitchFamily="34" charset="-122"/>
-                <a:cs typeface="Comfortaa Bold" pitchFamily="34" charset="-120"/>
-              </a:rPr>
-              <a:t>Blocs de treball</a:t>
-            </a:r>
-            <a:endParaRPr lang="en-US" sz="1350" dirty="0"/>
-          </a:p>
-        </p:txBody>
-      </p:sp>
-      <p:sp>
-        <p:nvSpPr>
-          <p:cNvPr id="21" name="Text 19"/>
-          <p:cNvSpPr/>
-          <p:nvPr/>
-        </p:nvSpPr>
-        <p:spPr>
-          <a:xfrm>
-            <a:off x="6176010" y="5469255"/>
-            <a:ext cx="7458551" cy="499110"/>
-          </a:xfrm>
-          <a:prstGeom prst="rect">
-            <a:avLst/>
-          </a:prstGeom>
-          <a:noFill/>
-          <a:ln/>
-        </p:spPr>
-        <p:txBody>
-          <a:bodyPr wrap="square" lIns="0" tIns="0" rIns="0" bIns="0" rtlCol="0" anchor="t"/>
-          <a:lstStyle/>
-          <a:p>
-            <a:pPr marL="0" indent="0" algn="l">
-              <a:lnSpc>
-                <a:spcPts val="1950"/>
-              </a:lnSpc>
-              <a:buNone/>
-            </a:pPr>
-            <a:r>
-              <a:rPr lang="en-US" sz="1200" dirty="0">
-                <a:solidFill>
-                  <a:srgbClr val="D7D4CC"/>
-                </a:solidFill>
-                <a:latin typeface="Raleway Medium" pitchFamily="34" charset="0"/>
-                <a:ea typeface="Raleway Medium" pitchFamily="34" charset="-122"/>
-                <a:cs typeface="Raleway Medium" pitchFamily="34" charset="-120"/>
-              </a:rPr>
-              <a:t>Bloc 1: Anàlisi de requisits i usuaris, Bloc 2: Disseny d'interfície i wireframes, Bloc 3: Estructura HTML semàntica, Bloc 4: Estils CSS i responsive design, Blocs 5-7: JavaScript, APIs i integració</a:t>
-            </a:r>
-            <a:endParaRPr lang="en-US" sz="1200" dirty="0"/>
-          </a:p>
-        </p:txBody>
-      </p:sp>
-      <p:sp>
-        <p:nvSpPr>
-          <p:cNvPr id="22" name="Shape 20"/>
-          <p:cNvSpPr/>
-          <p:nvPr/>
-        </p:nvSpPr>
-        <p:spPr>
-          <a:xfrm>
-            <a:off x="6098024" y="6114812"/>
-            <a:ext cx="7614523" cy="11430"/>
-          </a:xfrm>
-          <a:prstGeom prst="roundRect">
-            <a:avLst>
-              <a:gd name="adj" fmla="val 2047152"/>
-            </a:avLst>
-          </a:prstGeom>
-          <a:solidFill>
-            <a:srgbClr val="5F5F63"/>
-          </a:solidFill>
-          <a:ln/>
-        </p:spPr>
-        <p:txBody>
-          <a:bodyPr/>
-          <a:lstStyle/>
-          <a:p>
-            <a:endParaRPr lang="es-ES"/>
-          </a:p>
-        </p:txBody>
-      </p:sp>
-      <p:sp>
-        <p:nvSpPr>
-          <p:cNvPr id="23" name="Shape 21"/>
-          <p:cNvSpPr/>
-          <p:nvPr/>
-        </p:nvSpPr>
-        <p:spPr>
-          <a:xfrm>
-            <a:off x="839867" y="6202323"/>
-            <a:ext cx="6475333" cy="1370886"/>
-          </a:xfrm>
-          <a:prstGeom prst="roundRect">
-            <a:avLst>
-              <a:gd name="adj" fmla="val 17068"/>
-            </a:avLst>
-          </a:prstGeom>
-          <a:solidFill>
-            <a:srgbClr val="46464A"/>
-          </a:solidFill>
-          <a:ln/>
-        </p:spPr>
-        <p:txBody>
-          <a:bodyPr/>
-          <a:lstStyle/>
-          <a:p>
-            <a:endParaRPr lang="es-ES"/>
-          </a:p>
-        </p:txBody>
-      </p:sp>
-      <p:sp>
-        <p:nvSpPr>
-          <p:cNvPr id="24" name="Text 22"/>
-          <p:cNvSpPr/>
-          <p:nvPr/>
-        </p:nvSpPr>
-        <p:spPr>
-          <a:xfrm>
-            <a:off x="3967877" y="6750606"/>
-            <a:ext cx="219313" cy="274201"/>
-          </a:xfrm>
-          <a:prstGeom prst="rect">
-            <a:avLst/>
-          </a:prstGeom>
-          <a:noFill/>
-          <a:ln/>
-        </p:spPr>
-        <p:txBody>
-          <a:bodyPr wrap="none" lIns="0" tIns="0" rIns="0" bIns="0" rtlCol="0" anchor="t"/>
-          <a:lstStyle/>
-          <a:p>
-            <a:pPr marL="0" indent="0" algn="ctr">
-              <a:lnSpc>
-                <a:spcPts val="2750"/>
-              </a:lnSpc>
-              <a:buNone/>
-            </a:pPr>
-            <a:r>
-              <a:rPr lang="en-US" sz="1700" b="1" dirty="0">
-                <a:solidFill>
-                  <a:srgbClr val="D7D4CC"/>
-                </a:solidFill>
-                <a:latin typeface="Comfortaa Bold" pitchFamily="34" charset="0"/>
-                <a:ea typeface="Comfortaa Bold" pitchFamily="34" charset="-122"/>
-                <a:cs typeface="Comfortaa Bold" pitchFamily="34" charset="-120"/>
-              </a:rPr>
-              <a:t>5</a:t>
-            </a:r>
-            <a:endParaRPr lang="en-US" sz="1700" dirty="0"/>
-          </a:p>
-        </p:txBody>
-      </p:sp>
-      <p:sp>
-        <p:nvSpPr>
-          <p:cNvPr id="25" name="Text 23"/>
-          <p:cNvSpPr/>
-          <p:nvPr/>
-        </p:nvSpPr>
-        <p:spPr>
-          <a:xfrm>
-            <a:off x="7471172" y="6358295"/>
-            <a:ext cx="1915001" cy="216694"/>
-          </a:xfrm>
-          <a:prstGeom prst="rect">
-            <a:avLst/>
-          </a:prstGeom>
-          <a:noFill/>
-          <a:ln/>
-        </p:spPr>
-        <p:txBody>
-          <a:bodyPr wrap="none" lIns="0" tIns="0" rIns="0" bIns="0" rtlCol="0" anchor="t"/>
-          <a:lstStyle/>
-          <a:p>
-            <a:pPr marL="0" indent="0" algn="l">
-              <a:lnSpc>
-                <a:spcPts val="1700"/>
-              </a:lnSpc>
-              <a:buNone/>
-            </a:pPr>
-            <a:r>
-              <a:rPr lang="en-US" sz="1350" b="1" dirty="0">
-                <a:solidFill>
-                  <a:srgbClr val="D7D4CC"/>
-                </a:solidFill>
-                <a:latin typeface="Comfortaa Bold" pitchFamily="34" charset="0"/>
-                <a:ea typeface="Comfortaa Bold" pitchFamily="34" charset="-122"/>
-                <a:cs typeface="Comfortaa Bold" pitchFamily="34" charset="-120"/>
-              </a:rPr>
-              <a:t>Fase final i avaluació</a:t>
-            </a:r>
-            <a:endParaRPr lang="en-US" sz="1350" dirty="0"/>
-          </a:p>
-        </p:txBody>
-      </p:sp>
-      <p:sp>
-        <p:nvSpPr>
-          <p:cNvPr id="26" name="Text 24"/>
-          <p:cNvSpPr/>
-          <p:nvPr/>
-        </p:nvSpPr>
-        <p:spPr>
-          <a:xfrm>
-            <a:off x="7471172" y="6668572"/>
-            <a:ext cx="6163389" cy="748665"/>
-          </a:xfrm>
-          <a:prstGeom prst="rect">
-            <a:avLst/>
-          </a:prstGeom>
-          <a:noFill/>
-          <a:ln/>
-        </p:spPr>
-        <p:txBody>
-          <a:bodyPr wrap="square" lIns="0" tIns="0" rIns="0" bIns="0" rtlCol="0" anchor="t"/>
-          <a:lstStyle/>
-          <a:p>
-            <a:pPr marL="0" indent="0" algn="l">
-              <a:lnSpc>
-                <a:spcPts val="1950"/>
-              </a:lnSpc>
-              <a:buNone/>
-            </a:pPr>
-            <a:r>
-              <a:rPr lang="en-US" sz="1200" dirty="0">
-                <a:solidFill>
-                  <a:srgbClr val="D7D4CC"/>
-                </a:solidFill>
-                <a:latin typeface="Raleway Medium" pitchFamily="34" charset="0"/>
-                <a:ea typeface="Raleway Medium" pitchFamily="34" charset="-122"/>
-                <a:cs typeface="Raleway Medium" pitchFamily="34" charset="-120"/>
-              </a:rPr>
-              <a:t>Integració de components, testeig d'usabilitat, instruccions d'instal·lació i desplegament, criteris d'avaluació específics, instruments d'avaluació (rúbriques) i percentatges de qualificació per activitat</a:t>
-            </a:r>
-            <a:endParaRPr lang="en-US" sz="1200" dirty="0"/>
           </a:p>
         </p:txBody>
       </p:sp>
@@ -35548,7 +38275,7 @@
                 <a:ea typeface="Raleway Medium" pitchFamily="34" charset="-122"/>
                 <a:cs typeface="Raleway Medium" pitchFamily="34" charset="-120"/>
               </a:rPr>
-              <a:t>.2.2. Definició d'estils </a:t>
+              <a:t>2.2. Definició d'estils </a:t>
             </a:r>
             <a:r>
               <a:rPr lang="en-US" sz="1100" dirty="0" err="1">
@@ -35694,7 +38421,7 @@
                 <a:ea typeface="Raleway Medium" pitchFamily="34" charset="-122"/>
                 <a:cs typeface="Raleway Medium" pitchFamily="34" charset="-120"/>
               </a:rPr>
-              <a:t>.2.7. Creació de classes </a:t>
+              <a:t>2.7. Creació de classes </a:t>
             </a:r>
             <a:r>
               <a:rPr lang="en-US" sz="1100" dirty="0" err="1">
